--- a/figures/fig1/fig1.pptx
+++ b/figures/fig1/fig1.pptx
@@ -5,9 +5,9 @@
     <p:sldMasterId id="2147483648" r:id="rId1"/>
   </p:sldMasterIdLst>
   <p:sldIdLst>
-    <p:sldId id="256" r:id="rId7"/>
+    <p:sldId id="256" r:id="rId2"/>
   </p:sldIdLst>
-  <p:sldSz cx="5940000" cy="5688000" type="screen4x3"/>
+  <p:sldSz cx="5940425" cy="5688013"/>
   <p:notesSz cx="6858000" cy="9144000"/>
   <p:defaultTextStyle>
     <a:defPPr>
@@ -104,6 +104,22 @@
       </a:defRPr>
     </a:lvl9pPr>
   </p:defaultTextStyle>
+  <p:extLst>
+    <p:ext uri="{EFAFB233-063F-42B5-8137-9DF3F51BA10A}">
+      <p15:sldGuideLst xmlns:p15="http://schemas.microsoft.com/office/powerpoint/2012/main">
+        <p15:guide id="1" orient="horz" pos="2160">
+          <p15:clr>
+            <a:srgbClr val="A4A3A4"/>
+          </p15:clr>
+        </p15:guide>
+        <p15:guide id="2" pos="2880">
+          <p15:clr>
+            <a:srgbClr val="A4A3A4"/>
+          </p15:clr>
+        </p15:guide>
+      </p15:sldGuideLst>
+    </p:ext>
+  </p:extLst>
 </p:presentation>
 </file>
 
@@ -145,10 +161,9 @@
           <a:lstStyle/>
           <a:p>
             <a:r>
-              <a:rPr lang="en-US" smtClean="0"/>
+              <a:rPr lang="en-US"/>
               <a:t>Click to edit Master title style</a:t>
             </a:r>
-            <a:endParaRPr lang="en-US"/>
           </a:p>
         </p:txBody>
       </p:sp>
@@ -264,10 +279,9 @@
           </a:lstStyle>
           <a:p>
             <a:r>
-              <a:rPr lang="en-US" smtClean="0"/>
+              <a:rPr lang="en-US"/>
               <a:t>Click to edit Master subtitle style</a:t>
             </a:r>
-            <a:endParaRPr lang="en-US"/>
           </a:p>
         </p:txBody>
       </p:sp>
@@ -288,7 +302,7 @@
           <a:p>
             <a:fld id="{5BCAD085-E8A6-8845-BD4E-CB4CCA059FC4}" type="datetimeFigureOut">
               <a:rPr lang="en-US" smtClean="0"/>
-              <a:t>1/27/13</a:t>
+              <a:t>10/15/2026</a:t>
             </a:fld>
             <a:endParaRPr lang="en-US"/>
           </a:p>
@@ -382,10 +396,9 @@
           <a:lstStyle/>
           <a:p>
             <a:r>
-              <a:rPr lang="en-US" smtClean="0"/>
+              <a:rPr lang="en-US"/>
               <a:t>Click to edit Master title style</a:t>
             </a:r>
-            <a:endParaRPr lang="en-US"/>
           </a:p>
         </p:txBody>
       </p:sp>
@@ -406,38 +419,37 @@
           <a:p>
             <a:pPr lvl="0"/>
             <a:r>
-              <a:rPr lang="en-US" smtClean="0"/>
+              <a:rPr lang="en-US"/>
               <a:t>Click to edit Master text styles</a:t>
             </a:r>
           </a:p>
           <a:p>
             <a:pPr lvl="1"/>
             <a:r>
-              <a:rPr lang="en-US" smtClean="0"/>
+              <a:rPr lang="en-US"/>
               <a:t>Second level</a:t>
             </a:r>
           </a:p>
           <a:p>
             <a:pPr lvl="2"/>
             <a:r>
-              <a:rPr lang="en-US" smtClean="0"/>
+              <a:rPr lang="en-US"/>
               <a:t>Third level</a:t>
             </a:r>
           </a:p>
           <a:p>
             <a:pPr lvl="3"/>
             <a:r>
-              <a:rPr lang="en-US" smtClean="0"/>
+              <a:rPr lang="en-US"/>
               <a:t>Fourth level</a:t>
             </a:r>
           </a:p>
           <a:p>
             <a:pPr lvl="4"/>
             <a:r>
-              <a:rPr lang="en-US" smtClean="0"/>
+              <a:rPr lang="en-US"/>
               <a:t>Fifth level</a:t>
             </a:r>
-            <a:endParaRPr lang="en-US"/>
           </a:p>
         </p:txBody>
       </p:sp>
@@ -458,7 +470,7 @@
           <a:p>
             <a:fld id="{5BCAD085-E8A6-8845-BD4E-CB4CCA059FC4}" type="datetimeFigureOut">
               <a:rPr lang="en-US" smtClean="0"/>
-              <a:t>1/27/13</a:t>
+              <a:t>10/15/2026</a:t>
             </a:fld>
             <a:endParaRPr lang="en-US"/>
           </a:p>
@@ -557,10 +569,9 @@
           <a:lstStyle/>
           <a:p>
             <a:r>
-              <a:rPr lang="en-US" smtClean="0"/>
+              <a:rPr lang="en-US"/>
               <a:t>Click to edit Master title style</a:t>
             </a:r>
-            <a:endParaRPr lang="en-US"/>
           </a:p>
         </p:txBody>
       </p:sp>
@@ -586,38 +597,37 @@
           <a:p>
             <a:pPr lvl="0"/>
             <a:r>
-              <a:rPr lang="en-US" smtClean="0"/>
+              <a:rPr lang="en-US"/>
               <a:t>Click to edit Master text styles</a:t>
             </a:r>
           </a:p>
           <a:p>
             <a:pPr lvl="1"/>
             <a:r>
-              <a:rPr lang="en-US" smtClean="0"/>
+              <a:rPr lang="en-US"/>
               <a:t>Second level</a:t>
             </a:r>
           </a:p>
           <a:p>
             <a:pPr lvl="2"/>
             <a:r>
-              <a:rPr lang="en-US" smtClean="0"/>
+              <a:rPr lang="en-US"/>
               <a:t>Third level</a:t>
             </a:r>
           </a:p>
           <a:p>
             <a:pPr lvl="3"/>
             <a:r>
-              <a:rPr lang="en-US" smtClean="0"/>
+              <a:rPr lang="en-US"/>
               <a:t>Fourth level</a:t>
             </a:r>
           </a:p>
           <a:p>
             <a:pPr lvl="4"/>
             <a:r>
-              <a:rPr lang="en-US" smtClean="0"/>
+              <a:rPr lang="en-US"/>
               <a:t>Fifth level</a:t>
             </a:r>
-            <a:endParaRPr lang="en-US"/>
           </a:p>
         </p:txBody>
       </p:sp>
@@ -638,7 +648,7 @@
           <a:p>
             <a:fld id="{5BCAD085-E8A6-8845-BD4E-CB4CCA059FC4}" type="datetimeFigureOut">
               <a:rPr lang="en-US" smtClean="0"/>
-              <a:t>1/27/13</a:t>
+              <a:t>10/15/2026</a:t>
             </a:fld>
             <a:endParaRPr lang="en-US"/>
           </a:p>
@@ -732,10 +742,9 @@
           <a:lstStyle/>
           <a:p>
             <a:r>
-              <a:rPr lang="en-US" smtClean="0"/>
+              <a:rPr lang="en-US"/>
               <a:t>Click to edit Master title style</a:t>
             </a:r>
-            <a:endParaRPr lang="en-US"/>
           </a:p>
         </p:txBody>
       </p:sp>
@@ -756,38 +765,37 @@
           <a:p>
             <a:pPr lvl="0"/>
             <a:r>
-              <a:rPr lang="en-US" smtClean="0"/>
+              <a:rPr lang="en-US"/>
               <a:t>Click to edit Master text styles</a:t>
             </a:r>
           </a:p>
           <a:p>
             <a:pPr lvl="1"/>
             <a:r>
-              <a:rPr lang="en-US" smtClean="0"/>
+              <a:rPr lang="en-US"/>
               <a:t>Second level</a:t>
             </a:r>
           </a:p>
           <a:p>
             <a:pPr lvl="2"/>
             <a:r>
-              <a:rPr lang="en-US" smtClean="0"/>
+              <a:rPr lang="en-US"/>
               <a:t>Third level</a:t>
             </a:r>
           </a:p>
           <a:p>
             <a:pPr lvl="3"/>
             <a:r>
-              <a:rPr lang="en-US" smtClean="0"/>
+              <a:rPr lang="en-US"/>
               <a:t>Fourth level</a:t>
             </a:r>
           </a:p>
           <a:p>
             <a:pPr lvl="4"/>
             <a:r>
-              <a:rPr lang="en-US" smtClean="0"/>
+              <a:rPr lang="en-US"/>
               <a:t>Fifth level</a:t>
             </a:r>
-            <a:endParaRPr lang="en-US"/>
           </a:p>
         </p:txBody>
       </p:sp>
@@ -808,7 +816,7 @@
           <a:p>
             <a:fld id="{5BCAD085-E8A6-8845-BD4E-CB4CCA059FC4}" type="datetimeFigureOut">
               <a:rPr lang="en-US" smtClean="0"/>
-              <a:t>1/27/13</a:t>
+              <a:t>10/15/2026</a:t>
             </a:fld>
             <a:endParaRPr lang="en-US"/>
           </a:p>
@@ -911,10 +919,9 @@
           </a:lstStyle>
           <a:p>
             <a:r>
-              <a:rPr lang="en-US" smtClean="0"/>
+              <a:rPr lang="en-US"/>
               <a:t>Click to edit Master title style</a:t>
             </a:r>
-            <a:endParaRPr lang="en-US"/>
           </a:p>
         </p:txBody>
       </p:sp>
@@ -1031,7 +1038,7 @@
           <a:p>
             <a:pPr lvl="0"/>
             <a:r>
-              <a:rPr lang="en-US" smtClean="0"/>
+              <a:rPr lang="en-US"/>
               <a:t>Click to edit Master text styles</a:t>
             </a:r>
           </a:p>
@@ -1054,7 +1061,7 @@
           <a:p>
             <a:fld id="{5BCAD085-E8A6-8845-BD4E-CB4CCA059FC4}" type="datetimeFigureOut">
               <a:rPr lang="en-US" smtClean="0"/>
-              <a:t>1/27/13</a:t>
+              <a:t>10/15/2026</a:t>
             </a:fld>
             <a:endParaRPr lang="en-US"/>
           </a:p>
@@ -1148,10 +1155,9 @@
           <a:lstStyle/>
           <a:p>
             <a:r>
-              <a:rPr lang="en-US" smtClean="0"/>
+              <a:rPr lang="en-US"/>
               <a:t>Click to edit Master title style</a:t>
             </a:r>
-            <a:endParaRPr lang="en-US"/>
           </a:p>
         </p:txBody>
       </p:sp>
@@ -1205,38 +1211,37 @@
           <a:p>
             <a:pPr lvl="0"/>
             <a:r>
-              <a:rPr lang="en-US" smtClean="0"/>
+              <a:rPr lang="en-US"/>
               <a:t>Click to edit Master text styles</a:t>
             </a:r>
           </a:p>
           <a:p>
             <a:pPr lvl="1"/>
             <a:r>
-              <a:rPr lang="en-US" smtClean="0"/>
+              <a:rPr lang="en-US"/>
               <a:t>Second level</a:t>
             </a:r>
           </a:p>
           <a:p>
             <a:pPr lvl="2"/>
             <a:r>
-              <a:rPr lang="en-US" smtClean="0"/>
+              <a:rPr lang="en-US"/>
               <a:t>Third level</a:t>
             </a:r>
           </a:p>
           <a:p>
             <a:pPr lvl="3"/>
             <a:r>
-              <a:rPr lang="en-US" smtClean="0"/>
+              <a:rPr lang="en-US"/>
               <a:t>Fourth level</a:t>
             </a:r>
           </a:p>
           <a:p>
             <a:pPr lvl="4"/>
             <a:r>
-              <a:rPr lang="en-US" smtClean="0"/>
+              <a:rPr lang="en-US"/>
               <a:t>Fifth level</a:t>
             </a:r>
-            <a:endParaRPr lang="en-US"/>
           </a:p>
         </p:txBody>
       </p:sp>
@@ -1290,38 +1295,37 @@
           <a:p>
             <a:pPr lvl="0"/>
             <a:r>
-              <a:rPr lang="en-US" smtClean="0"/>
+              <a:rPr lang="en-US"/>
               <a:t>Click to edit Master text styles</a:t>
             </a:r>
           </a:p>
           <a:p>
             <a:pPr lvl="1"/>
             <a:r>
-              <a:rPr lang="en-US" smtClean="0"/>
+              <a:rPr lang="en-US"/>
               <a:t>Second level</a:t>
             </a:r>
           </a:p>
           <a:p>
             <a:pPr lvl="2"/>
             <a:r>
-              <a:rPr lang="en-US" smtClean="0"/>
+              <a:rPr lang="en-US"/>
               <a:t>Third level</a:t>
             </a:r>
           </a:p>
           <a:p>
             <a:pPr lvl="3"/>
             <a:r>
-              <a:rPr lang="en-US" smtClean="0"/>
+              <a:rPr lang="en-US"/>
               <a:t>Fourth level</a:t>
             </a:r>
           </a:p>
           <a:p>
             <a:pPr lvl="4"/>
             <a:r>
-              <a:rPr lang="en-US" smtClean="0"/>
+              <a:rPr lang="en-US"/>
               <a:t>Fifth level</a:t>
             </a:r>
-            <a:endParaRPr lang="en-US"/>
           </a:p>
         </p:txBody>
       </p:sp>
@@ -1342,7 +1346,7 @@
           <a:p>
             <a:fld id="{5BCAD085-E8A6-8845-BD4E-CB4CCA059FC4}" type="datetimeFigureOut">
               <a:rPr lang="en-US" smtClean="0"/>
-              <a:t>1/27/13</a:t>
+              <a:t>10/15/2026</a:t>
             </a:fld>
             <a:endParaRPr lang="en-US"/>
           </a:p>
@@ -1440,10 +1444,9 @@
           </a:lstStyle>
           <a:p>
             <a:r>
-              <a:rPr lang="en-US" smtClean="0"/>
+              <a:rPr lang="en-US"/>
               <a:t>Click to edit Master title style</a:t>
             </a:r>
-            <a:endParaRPr lang="en-US"/>
           </a:p>
         </p:txBody>
       </p:sp>
@@ -1506,7 +1509,7 @@
           <a:p>
             <a:pPr lvl="0"/>
             <a:r>
-              <a:rPr lang="en-US" smtClean="0"/>
+              <a:rPr lang="en-US"/>
               <a:t>Click to edit Master text styles</a:t>
             </a:r>
           </a:p>
@@ -1562,38 +1565,37 @@
           <a:p>
             <a:pPr lvl="0"/>
             <a:r>
-              <a:rPr lang="en-US" smtClean="0"/>
+              <a:rPr lang="en-US"/>
               <a:t>Click to edit Master text styles</a:t>
             </a:r>
           </a:p>
           <a:p>
             <a:pPr lvl="1"/>
             <a:r>
-              <a:rPr lang="en-US" smtClean="0"/>
+              <a:rPr lang="en-US"/>
               <a:t>Second level</a:t>
             </a:r>
           </a:p>
           <a:p>
             <a:pPr lvl="2"/>
             <a:r>
-              <a:rPr lang="en-US" smtClean="0"/>
+              <a:rPr lang="en-US"/>
               <a:t>Third level</a:t>
             </a:r>
           </a:p>
           <a:p>
             <a:pPr lvl="3"/>
             <a:r>
-              <a:rPr lang="en-US" smtClean="0"/>
+              <a:rPr lang="en-US"/>
               <a:t>Fourth level</a:t>
             </a:r>
           </a:p>
           <a:p>
             <a:pPr lvl="4"/>
             <a:r>
-              <a:rPr lang="en-US" smtClean="0"/>
+              <a:rPr lang="en-US"/>
               <a:t>Fifth level</a:t>
             </a:r>
-            <a:endParaRPr lang="en-US"/>
           </a:p>
         </p:txBody>
       </p:sp>
@@ -1656,7 +1658,7 @@
           <a:p>
             <a:pPr lvl="0"/>
             <a:r>
-              <a:rPr lang="en-US" smtClean="0"/>
+              <a:rPr lang="en-US"/>
               <a:t>Click to edit Master text styles</a:t>
             </a:r>
           </a:p>
@@ -1712,38 +1714,37 @@
           <a:p>
             <a:pPr lvl="0"/>
             <a:r>
-              <a:rPr lang="en-US" smtClean="0"/>
+              <a:rPr lang="en-US"/>
               <a:t>Click to edit Master text styles</a:t>
             </a:r>
           </a:p>
           <a:p>
             <a:pPr lvl="1"/>
             <a:r>
-              <a:rPr lang="en-US" smtClean="0"/>
+              <a:rPr lang="en-US"/>
               <a:t>Second level</a:t>
             </a:r>
           </a:p>
           <a:p>
             <a:pPr lvl="2"/>
             <a:r>
-              <a:rPr lang="en-US" smtClean="0"/>
+              <a:rPr lang="en-US"/>
               <a:t>Third level</a:t>
             </a:r>
           </a:p>
           <a:p>
             <a:pPr lvl="3"/>
             <a:r>
-              <a:rPr lang="en-US" smtClean="0"/>
+              <a:rPr lang="en-US"/>
               <a:t>Fourth level</a:t>
             </a:r>
           </a:p>
           <a:p>
             <a:pPr lvl="4"/>
             <a:r>
-              <a:rPr lang="en-US" smtClean="0"/>
+              <a:rPr lang="en-US"/>
               <a:t>Fifth level</a:t>
             </a:r>
-            <a:endParaRPr lang="en-US"/>
           </a:p>
         </p:txBody>
       </p:sp>
@@ -1764,7 +1765,7 @@
           <a:p>
             <a:fld id="{5BCAD085-E8A6-8845-BD4E-CB4CCA059FC4}" type="datetimeFigureOut">
               <a:rPr lang="en-US" smtClean="0"/>
-              <a:t>1/27/13</a:t>
+              <a:t>10/15/2026</a:t>
             </a:fld>
             <a:endParaRPr lang="en-US"/>
           </a:p>
@@ -1858,10 +1859,9 @@
           <a:lstStyle/>
           <a:p>
             <a:r>
-              <a:rPr lang="en-US" smtClean="0"/>
+              <a:rPr lang="en-US"/>
               <a:t>Click to edit Master title style</a:t>
             </a:r>
-            <a:endParaRPr lang="en-US"/>
           </a:p>
         </p:txBody>
       </p:sp>
@@ -1882,7 +1882,7 @@
           <a:p>
             <a:fld id="{5BCAD085-E8A6-8845-BD4E-CB4CCA059FC4}" type="datetimeFigureOut">
               <a:rPr lang="en-US" smtClean="0"/>
-              <a:t>1/27/13</a:t>
+              <a:t>10/15/2026</a:t>
             </a:fld>
             <a:endParaRPr lang="en-US"/>
           </a:p>
@@ -1977,7 +1977,7 @@
           <a:p>
             <a:fld id="{5BCAD085-E8A6-8845-BD4E-CB4CCA059FC4}" type="datetimeFigureOut">
               <a:rPr lang="en-US" smtClean="0"/>
-              <a:t>1/27/13</a:t>
+              <a:t>10/15/2026</a:t>
             </a:fld>
             <a:endParaRPr lang="en-US"/>
           </a:p>
@@ -2080,10 +2080,9 @@
           </a:lstStyle>
           <a:p>
             <a:r>
-              <a:rPr lang="en-US" smtClean="0"/>
+              <a:rPr lang="en-US"/>
               <a:t>Click to edit Master title style</a:t>
             </a:r>
-            <a:endParaRPr lang="en-US"/>
           </a:p>
         </p:txBody>
       </p:sp>
@@ -2137,38 +2136,37 @@
           <a:p>
             <a:pPr lvl="0"/>
             <a:r>
-              <a:rPr lang="en-US" smtClean="0"/>
+              <a:rPr lang="en-US"/>
               <a:t>Click to edit Master text styles</a:t>
             </a:r>
           </a:p>
           <a:p>
             <a:pPr lvl="1"/>
             <a:r>
-              <a:rPr lang="en-US" smtClean="0"/>
+              <a:rPr lang="en-US"/>
               <a:t>Second level</a:t>
             </a:r>
           </a:p>
           <a:p>
             <a:pPr lvl="2"/>
             <a:r>
-              <a:rPr lang="en-US" smtClean="0"/>
+              <a:rPr lang="en-US"/>
               <a:t>Third level</a:t>
             </a:r>
           </a:p>
           <a:p>
             <a:pPr lvl="3"/>
             <a:r>
-              <a:rPr lang="en-US" smtClean="0"/>
+              <a:rPr lang="en-US"/>
               <a:t>Fourth level</a:t>
             </a:r>
           </a:p>
           <a:p>
             <a:pPr lvl="4"/>
             <a:r>
-              <a:rPr lang="en-US" smtClean="0"/>
+              <a:rPr lang="en-US"/>
               <a:t>Fifth level</a:t>
             </a:r>
-            <a:endParaRPr lang="en-US"/>
           </a:p>
         </p:txBody>
       </p:sp>
@@ -2231,7 +2229,7 @@
           <a:p>
             <a:pPr lvl="0"/>
             <a:r>
-              <a:rPr lang="en-US" smtClean="0"/>
+              <a:rPr lang="en-US"/>
               <a:t>Click to edit Master text styles</a:t>
             </a:r>
           </a:p>
@@ -2254,7 +2252,7 @@
           <a:p>
             <a:fld id="{5BCAD085-E8A6-8845-BD4E-CB4CCA059FC4}" type="datetimeFigureOut">
               <a:rPr lang="en-US" smtClean="0"/>
-              <a:t>1/27/13</a:t>
+              <a:t>10/15/2026</a:t>
             </a:fld>
             <a:endParaRPr lang="en-US"/>
           </a:p>
@@ -2357,10 +2355,9 @@
           </a:lstStyle>
           <a:p>
             <a:r>
-              <a:rPr lang="en-US" smtClean="0"/>
+              <a:rPr lang="en-US"/>
               <a:t>Click to edit Master title style</a:t>
             </a:r>
-            <a:endParaRPr lang="en-US"/>
           </a:p>
         </p:txBody>
       </p:sp>
@@ -2484,7 +2481,7 @@
           <a:p>
             <a:pPr lvl="0"/>
             <a:r>
-              <a:rPr lang="en-US" smtClean="0"/>
+              <a:rPr lang="en-US"/>
               <a:t>Click to edit Master text styles</a:t>
             </a:r>
           </a:p>
@@ -2507,7 +2504,7 @@
           <a:p>
             <a:fld id="{5BCAD085-E8A6-8845-BD4E-CB4CCA059FC4}" type="datetimeFigureOut">
               <a:rPr lang="en-US" smtClean="0"/>
-              <a:t>1/27/13</a:t>
+              <a:t>10/15/2026</a:t>
             </a:fld>
             <a:endParaRPr lang="en-US"/>
           </a:p>
@@ -2616,10 +2613,9 @@
           <a:lstStyle/>
           <a:p>
             <a:r>
-              <a:rPr lang="en-US" smtClean="0"/>
+              <a:rPr lang="en-US"/>
               <a:t>Click to edit Master title style</a:t>
             </a:r>
-            <a:endParaRPr lang="en-US"/>
           </a:p>
         </p:txBody>
       </p:sp>
@@ -2650,38 +2646,37 @@
           <a:p>
             <a:pPr lvl="0"/>
             <a:r>
-              <a:rPr lang="en-US" smtClean="0"/>
+              <a:rPr lang="en-US"/>
               <a:t>Click to edit Master text styles</a:t>
             </a:r>
           </a:p>
           <a:p>
             <a:pPr lvl="1"/>
             <a:r>
-              <a:rPr lang="en-US" smtClean="0"/>
+              <a:rPr lang="en-US"/>
               <a:t>Second level</a:t>
             </a:r>
           </a:p>
           <a:p>
             <a:pPr lvl="2"/>
             <a:r>
-              <a:rPr lang="en-US" smtClean="0"/>
+              <a:rPr lang="en-US"/>
               <a:t>Third level</a:t>
             </a:r>
           </a:p>
           <a:p>
             <a:pPr lvl="3"/>
             <a:r>
-              <a:rPr lang="en-US" smtClean="0"/>
+              <a:rPr lang="en-US"/>
               <a:t>Fourth level</a:t>
             </a:r>
           </a:p>
           <a:p>
             <a:pPr lvl="4"/>
             <a:r>
-              <a:rPr lang="en-US" smtClean="0"/>
+              <a:rPr lang="en-US"/>
               <a:t>Fifth level</a:t>
             </a:r>
-            <a:endParaRPr lang="en-US"/>
           </a:p>
         </p:txBody>
       </p:sp>
@@ -2720,7 +2715,7 @@
           <a:p>
             <a:fld id="{5BCAD085-E8A6-8845-BD4E-CB4CCA059FC4}" type="datetimeFigureOut">
               <a:rPr lang="en-US" smtClean="0"/>
-              <a:t>1/27/13</a:t>
+              <a:t>10/15/2026</a:t>
             </a:fld>
             <a:endParaRPr lang="en-US"/>
           </a:p>
@@ -3079,7 +3074,7 @@
 </file>
 
 <file path=ppt/slides/slide1.xml><?xml version="1.0" encoding="utf-8"?>
-<p:sld xmlns:a="http://schemas.openxmlformats.org/drawingml/2006/main" xmlns:p="http://schemas.openxmlformats.org/presentationml/2006/main" xmlns:r="http://schemas.openxmlformats.org/officeDocument/2006/relationships">
+<p:sld xmlns:a="http://schemas.openxmlformats.org/drawingml/2006/main" xmlns:r="http://schemas.openxmlformats.org/officeDocument/2006/relationships" xmlns:p="http://schemas.openxmlformats.org/presentationml/2006/main">
   <p:cSld>
     <p:spTree>
       <p:nvGrpSpPr>
@@ -3087,7 +3082,410 @@
         <p:cNvGrpSpPr/>
         <p:nvPr/>
       </p:nvGrpSpPr>
-      <p:grpSpPr/>
+      <p:grpSpPr>
+        <a:xfrm>
+          <a:off x="0" y="0"/>
+          <a:ext cx="0" cy="0"/>
+          <a:chOff x="0" y="0"/>
+          <a:chExt cx="0" cy="0"/>
+        </a:xfrm>
+      </p:grpSpPr>
+      <p:sp>
+        <p:nvSpPr>
+          <p:cNvPr id="14" name="fig1_H">
+            <a:extLst>
+              <a:ext uri="{FF2B5EF4-FFF2-40B4-BE49-F238E27FC236}">
+                <a16:creationId xmlns:a16="http://schemas.microsoft.com/office/drawing/2014/main" id="{8C388E60-74BA-C247-ED30-69CF5931F5DE}"/>
+              </a:ext>
+            </a:extLst>
+          </p:cNvPr>
+          <p:cNvSpPr/>
+          <p:nvPr/>
+        </p:nvSpPr>
+        <p:spPr>
+          <a:xfrm>
+            <a:off x="2970212" y="4531599"/>
+            <a:ext cx="2117798" cy="990067"/>
+          </a:xfrm>
+          <a:prstGeom prst="rect">
+            <a:avLst/>
+          </a:prstGeom>
+          <a:solidFill>
+            <a:srgbClr val="D0F5F5"/>
+          </a:solidFill>
+          <a:ln w="6350">
+            <a:solidFill>
+              <a:srgbClr val="808080"/>
+            </a:solidFill>
+          </a:ln>
+        </p:spPr>
+        <p:style>
+          <a:lnRef idx="1">
+            <a:schemeClr val="accent1"/>
+          </a:lnRef>
+          <a:fillRef idx="3">
+            <a:schemeClr val="accent1"/>
+          </a:fillRef>
+          <a:effectRef idx="2">
+            <a:schemeClr val="accent1"/>
+          </a:effectRef>
+          <a:fontRef idx="minor">
+            <a:schemeClr val="lt1"/>
+          </a:fontRef>
+        </p:style>
+        <p:txBody>
+          <a:bodyPr wrap="none" rtlCol="0" anchor="ctr"/>
+          <a:lstStyle/>
+          <a:p>
+            <a:pPr algn="ctr"/>
+            <a:r>
+              <a:rPr sz="1000" b="1" dirty="0">
+                <a:solidFill>
+                  <a:srgbClr val="333333"/>
+                </a:solidFill>
+              </a:rPr>
+              <a:t>F
+52×55 mm</a:t>
+            </a:r>
+          </a:p>
+        </p:txBody>
+      </p:sp>
+      <p:sp>
+        <p:nvSpPr>
+          <p:cNvPr id="7" name="fig1_G"/>
+          <p:cNvSpPr/>
+          <p:nvPr/>
+        </p:nvSpPr>
+        <p:spPr>
+          <a:xfrm>
+            <a:off x="2970212" y="3462975"/>
+            <a:ext cx="2117798" cy="990067"/>
+          </a:xfrm>
+          <a:prstGeom prst="rect">
+            <a:avLst/>
+          </a:prstGeom>
+          <a:solidFill>
+            <a:srgbClr val="D0F5F5"/>
+          </a:solidFill>
+          <a:ln w="6350">
+            <a:solidFill>
+              <a:srgbClr val="808080"/>
+            </a:solidFill>
+          </a:ln>
+        </p:spPr>
+        <p:style>
+          <a:lnRef idx="1">
+            <a:schemeClr val="accent1"/>
+          </a:lnRef>
+          <a:fillRef idx="3">
+            <a:schemeClr val="accent1"/>
+          </a:fillRef>
+          <a:effectRef idx="2">
+            <a:schemeClr val="accent1"/>
+          </a:effectRef>
+          <a:fontRef idx="minor">
+            <a:schemeClr val="lt1"/>
+          </a:fontRef>
+        </p:style>
+        <p:txBody>
+          <a:bodyPr wrap="none" rtlCol="0" anchor="ctr"/>
+          <a:lstStyle/>
+          <a:p>
+            <a:pPr algn="ctr"/>
+            <a:r>
+              <a:rPr sz="1000" b="1" dirty="0">
+                <a:solidFill>
+                  <a:srgbClr val="333333"/>
+                </a:solidFill>
+              </a:rPr>
+              <a:t>F
+52×55 mm</a:t>
+            </a:r>
+          </a:p>
+        </p:txBody>
+      </p:sp>
+      <p:sp>
+        <p:nvSpPr>
+          <p:cNvPr id="5" name="fig1_F"/>
+          <p:cNvSpPr/>
+          <p:nvPr/>
+        </p:nvSpPr>
+        <p:spPr>
+          <a:xfrm>
+            <a:off x="2970212" y="2244969"/>
+            <a:ext cx="2117798" cy="1139449"/>
+          </a:xfrm>
+          <a:prstGeom prst="rect">
+            <a:avLst/>
+          </a:prstGeom>
+          <a:solidFill>
+            <a:srgbClr val="F0D0F0"/>
+          </a:solidFill>
+          <a:ln w="6350">
+            <a:solidFill>
+              <a:srgbClr val="808080"/>
+            </a:solidFill>
+          </a:ln>
+        </p:spPr>
+        <p:style>
+          <a:lnRef idx="1">
+            <a:schemeClr val="accent1"/>
+          </a:lnRef>
+          <a:fillRef idx="3">
+            <a:schemeClr val="accent1"/>
+          </a:fillRef>
+          <a:effectRef idx="2">
+            <a:schemeClr val="accent1"/>
+          </a:effectRef>
+          <a:fontRef idx="minor">
+            <a:schemeClr val="lt1"/>
+          </a:fontRef>
+        </p:style>
+        <p:txBody>
+          <a:bodyPr wrap="none" rtlCol="0" anchor="ctr"/>
+          <a:lstStyle/>
+          <a:p>
+            <a:pPr algn="ctr"/>
+            <a:r>
+              <a:rPr sz="1000" b="1">
+                <a:solidFill>
+                  <a:srgbClr val="333333"/>
+                </a:solidFill>
+              </a:rPr>
+              <a:t>D
+51×55 mm</a:t>
+            </a:r>
+          </a:p>
+        </p:txBody>
+      </p:sp>
+      <p:sp>
+        <p:nvSpPr>
+          <p:cNvPr id="12" name="fig1_E">
+            <a:extLst>
+              <a:ext uri="{FF2B5EF4-FFF2-40B4-BE49-F238E27FC236}">
+                <a16:creationId xmlns:a16="http://schemas.microsoft.com/office/drawing/2014/main" id="{E23DCF68-356D-89E5-360E-0972F29F2B3D}"/>
+              </a:ext>
+            </a:extLst>
+          </p:cNvPr>
+          <p:cNvSpPr/>
+          <p:nvPr/>
+        </p:nvSpPr>
+        <p:spPr>
+          <a:xfrm>
+            <a:off x="4339123" y="1536709"/>
+            <a:ext cx="748887" cy="671509"/>
+          </a:xfrm>
+          <a:prstGeom prst="rect">
+            <a:avLst/>
+          </a:prstGeom>
+          <a:solidFill>
+            <a:srgbClr val="D0F0E0"/>
+          </a:solidFill>
+          <a:ln w="6350">
+            <a:solidFill>
+              <a:srgbClr val="808080"/>
+            </a:solidFill>
+          </a:ln>
+        </p:spPr>
+        <p:style>
+          <a:lnRef idx="1">
+            <a:schemeClr val="accent1"/>
+          </a:lnRef>
+          <a:fillRef idx="3">
+            <a:schemeClr val="accent1"/>
+          </a:fillRef>
+          <a:effectRef idx="2">
+            <a:schemeClr val="accent1"/>
+          </a:effectRef>
+          <a:fontRef idx="minor">
+            <a:schemeClr val="lt1"/>
+          </a:fontRef>
+        </p:style>
+        <p:txBody>
+          <a:bodyPr wrap="none" rtlCol="0" anchor="ctr"/>
+          <a:lstStyle/>
+          <a:p>
+            <a:pPr algn="ctr"/>
+            <a:r>
+              <a:rPr sz="1000" b="1" dirty="0">
+                <a:solidFill>
+                  <a:srgbClr val="333333"/>
+                </a:solidFill>
+              </a:rPr>
+              <a:t>B
+52×55 mm</a:t>
+            </a:r>
+          </a:p>
+        </p:txBody>
+      </p:sp>
+      <p:sp>
+        <p:nvSpPr>
+          <p:cNvPr id="10" name="fig1_D">
+            <a:extLst>
+              <a:ext uri="{FF2B5EF4-FFF2-40B4-BE49-F238E27FC236}">
+                <a16:creationId xmlns:a16="http://schemas.microsoft.com/office/drawing/2014/main" id="{C741465E-251B-2D14-7AB8-017C5773C8AC}"/>
+              </a:ext>
+            </a:extLst>
+          </p:cNvPr>
+          <p:cNvSpPr/>
+          <p:nvPr/>
+        </p:nvSpPr>
+        <p:spPr>
+          <a:xfrm>
+            <a:off x="4339123" y="819608"/>
+            <a:ext cx="748887" cy="671509"/>
+          </a:xfrm>
+          <a:prstGeom prst="rect">
+            <a:avLst/>
+          </a:prstGeom>
+          <a:solidFill>
+            <a:srgbClr val="D0F0E0"/>
+          </a:solidFill>
+          <a:ln w="6350">
+            <a:solidFill>
+              <a:srgbClr val="808080"/>
+            </a:solidFill>
+          </a:ln>
+        </p:spPr>
+        <p:style>
+          <a:lnRef idx="1">
+            <a:schemeClr val="accent1"/>
+          </a:lnRef>
+          <a:fillRef idx="3">
+            <a:schemeClr val="accent1"/>
+          </a:fillRef>
+          <a:effectRef idx="2">
+            <a:schemeClr val="accent1"/>
+          </a:effectRef>
+          <a:fontRef idx="minor">
+            <a:schemeClr val="lt1"/>
+          </a:fontRef>
+        </p:style>
+        <p:txBody>
+          <a:bodyPr wrap="none" rtlCol="0" anchor="ctr"/>
+          <a:lstStyle/>
+          <a:p>
+            <a:pPr algn="ctr"/>
+            <a:r>
+              <a:rPr sz="1000" b="1">
+                <a:solidFill>
+                  <a:srgbClr val="333333"/>
+                </a:solidFill>
+              </a:rPr>
+              <a:t>B
+52×55 mm</a:t>
+            </a:r>
+          </a:p>
+        </p:txBody>
+      </p:sp>
+      <p:sp>
+        <p:nvSpPr>
+          <p:cNvPr id="3" name="fig1_C"/>
+          <p:cNvSpPr/>
+          <p:nvPr/>
+        </p:nvSpPr>
+        <p:spPr>
+          <a:xfrm>
+            <a:off x="4339123" y="60138"/>
+            <a:ext cx="748887" cy="713878"/>
+          </a:xfrm>
+          <a:prstGeom prst="rect">
+            <a:avLst/>
+          </a:prstGeom>
+          <a:solidFill>
+            <a:srgbClr val="D0F0E0"/>
+          </a:solidFill>
+          <a:ln w="6350">
+            <a:solidFill>
+              <a:srgbClr val="808080"/>
+            </a:solidFill>
+          </a:ln>
+        </p:spPr>
+        <p:style>
+          <a:lnRef idx="1">
+            <a:schemeClr val="accent1"/>
+          </a:lnRef>
+          <a:fillRef idx="3">
+            <a:schemeClr val="accent1"/>
+          </a:fillRef>
+          <a:effectRef idx="2">
+            <a:schemeClr val="accent1"/>
+          </a:effectRef>
+          <a:fontRef idx="minor">
+            <a:schemeClr val="lt1"/>
+          </a:fontRef>
+        </p:style>
+        <p:txBody>
+          <a:bodyPr wrap="none" rtlCol="0" anchor="ctr"/>
+          <a:lstStyle/>
+          <a:p>
+            <a:pPr algn="ctr"/>
+            <a:r>
+              <a:rPr sz="1000" b="1">
+                <a:solidFill>
+                  <a:srgbClr val="333333"/>
+                </a:solidFill>
+              </a:rPr>
+              <a:t>B
+52×55 mm</a:t>
+            </a:r>
+          </a:p>
+        </p:txBody>
+      </p:sp>
+      <p:sp>
+        <p:nvSpPr>
+          <p:cNvPr id="4" name="fig1_B"/>
+          <p:cNvSpPr/>
+          <p:nvPr/>
+        </p:nvSpPr>
+        <p:spPr>
+          <a:xfrm>
+            <a:off x="645012" y="2244969"/>
+            <a:ext cx="2265131" cy="3276697"/>
+          </a:xfrm>
+          <a:prstGeom prst="rect">
+            <a:avLst/>
+          </a:prstGeom>
+          <a:solidFill>
+            <a:srgbClr val="F5E8D0"/>
+          </a:solidFill>
+          <a:ln w="6350">
+            <a:solidFill>
+              <a:srgbClr val="808080"/>
+            </a:solidFill>
+          </a:ln>
+        </p:spPr>
+        <p:style>
+          <a:lnRef idx="1">
+            <a:schemeClr val="accent1"/>
+          </a:lnRef>
+          <a:fillRef idx="3">
+            <a:schemeClr val="accent1"/>
+          </a:fillRef>
+          <a:effectRef idx="2">
+            <a:schemeClr val="accent1"/>
+          </a:effectRef>
+          <a:fontRef idx="minor">
+            <a:schemeClr val="lt1"/>
+          </a:fontRef>
+        </p:style>
+        <p:txBody>
+          <a:bodyPr wrap="none" rtlCol="0" anchor="ctr"/>
+          <a:lstStyle/>
+          <a:p>
+            <a:pPr algn="ctr"/>
+            <a:r>
+              <a:rPr sz="1000" b="1">
+                <a:solidFill>
+                  <a:srgbClr val="333333"/>
+                </a:solidFill>
+              </a:rPr>
+              <a:t>C
+52×55 mm</a:t>
+            </a:r>
+          </a:p>
+        </p:txBody>
+      </p:sp>
       <p:sp>
         <p:nvSpPr>
           <p:cNvPr id="2" name="fig1_A"/>
@@ -3096,8 +3494,8 @@
         </p:nvSpPr>
         <p:spPr>
           <a:xfrm>
-            <a:off x="0" y="0"/>
-            <a:ext cx="5940000" cy="1368000"/>
+            <a:off x="645013" y="60137"/>
+            <a:ext cx="3650012" cy="2148081"/>
           </a:xfrm>
           <a:prstGeom prst="rect">
             <a:avLst/>
@@ -3126,342 +3524,18 @@
           </a:fontRef>
         </p:style>
         <p:txBody>
-          <a:bodyPr rtlCol="0" anchor="ctr" wrap="none"/>
+          <a:bodyPr wrap="none" rtlCol="0" anchor="ctr"/>
           <a:lstStyle/>
           <a:p>
             <a:pPr algn="ctr"/>
             <a:r>
-              <a:rPr sz="1000" b="1">
+              <a:rPr sz="1000" b="1" dirty="0">
                 <a:solidFill>
                   <a:srgbClr val="333333"/>
                 </a:solidFill>
               </a:rPr>
               <a:t>A
 165×38 mm</a:t>
-            </a:r>
-          </a:p>
-        </p:txBody>
-      </p:sp>
-      <p:sp>
-        <p:nvSpPr>
-          <p:cNvPr id="3" name="fig1_B"/>
-          <p:cNvSpPr/>
-          <p:nvPr/>
-        </p:nvSpPr>
-        <p:spPr>
-          <a:xfrm>
-            <a:off x="0" y="1548000"/>
-            <a:ext cx="1872000" cy="1980000"/>
-          </a:xfrm>
-          <a:prstGeom prst="rect">
-            <a:avLst/>
-          </a:prstGeom>
-          <a:solidFill>
-            <a:srgbClr val="D0F0E0"/>
-          </a:solidFill>
-          <a:ln w="6350">
-            <a:solidFill>
-              <a:srgbClr val="808080"/>
-            </a:solidFill>
-          </a:ln>
-        </p:spPr>
-        <p:style>
-          <a:lnRef idx="1">
-            <a:schemeClr val="accent1"/>
-          </a:lnRef>
-          <a:fillRef idx="3">
-            <a:schemeClr val="accent1"/>
-          </a:fillRef>
-          <a:effectRef idx="2">
-            <a:schemeClr val="accent1"/>
-          </a:effectRef>
-          <a:fontRef idx="minor">
-            <a:schemeClr val="lt1"/>
-          </a:fontRef>
-        </p:style>
-        <p:txBody>
-          <a:bodyPr rtlCol="0" anchor="ctr" wrap="none"/>
-          <a:lstStyle/>
-          <a:p>
-            <a:pPr algn="ctr"/>
-            <a:r>
-              <a:rPr sz="1000" b="1">
-                <a:solidFill>
-                  <a:srgbClr val="333333"/>
-                </a:solidFill>
-              </a:rPr>
-              <a:t>B
-52×55 mm</a:t>
-            </a:r>
-          </a:p>
-        </p:txBody>
-      </p:sp>
-      <p:sp>
-        <p:nvSpPr>
-          <p:cNvPr id="4" name="fig1_C"/>
-          <p:cNvSpPr/>
-          <p:nvPr/>
-        </p:nvSpPr>
-        <p:spPr>
-          <a:xfrm>
-            <a:off x="2052000" y="1548000"/>
-            <a:ext cx="1872000" cy="1980000"/>
-          </a:xfrm>
-          <a:prstGeom prst="rect">
-            <a:avLst/>
-          </a:prstGeom>
-          <a:solidFill>
-            <a:srgbClr val="F5E8D0"/>
-          </a:solidFill>
-          <a:ln w="6350">
-            <a:solidFill>
-              <a:srgbClr val="808080"/>
-            </a:solidFill>
-          </a:ln>
-        </p:spPr>
-        <p:style>
-          <a:lnRef idx="1">
-            <a:schemeClr val="accent1"/>
-          </a:lnRef>
-          <a:fillRef idx="3">
-            <a:schemeClr val="accent1"/>
-          </a:fillRef>
-          <a:effectRef idx="2">
-            <a:schemeClr val="accent1"/>
-          </a:effectRef>
-          <a:fontRef idx="minor">
-            <a:schemeClr val="lt1"/>
-          </a:fontRef>
-        </p:style>
-        <p:txBody>
-          <a:bodyPr rtlCol="0" anchor="ctr" wrap="none"/>
-          <a:lstStyle/>
-          <a:p>
-            <a:pPr algn="ctr"/>
-            <a:r>
-              <a:rPr sz="1000" b="1">
-                <a:solidFill>
-                  <a:srgbClr val="333333"/>
-                </a:solidFill>
-              </a:rPr>
-              <a:t>C
-52×55 mm</a:t>
-            </a:r>
-          </a:p>
-        </p:txBody>
-      </p:sp>
-      <p:sp>
-        <p:nvSpPr>
-          <p:cNvPr id="5" name="fig1_D"/>
-          <p:cNvSpPr/>
-          <p:nvPr/>
-        </p:nvSpPr>
-        <p:spPr>
-          <a:xfrm>
-            <a:off x="4104000" y="1548000"/>
-            <a:ext cx="1836000" cy="1980000"/>
-          </a:xfrm>
-          <a:prstGeom prst="rect">
-            <a:avLst/>
-          </a:prstGeom>
-          <a:solidFill>
-            <a:srgbClr val="F0D0F0"/>
-          </a:solidFill>
-          <a:ln w="6350">
-            <a:solidFill>
-              <a:srgbClr val="808080"/>
-            </a:solidFill>
-          </a:ln>
-        </p:spPr>
-        <p:style>
-          <a:lnRef idx="1">
-            <a:schemeClr val="accent1"/>
-          </a:lnRef>
-          <a:fillRef idx="3">
-            <a:schemeClr val="accent1"/>
-          </a:fillRef>
-          <a:effectRef idx="2">
-            <a:schemeClr val="accent1"/>
-          </a:effectRef>
-          <a:fontRef idx="minor">
-            <a:schemeClr val="lt1"/>
-          </a:fontRef>
-        </p:style>
-        <p:txBody>
-          <a:bodyPr rtlCol="0" anchor="ctr" wrap="none"/>
-          <a:lstStyle/>
-          <a:p>
-            <a:pPr algn="ctr"/>
-            <a:r>
-              <a:rPr sz="1000" b="1">
-                <a:solidFill>
-                  <a:srgbClr val="333333"/>
-                </a:solidFill>
-              </a:rPr>
-              <a:t>D
-51×55 mm</a:t>
-            </a:r>
-          </a:p>
-        </p:txBody>
-      </p:sp>
-      <p:sp>
-        <p:nvSpPr>
-          <p:cNvPr id="6" name="fig1_E"/>
-          <p:cNvSpPr/>
-          <p:nvPr/>
-        </p:nvSpPr>
-        <p:spPr>
-          <a:xfrm>
-            <a:off x="0" y="3708000"/>
-            <a:ext cx="1872000" cy="1980000"/>
-          </a:xfrm>
-          <a:prstGeom prst="rect">
-            <a:avLst/>
-          </a:prstGeom>
-          <a:solidFill>
-            <a:srgbClr val="F5F0D0"/>
-          </a:solidFill>
-          <a:ln w="6350">
-            <a:solidFill>
-              <a:srgbClr val="808080"/>
-            </a:solidFill>
-          </a:ln>
-        </p:spPr>
-        <p:style>
-          <a:lnRef idx="1">
-            <a:schemeClr val="accent1"/>
-          </a:lnRef>
-          <a:fillRef idx="3">
-            <a:schemeClr val="accent1"/>
-          </a:fillRef>
-          <a:effectRef idx="2">
-            <a:schemeClr val="accent1"/>
-          </a:effectRef>
-          <a:fontRef idx="minor">
-            <a:schemeClr val="lt1"/>
-          </a:fontRef>
-        </p:style>
-        <p:txBody>
-          <a:bodyPr rtlCol="0" anchor="ctr" wrap="none"/>
-          <a:lstStyle/>
-          <a:p>
-            <a:pPr algn="ctr"/>
-            <a:r>
-              <a:rPr sz="1000" b="1">
-                <a:solidFill>
-                  <a:srgbClr val="333333"/>
-                </a:solidFill>
-              </a:rPr>
-              <a:t>E
-52×55 mm</a:t>
-            </a:r>
-          </a:p>
-        </p:txBody>
-      </p:sp>
-      <p:sp>
-        <p:nvSpPr>
-          <p:cNvPr id="7" name="fig1_F"/>
-          <p:cNvSpPr/>
-          <p:nvPr/>
-        </p:nvSpPr>
-        <p:spPr>
-          <a:xfrm>
-            <a:off x="2052000" y="3708000"/>
-            <a:ext cx="1872000" cy="1980000"/>
-          </a:xfrm>
-          <a:prstGeom prst="rect">
-            <a:avLst/>
-          </a:prstGeom>
-          <a:solidFill>
-            <a:srgbClr val="D0F5F5"/>
-          </a:solidFill>
-          <a:ln w="6350">
-            <a:solidFill>
-              <a:srgbClr val="808080"/>
-            </a:solidFill>
-          </a:ln>
-        </p:spPr>
-        <p:style>
-          <a:lnRef idx="1">
-            <a:schemeClr val="accent1"/>
-          </a:lnRef>
-          <a:fillRef idx="3">
-            <a:schemeClr val="accent1"/>
-          </a:fillRef>
-          <a:effectRef idx="2">
-            <a:schemeClr val="accent1"/>
-          </a:effectRef>
-          <a:fontRef idx="minor">
-            <a:schemeClr val="lt1"/>
-          </a:fontRef>
-        </p:style>
-        <p:txBody>
-          <a:bodyPr rtlCol="0" anchor="ctr" wrap="none"/>
-          <a:lstStyle/>
-          <a:p>
-            <a:pPr algn="ctr"/>
-            <a:r>
-              <a:rPr sz="1000" b="1">
-                <a:solidFill>
-                  <a:srgbClr val="333333"/>
-                </a:solidFill>
-              </a:rPr>
-              <a:t>F
-52×55 mm</a:t>
-            </a:r>
-          </a:p>
-        </p:txBody>
-      </p:sp>
-      <p:sp>
-        <p:nvSpPr>
-          <p:cNvPr id="8" name="fig1_G"/>
-          <p:cNvSpPr/>
-          <p:nvPr/>
-        </p:nvSpPr>
-        <p:spPr>
-          <a:xfrm>
-            <a:off x="4104000" y="3708000"/>
-            <a:ext cx="1836000" cy="1980000"/>
-          </a:xfrm>
-          <a:prstGeom prst="rect">
-            <a:avLst/>
-          </a:prstGeom>
-          <a:solidFill>
-            <a:srgbClr val="F5D0D8"/>
-          </a:solidFill>
-          <a:ln w="6350">
-            <a:solidFill>
-              <a:srgbClr val="808080"/>
-            </a:solidFill>
-          </a:ln>
-        </p:spPr>
-        <p:style>
-          <a:lnRef idx="1">
-            <a:schemeClr val="accent1"/>
-          </a:lnRef>
-          <a:fillRef idx="3">
-            <a:schemeClr val="accent1"/>
-          </a:fillRef>
-          <a:effectRef idx="2">
-            <a:schemeClr val="accent1"/>
-          </a:effectRef>
-          <a:fontRef idx="minor">
-            <a:schemeClr val="lt1"/>
-          </a:fontRef>
-        </p:style>
-        <p:txBody>
-          <a:bodyPr rtlCol="0" anchor="ctr" wrap="none"/>
-          <a:lstStyle/>
-          <a:p>
-            <a:pPr algn="ctr"/>
-            <a:r>
-              <a:rPr sz="1000" b="1">
-                <a:solidFill>
-                  <a:srgbClr val="333333"/>
-                </a:solidFill>
-              </a:rPr>
-              <a:t>G
-51×55 mm</a:t>
             </a:r>
           </a:p>
         </p:txBody>

--- a/figures/fig1/fig1.pptx
+++ b/figures/fig1/fig1.pptx
@@ -1,13 +1,20 @@
 
 <file path=ppt/presentation.xml><?xml version="1.0" encoding="utf-8"?>
-<p:presentation xmlns:a="http://schemas.openxmlformats.org/drawingml/2006/main" xmlns:r="http://schemas.openxmlformats.org/officeDocument/2006/relationships" xmlns:p="http://schemas.openxmlformats.org/presentationml/2006/main" saveSubsetFonts="1" autoCompressPictures="0">
+<p:presentation xmlns:a="http://schemas.openxmlformats.org/drawingml/2006/main" xmlns:r="http://schemas.openxmlformats.org/officeDocument/2006/relationships" xmlns:p="http://schemas.openxmlformats.org/presentationml/2006/main" saveSubsetFonts="1">
   <p:sldMasterIdLst>
-    <p:sldMasterId id="2147483648" r:id="rId1"/>
+    <p:sldMasterId id="2147483660" r:id="rId1"/>
   </p:sldMasterIdLst>
+  <p:notesMasterIdLst>
+    <p:notesMasterId r:id="rId7"/>
+  </p:notesMasterIdLst>
   <p:sldIdLst>
     <p:sldId id="256" r:id="rId2"/>
+    <p:sldId id="259" r:id="rId3"/>
+    <p:sldId id="260" r:id="rId4"/>
+    <p:sldId id="257" r:id="rId5"/>
+    <p:sldId id="258" r:id="rId6"/>
   </p:sldIdLst>
-  <p:sldSz cx="5940425" cy="5688013"/>
+  <p:sldSz cx="7772400" cy="10058400"/>
   <p:notesSz cx="6858000" cy="9144000"/>
   <p:defaultTextStyle>
     <a:defPPr>
@@ -107,12 +114,22 @@
   <p:extLst>
     <p:ext uri="{EFAFB233-063F-42B5-8137-9DF3F51BA10A}">
       <p15:sldGuideLst xmlns:p15="http://schemas.microsoft.com/office/powerpoint/2012/main">
-        <p15:guide id="1" orient="horz" pos="2160">
+        <p15:guide id="1" orient="horz" pos="6048" userDrawn="1">
           <p15:clr>
             <a:srgbClr val="A4A3A4"/>
           </p15:clr>
         </p15:guide>
-        <p15:guide id="2" pos="2880">
+        <p15:guide id="2" pos="288" userDrawn="1">
+          <p15:clr>
+            <a:srgbClr val="A4A3A4"/>
+          </p15:clr>
+        </p15:guide>
+        <p15:guide id="3" pos="4608" userDrawn="1">
+          <p15:clr>
+            <a:srgbClr val="A4A3A4"/>
+          </p15:clr>
+        </p15:guide>
+        <p15:guide id="4" orient="horz" pos="288" userDrawn="1">
           <p15:clr>
             <a:srgbClr val="A4A3A4"/>
           </p15:clr>
@@ -121,6 +138,448 @@
     </p:ext>
   </p:extLst>
 </p:presentation>
+</file>
+
+<file path=ppt/revisionInfo.xml><?xml version="1.0" encoding="utf-8"?>
+<p1510:revInfo xmlns:a="http://schemas.openxmlformats.org/drawingml/2006/main" xmlns:r="http://schemas.openxmlformats.org/officeDocument/2006/relationships" xmlns:p1510="http://schemas.microsoft.com/office/powerpoint/2015/10/main">
+  <p1510:revLst>
+    <p1510:client id="{6A603C97-F27C-431C-ABBF-7D98AB2190AB}" v="80" dt="2026-10-16T18:31:18.569"/>
+    <p1510:client id="{F9657A64-DC5F-2F44-9FA6-6FF564F32082}" v="223" dt="2026-10-16T19:10:28.149"/>
+  </p1510:revLst>
+</p1510:revInfo>
+</file>
+
+<file path=ppt/notesMasters/notesMaster1.xml><?xml version="1.0" encoding="utf-8"?>
+<p:notesMaster xmlns:a="http://schemas.openxmlformats.org/drawingml/2006/main" xmlns:r="http://schemas.openxmlformats.org/officeDocument/2006/relationships" xmlns:p="http://schemas.openxmlformats.org/presentationml/2006/main">
+  <p:cSld>
+    <p:bg>
+      <p:bgRef idx="1001">
+        <a:schemeClr val="bg1"/>
+      </p:bgRef>
+    </p:bg>
+    <p:spTree>
+      <p:nvGrpSpPr>
+        <p:cNvPr id="1" name=""/>
+        <p:cNvGrpSpPr/>
+        <p:nvPr/>
+      </p:nvGrpSpPr>
+      <p:grpSpPr>
+        <a:xfrm>
+          <a:off x="0" y="0"/>
+          <a:ext cx="0" cy="0"/>
+          <a:chOff x="0" y="0"/>
+          <a:chExt cx="0" cy="0"/>
+        </a:xfrm>
+      </p:grpSpPr>
+      <p:sp>
+        <p:nvSpPr>
+          <p:cNvPr id="2" name="Header Placeholder 1"/>
+          <p:cNvSpPr>
+            <a:spLocks noGrp="1"/>
+          </p:cNvSpPr>
+          <p:nvPr>
+            <p:ph type="hdr" sz="quarter"/>
+          </p:nvPr>
+        </p:nvSpPr>
+        <p:spPr>
+          <a:xfrm>
+            <a:off x="0" y="0"/>
+            <a:ext cx="2971800" cy="458788"/>
+          </a:xfrm>
+          <a:prstGeom prst="rect">
+            <a:avLst/>
+          </a:prstGeom>
+        </p:spPr>
+        <p:txBody>
+          <a:bodyPr vert="horz" lIns="91440" tIns="45720" rIns="91440" bIns="45720" rtlCol="0"/>
+          <a:lstStyle>
+            <a:lvl1pPr algn="l">
+              <a:defRPr sz="1200"/>
+            </a:lvl1pPr>
+          </a:lstStyle>
+          <a:p>
+            <a:endParaRPr lang="en-US"/>
+          </a:p>
+        </p:txBody>
+      </p:sp>
+      <p:sp>
+        <p:nvSpPr>
+          <p:cNvPr id="3" name="Date Placeholder 2"/>
+          <p:cNvSpPr>
+            <a:spLocks noGrp="1"/>
+          </p:cNvSpPr>
+          <p:nvPr>
+            <p:ph type="dt" idx="1"/>
+          </p:nvPr>
+        </p:nvSpPr>
+        <p:spPr>
+          <a:xfrm>
+            <a:off x="3884613" y="0"/>
+            <a:ext cx="2971800" cy="458788"/>
+          </a:xfrm>
+          <a:prstGeom prst="rect">
+            <a:avLst/>
+          </a:prstGeom>
+        </p:spPr>
+        <p:txBody>
+          <a:bodyPr vert="horz" lIns="91440" tIns="45720" rIns="91440" bIns="45720" rtlCol="0"/>
+          <a:lstStyle>
+            <a:lvl1pPr algn="r">
+              <a:defRPr sz="1200"/>
+            </a:lvl1pPr>
+          </a:lstStyle>
+          <a:p>
+            <a:fld id="{2AF9AB64-2C27-7A45-AE48-F5190A12FDDB}" type="datetimeFigureOut">
+              <a:rPr lang="en-US" smtClean="0"/>
+              <a:t>10/16/26</a:t>
+            </a:fld>
+            <a:endParaRPr lang="en-US"/>
+          </a:p>
+        </p:txBody>
+      </p:sp>
+      <p:sp>
+        <p:nvSpPr>
+          <p:cNvPr id="4" name="Slide Image Placeholder 3"/>
+          <p:cNvSpPr>
+            <a:spLocks noGrp="1" noRot="1" noChangeAspect="1"/>
+          </p:cNvSpPr>
+          <p:nvPr>
+            <p:ph type="sldImg" idx="2"/>
+          </p:nvPr>
+        </p:nvSpPr>
+        <p:spPr>
+          <a:xfrm>
+            <a:off x="2236788" y="1143000"/>
+            <a:ext cx="2384425" cy="3086100"/>
+          </a:xfrm>
+          <a:prstGeom prst="rect">
+            <a:avLst/>
+          </a:prstGeom>
+          <a:noFill/>
+          <a:ln w="12700">
+            <a:solidFill>
+              <a:prstClr val="black"/>
+            </a:solidFill>
+          </a:ln>
+        </p:spPr>
+        <p:txBody>
+          <a:bodyPr vert="horz" lIns="91440" tIns="45720" rIns="91440" bIns="45720" rtlCol="0" anchor="ctr"/>
+          <a:lstStyle/>
+          <a:p>
+            <a:endParaRPr lang="en-US"/>
+          </a:p>
+        </p:txBody>
+      </p:sp>
+      <p:sp>
+        <p:nvSpPr>
+          <p:cNvPr id="5" name="Notes Placeholder 4"/>
+          <p:cNvSpPr>
+            <a:spLocks noGrp="1"/>
+          </p:cNvSpPr>
+          <p:nvPr>
+            <p:ph type="body" sz="quarter" idx="3"/>
+          </p:nvPr>
+        </p:nvSpPr>
+        <p:spPr>
+          <a:xfrm>
+            <a:off x="685800" y="4400550"/>
+            <a:ext cx="5486400" cy="3600450"/>
+          </a:xfrm>
+          <a:prstGeom prst="rect">
+            <a:avLst/>
+          </a:prstGeom>
+        </p:spPr>
+        <p:txBody>
+          <a:bodyPr vert="horz" lIns="91440" tIns="45720" rIns="91440" bIns="45720" rtlCol="0"/>
+          <a:lstStyle/>
+          <a:p>
+            <a:pPr lvl="0"/>
+            <a:r>
+              <a:rPr lang="en-US"/>
+              <a:t>Click to edit Master text styles</a:t>
+            </a:r>
+          </a:p>
+          <a:p>
+            <a:pPr lvl="1"/>
+            <a:r>
+              <a:rPr lang="en-US"/>
+              <a:t>Second level</a:t>
+            </a:r>
+          </a:p>
+          <a:p>
+            <a:pPr lvl="2"/>
+            <a:r>
+              <a:rPr lang="en-US"/>
+              <a:t>Third level</a:t>
+            </a:r>
+          </a:p>
+          <a:p>
+            <a:pPr lvl="3"/>
+            <a:r>
+              <a:rPr lang="en-US"/>
+              <a:t>Fourth level</a:t>
+            </a:r>
+          </a:p>
+          <a:p>
+            <a:pPr lvl="4"/>
+            <a:r>
+              <a:rPr lang="en-US"/>
+              <a:t>Fifth level</a:t>
+            </a:r>
+          </a:p>
+        </p:txBody>
+      </p:sp>
+      <p:sp>
+        <p:nvSpPr>
+          <p:cNvPr id="6" name="Footer Placeholder 5"/>
+          <p:cNvSpPr>
+            <a:spLocks noGrp="1"/>
+          </p:cNvSpPr>
+          <p:nvPr>
+            <p:ph type="ftr" sz="quarter" idx="4"/>
+          </p:nvPr>
+        </p:nvSpPr>
+        <p:spPr>
+          <a:xfrm>
+            <a:off x="0" y="8685213"/>
+            <a:ext cx="2971800" cy="458787"/>
+          </a:xfrm>
+          <a:prstGeom prst="rect">
+            <a:avLst/>
+          </a:prstGeom>
+        </p:spPr>
+        <p:txBody>
+          <a:bodyPr vert="horz" lIns="91440" tIns="45720" rIns="91440" bIns="45720" rtlCol="0" anchor="b"/>
+          <a:lstStyle>
+            <a:lvl1pPr algn="l">
+              <a:defRPr sz="1200"/>
+            </a:lvl1pPr>
+          </a:lstStyle>
+          <a:p>
+            <a:endParaRPr lang="en-US"/>
+          </a:p>
+        </p:txBody>
+      </p:sp>
+      <p:sp>
+        <p:nvSpPr>
+          <p:cNvPr id="7" name="Slide Number Placeholder 6"/>
+          <p:cNvSpPr>
+            <a:spLocks noGrp="1"/>
+          </p:cNvSpPr>
+          <p:nvPr>
+            <p:ph type="sldNum" sz="quarter" idx="5"/>
+          </p:nvPr>
+        </p:nvSpPr>
+        <p:spPr>
+          <a:xfrm>
+            <a:off x="3884613" y="8685213"/>
+            <a:ext cx="2971800" cy="458787"/>
+          </a:xfrm>
+          <a:prstGeom prst="rect">
+            <a:avLst/>
+          </a:prstGeom>
+        </p:spPr>
+        <p:txBody>
+          <a:bodyPr vert="horz" lIns="91440" tIns="45720" rIns="91440" bIns="45720" rtlCol="0" anchor="b"/>
+          <a:lstStyle>
+            <a:lvl1pPr algn="r">
+              <a:defRPr sz="1200"/>
+            </a:lvl1pPr>
+          </a:lstStyle>
+          <a:p>
+            <a:fld id="{8F50ACB0-B974-924D-BA94-4F6C0E59EA98}" type="slidenum">
+              <a:rPr lang="en-US" smtClean="0"/>
+              <a:t>‹#›</a:t>
+            </a:fld>
+            <a:endParaRPr lang="en-US"/>
+          </a:p>
+        </p:txBody>
+      </p:sp>
+    </p:spTree>
+    <p:extLst>
+      <p:ext uri="{BB962C8B-B14F-4D97-AF65-F5344CB8AC3E}">
+        <p14:creationId xmlns:p14="http://schemas.microsoft.com/office/powerpoint/2010/main" val="4124748619"/>
+      </p:ext>
+    </p:extLst>
+  </p:cSld>
+  <p:clrMap bg1="lt1" tx1="dk1" bg2="lt2" tx2="dk2" accent1="accent1" accent2="accent2" accent3="accent3" accent4="accent4" accent5="accent5" accent6="accent6" hlink="hlink" folHlink="folHlink"/>
+  <p:notesStyle>
+    <a:lvl1pPr marL="0" algn="l" defTabSz="914400" rtl="0" eaLnBrk="1" latinLnBrk="0" hangingPunct="1">
+      <a:defRPr sz="1200" kern="1200">
+        <a:solidFill>
+          <a:schemeClr val="tx1"/>
+        </a:solidFill>
+        <a:latin typeface="+mn-lt"/>
+        <a:ea typeface="+mn-ea"/>
+        <a:cs typeface="+mn-cs"/>
+      </a:defRPr>
+    </a:lvl1pPr>
+    <a:lvl2pPr marL="457200" algn="l" defTabSz="914400" rtl="0" eaLnBrk="1" latinLnBrk="0" hangingPunct="1">
+      <a:defRPr sz="1200" kern="1200">
+        <a:solidFill>
+          <a:schemeClr val="tx1"/>
+        </a:solidFill>
+        <a:latin typeface="+mn-lt"/>
+        <a:ea typeface="+mn-ea"/>
+        <a:cs typeface="+mn-cs"/>
+      </a:defRPr>
+    </a:lvl2pPr>
+    <a:lvl3pPr marL="914400" algn="l" defTabSz="914400" rtl="0" eaLnBrk="1" latinLnBrk="0" hangingPunct="1">
+      <a:defRPr sz="1200" kern="1200">
+        <a:solidFill>
+          <a:schemeClr val="tx1"/>
+        </a:solidFill>
+        <a:latin typeface="+mn-lt"/>
+        <a:ea typeface="+mn-ea"/>
+        <a:cs typeface="+mn-cs"/>
+      </a:defRPr>
+    </a:lvl3pPr>
+    <a:lvl4pPr marL="1371600" algn="l" defTabSz="914400" rtl="0" eaLnBrk="1" latinLnBrk="0" hangingPunct="1">
+      <a:defRPr sz="1200" kern="1200">
+        <a:solidFill>
+          <a:schemeClr val="tx1"/>
+        </a:solidFill>
+        <a:latin typeface="+mn-lt"/>
+        <a:ea typeface="+mn-ea"/>
+        <a:cs typeface="+mn-cs"/>
+      </a:defRPr>
+    </a:lvl4pPr>
+    <a:lvl5pPr marL="1828800" algn="l" defTabSz="914400" rtl="0" eaLnBrk="1" latinLnBrk="0" hangingPunct="1">
+      <a:defRPr sz="1200" kern="1200">
+        <a:solidFill>
+          <a:schemeClr val="tx1"/>
+        </a:solidFill>
+        <a:latin typeface="+mn-lt"/>
+        <a:ea typeface="+mn-ea"/>
+        <a:cs typeface="+mn-cs"/>
+      </a:defRPr>
+    </a:lvl5pPr>
+    <a:lvl6pPr marL="2286000" algn="l" defTabSz="914400" rtl="0" eaLnBrk="1" latinLnBrk="0" hangingPunct="1">
+      <a:defRPr sz="1200" kern="1200">
+        <a:solidFill>
+          <a:schemeClr val="tx1"/>
+        </a:solidFill>
+        <a:latin typeface="+mn-lt"/>
+        <a:ea typeface="+mn-ea"/>
+        <a:cs typeface="+mn-cs"/>
+      </a:defRPr>
+    </a:lvl6pPr>
+    <a:lvl7pPr marL="2743200" algn="l" defTabSz="914400" rtl="0" eaLnBrk="1" latinLnBrk="0" hangingPunct="1">
+      <a:defRPr sz="1200" kern="1200">
+        <a:solidFill>
+          <a:schemeClr val="tx1"/>
+        </a:solidFill>
+        <a:latin typeface="+mn-lt"/>
+        <a:ea typeface="+mn-ea"/>
+        <a:cs typeface="+mn-cs"/>
+      </a:defRPr>
+    </a:lvl7pPr>
+    <a:lvl8pPr marL="3200400" algn="l" defTabSz="914400" rtl="0" eaLnBrk="1" latinLnBrk="0" hangingPunct="1">
+      <a:defRPr sz="1200" kern="1200">
+        <a:solidFill>
+          <a:schemeClr val="tx1"/>
+        </a:solidFill>
+        <a:latin typeface="+mn-lt"/>
+        <a:ea typeface="+mn-ea"/>
+        <a:cs typeface="+mn-cs"/>
+      </a:defRPr>
+    </a:lvl8pPr>
+    <a:lvl9pPr marL="3657600" algn="l" defTabSz="914400" rtl="0" eaLnBrk="1" latinLnBrk="0" hangingPunct="1">
+      <a:defRPr sz="1200" kern="1200">
+        <a:solidFill>
+          <a:schemeClr val="tx1"/>
+        </a:solidFill>
+        <a:latin typeface="+mn-lt"/>
+        <a:ea typeface="+mn-ea"/>
+        <a:cs typeface="+mn-cs"/>
+      </a:defRPr>
+    </a:lvl9pPr>
+  </p:notesStyle>
+</p:notesMaster>
+</file>
+
+<file path=ppt/notesSlides/notesSlide1.xml><?xml version="1.0" encoding="utf-8"?>
+<p:notes xmlns:a="http://schemas.openxmlformats.org/drawingml/2006/main" xmlns:r="http://schemas.openxmlformats.org/officeDocument/2006/relationships" xmlns:p="http://schemas.openxmlformats.org/presentationml/2006/main">
+  <p:cSld>
+    <p:spTree>
+      <p:nvGrpSpPr>
+        <p:cNvPr id="1" name=""/>
+        <p:cNvGrpSpPr/>
+        <p:nvPr/>
+      </p:nvGrpSpPr>
+      <p:grpSpPr>
+        <a:xfrm>
+          <a:off x="0" y="0"/>
+          <a:ext cx="0" cy="0"/>
+          <a:chOff x="0" y="0"/>
+          <a:chExt cx="0" cy="0"/>
+        </a:xfrm>
+      </p:grpSpPr>
+      <p:sp>
+        <p:nvSpPr>
+          <p:cNvPr id="2" name="Slide Image Placeholder 1"/>
+          <p:cNvSpPr>
+            <a:spLocks noGrp="1" noRot="1" noChangeAspect="1"/>
+          </p:cNvSpPr>
+          <p:nvPr>
+            <p:ph type="sldImg"/>
+          </p:nvPr>
+        </p:nvSpPr>
+        <p:spPr/>
+      </p:sp>
+      <p:sp>
+        <p:nvSpPr>
+          <p:cNvPr id="3" name="Notes Placeholder 2"/>
+          <p:cNvSpPr>
+            <a:spLocks noGrp="1"/>
+          </p:cNvSpPr>
+          <p:nvPr>
+            <p:ph type="body" idx="1"/>
+          </p:nvPr>
+        </p:nvSpPr>
+        <p:spPr/>
+        <p:txBody>
+          <a:bodyPr/>
+          <a:lstStyle/>
+          <a:p>
+            <a:endParaRPr lang="en-US" dirty="0"/>
+          </a:p>
+        </p:txBody>
+      </p:sp>
+      <p:sp>
+        <p:nvSpPr>
+          <p:cNvPr id="4" name="Slide Number Placeholder 3"/>
+          <p:cNvSpPr>
+            <a:spLocks noGrp="1"/>
+          </p:cNvSpPr>
+          <p:nvPr>
+            <p:ph type="sldNum" sz="quarter" idx="5"/>
+          </p:nvPr>
+        </p:nvSpPr>
+        <p:spPr/>
+        <p:txBody>
+          <a:bodyPr/>
+          <a:lstStyle/>
+          <a:p>
+            <a:fld id="{8F50ACB0-B974-924D-BA94-4F6C0E59EA98}" type="slidenum">
+              <a:rPr lang="en-US" smtClean="0"/>
+              <a:t>3</a:t>
+            </a:fld>
+            <a:endParaRPr lang="en-US"/>
+          </a:p>
+        </p:txBody>
+      </p:sp>
+    </p:spTree>
+    <p:extLst>
+      <p:ext uri="{BB962C8B-B14F-4D97-AF65-F5344CB8AC3E}">
+        <p14:creationId xmlns:p14="http://schemas.microsoft.com/office/powerpoint/2010/main" val="4000429969"/>
+      </p:ext>
+    </p:extLst>
+  </p:cSld>
+  <p:clrMapOvr>
+    <a:masterClrMapping/>
+  </p:clrMapOvr>
+</p:notes>
 </file>
 
 <file path=ppt/slideLayouts/slideLayout1.xml><?xml version="1.0" encoding="utf-8"?>
@@ -152,18 +611,23 @@
         </p:nvSpPr>
         <p:spPr>
           <a:xfrm>
-            <a:off x="685800" y="2130425"/>
-            <a:ext cx="7772400" cy="1470025"/>
-          </a:xfrm>
-        </p:spPr>
-        <p:txBody>
-          <a:bodyPr/>
-          <a:lstStyle/>
+            <a:off x="582930" y="1646133"/>
+            <a:ext cx="6606540" cy="3501813"/>
+          </a:xfrm>
+        </p:spPr>
+        <p:txBody>
+          <a:bodyPr anchor="b"/>
+          <a:lstStyle>
+            <a:lvl1pPr algn="ctr">
+              <a:defRPr sz="5100"/>
+            </a:lvl1pPr>
+          </a:lstStyle>
           <a:p>
             <a:r>
               <a:rPr lang="en-US"/>
               <a:t>Click to edit Master title style</a:t>
             </a:r>
+            <a:endParaRPr lang="en-US" dirty="0"/>
           </a:p>
         </p:txBody>
       </p:sp>
@@ -179,8 +643,8 @@
         </p:nvSpPr>
         <p:spPr>
           <a:xfrm>
-            <a:off x="1371600" y="3886200"/>
-            <a:ext cx="6400800" cy="1752600"/>
+            <a:off x="971550" y="5282989"/>
+            <a:ext cx="5829300" cy="2428451"/>
           </a:xfrm>
         </p:spPr>
         <p:txBody>
@@ -188,93 +652,39 @@
           <a:lstStyle>
             <a:lvl1pPr marL="0" indent="0" algn="ctr">
               <a:buNone/>
-              <a:defRPr>
-                <a:solidFill>
-                  <a:schemeClr val="tx1">
-                    <a:tint val="75000"/>
-                  </a:schemeClr>
-                </a:solidFill>
-              </a:defRPr>
+              <a:defRPr sz="2040"/>
             </a:lvl1pPr>
-            <a:lvl2pPr marL="457200" indent="0" algn="ctr">
+            <a:lvl2pPr marL="388620" indent="0" algn="ctr">
               <a:buNone/>
-              <a:defRPr>
-                <a:solidFill>
-                  <a:schemeClr val="tx1">
-                    <a:tint val="75000"/>
-                  </a:schemeClr>
-                </a:solidFill>
-              </a:defRPr>
+              <a:defRPr sz="1700"/>
             </a:lvl2pPr>
-            <a:lvl3pPr marL="914400" indent="0" algn="ctr">
+            <a:lvl3pPr marL="777240" indent="0" algn="ctr">
               <a:buNone/>
-              <a:defRPr>
-                <a:solidFill>
-                  <a:schemeClr val="tx1">
-                    <a:tint val="75000"/>
-                  </a:schemeClr>
-                </a:solidFill>
-              </a:defRPr>
+              <a:defRPr sz="1530"/>
             </a:lvl3pPr>
-            <a:lvl4pPr marL="1371600" indent="0" algn="ctr">
+            <a:lvl4pPr marL="1165860" indent="0" algn="ctr">
               <a:buNone/>
-              <a:defRPr>
-                <a:solidFill>
-                  <a:schemeClr val="tx1">
-                    <a:tint val="75000"/>
-                  </a:schemeClr>
-                </a:solidFill>
-              </a:defRPr>
+              <a:defRPr sz="1360"/>
             </a:lvl4pPr>
-            <a:lvl5pPr marL="1828800" indent="0" algn="ctr">
+            <a:lvl5pPr marL="1554480" indent="0" algn="ctr">
               <a:buNone/>
-              <a:defRPr>
-                <a:solidFill>
-                  <a:schemeClr val="tx1">
-                    <a:tint val="75000"/>
-                  </a:schemeClr>
-                </a:solidFill>
-              </a:defRPr>
+              <a:defRPr sz="1360"/>
             </a:lvl5pPr>
-            <a:lvl6pPr marL="2286000" indent="0" algn="ctr">
+            <a:lvl6pPr marL="1943100" indent="0" algn="ctr">
               <a:buNone/>
-              <a:defRPr>
-                <a:solidFill>
-                  <a:schemeClr val="tx1">
-                    <a:tint val="75000"/>
-                  </a:schemeClr>
-                </a:solidFill>
-              </a:defRPr>
+              <a:defRPr sz="1360"/>
             </a:lvl6pPr>
-            <a:lvl7pPr marL="2743200" indent="0" algn="ctr">
+            <a:lvl7pPr marL="2331720" indent="0" algn="ctr">
               <a:buNone/>
-              <a:defRPr>
-                <a:solidFill>
-                  <a:schemeClr val="tx1">
-                    <a:tint val="75000"/>
-                  </a:schemeClr>
-                </a:solidFill>
-              </a:defRPr>
+              <a:defRPr sz="1360"/>
             </a:lvl7pPr>
-            <a:lvl8pPr marL="3200400" indent="0" algn="ctr">
+            <a:lvl8pPr marL="2720340" indent="0" algn="ctr">
               <a:buNone/>
-              <a:defRPr>
-                <a:solidFill>
-                  <a:schemeClr val="tx1">
-                    <a:tint val="75000"/>
-                  </a:schemeClr>
-                </a:solidFill>
-              </a:defRPr>
+              <a:defRPr sz="1360"/>
             </a:lvl8pPr>
-            <a:lvl9pPr marL="3657600" indent="0" algn="ctr">
+            <a:lvl9pPr marL="3108960" indent="0" algn="ctr">
               <a:buNone/>
-              <a:defRPr>
-                <a:solidFill>
-                  <a:schemeClr val="tx1">
-                    <a:tint val="75000"/>
-                  </a:schemeClr>
-                </a:solidFill>
-              </a:defRPr>
+              <a:defRPr sz="1360"/>
             </a:lvl9pPr>
           </a:lstStyle>
           <a:p>
@@ -282,6 +692,7 @@
               <a:rPr lang="en-US"/>
               <a:t>Click to edit Master subtitle style</a:t>
             </a:r>
+            <a:endParaRPr lang="en-US" dirty="0"/>
           </a:p>
         </p:txBody>
       </p:sp>
@@ -300,9 +711,9 @@
           <a:bodyPr/>
           <a:lstStyle/>
           <a:p>
-            <a:fld id="{5BCAD085-E8A6-8845-BD4E-CB4CCA059FC4}" type="datetimeFigureOut">
+            <a:fld id="{E6ABF4C5-BF9C-40A8-A020-04F3F3965A01}" type="datetimeFigureOut">
               <a:rPr lang="en-US" smtClean="0"/>
-              <a:t>10/15/2026</a:t>
+              <a:t>10/16/26</a:t>
             </a:fld>
             <a:endParaRPr lang="en-US"/>
           </a:p>
@@ -342,7 +753,7 @@
           <a:bodyPr/>
           <a:lstStyle/>
           <a:p>
-            <a:fld id="{C1FF6DA9-008F-8B48-92A6-B652298478BF}" type="slidenum">
+            <a:fld id="{CD7EFF58-81F3-4FED-A321-0429597B1631}" type="slidenum">
               <a:rPr lang="en-US" smtClean="0"/>
               <a:t>‹#›</a:t>
             </a:fld>
@@ -353,7 +764,7 @@
     </p:spTree>
     <p:extLst>
       <p:ext uri="{BB962C8B-B14F-4D97-AF65-F5344CB8AC3E}">
-        <p14:creationId xmlns:p14="http://schemas.microsoft.com/office/powerpoint/2010/main" val="3168075583"/>
+        <p14:creationId xmlns:p14="http://schemas.microsoft.com/office/powerpoint/2010/main" val="3510344768"/>
       </p:ext>
     </p:extLst>
   </p:cSld>
@@ -399,6 +810,7 @@
               <a:rPr lang="en-US"/>
               <a:t>Click to edit Master title style</a:t>
             </a:r>
+            <a:endParaRPr lang="en-US" dirty="0"/>
           </a:p>
         </p:txBody>
       </p:sp>
@@ -450,6 +862,7 @@
               <a:rPr lang="en-US"/>
               <a:t>Fifth level</a:t>
             </a:r>
+            <a:endParaRPr lang="en-US" dirty="0"/>
           </a:p>
         </p:txBody>
       </p:sp>
@@ -468,9 +881,9 @@
           <a:bodyPr/>
           <a:lstStyle/>
           <a:p>
-            <a:fld id="{5BCAD085-E8A6-8845-BD4E-CB4CCA059FC4}" type="datetimeFigureOut">
+            <a:fld id="{E6ABF4C5-BF9C-40A8-A020-04F3F3965A01}" type="datetimeFigureOut">
               <a:rPr lang="en-US" smtClean="0"/>
-              <a:t>10/15/2026</a:t>
+              <a:t>10/16/26</a:t>
             </a:fld>
             <a:endParaRPr lang="en-US"/>
           </a:p>
@@ -510,7 +923,7 @@
           <a:bodyPr/>
           <a:lstStyle/>
           <a:p>
-            <a:fld id="{C1FF6DA9-008F-8B48-92A6-B652298478BF}" type="slidenum">
+            <a:fld id="{CD7EFF58-81F3-4FED-A321-0429597B1631}" type="slidenum">
               <a:rPr lang="en-US" smtClean="0"/>
               <a:t>‹#›</a:t>
             </a:fld>
@@ -521,7 +934,7 @@
     </p:spTree>
     <p:extLst>
       <p:ext uri="{BB962C8B-B14F-4D97-AF65-F5344CB8AC3E}">
-        <p14:creationId xmlns:p14="http://schemas.microsoft.com/office/powerpoint/2010/main" val="2910927964"/>
+        <p14:creationId xmlns:p14="http://schemas.microsoft.com/office/powerpoint/2010/main" val="609456040"/>
       </p:ext>
     </p:extLst>
   </p:cSld>
@@ -560,8 +973,8 @@
         </p:nvSpPr>
         <p:spPr>
           <a:xfrm>
-            <a:off x="6629400" y="274638"/>
-            <a:ext cx="2057400" cy="5851525"/>
+            <a:off x="5562124" y="535517"/>
+            <a:ext cx="1675924" cy="8524029"/>
           </a:xfrm>
         </p:spPr>
         <p:txBody>
@@ -572,6 +985,7 @@
               <a:rPr lang="en-US"/>
               <a:t>Click to edit Master title style</a:t>
             </a:r>
+            <a:endParaRPr lang="en-US" dirty="0"/>
           </a:p>
         </p:txBody>
       </p:sp>
@@ -587,8 +1001,8 @@
         </p:nvSpPr>
         <p:spPr>
           <a:xfrm>
-            <a:off x="457200" y="274638"/>
-            <a:ext cx="6019800" cy="5851525"/>
+            <a:off x="534353" y="535517"/>
+            <a:ext cx="4930616" cy="8524029"/>
           </a:xfrm>
         </p:spPr>
         <p:txBody>
@@ -628,6 +1042,7 @@
               <a:rPr lang="en-US"/>
               <a:t>Fifth level</a:t>
             </a:r>
+            <a:endParaRPr lang="en-US" dirty="0"/>
           </a:p>
         </p:txBody>
       </p:sp>
@@ -646,9 +1061,9 @@
           <a:bodyPr/>
           <a:lstStyle/>
           <a:p>
-            <a:fld id="{5BCAD085-E8A6-8845-BD4E-CB4CCA059FC4}" type="datetimeFigureOut">
+            <a:fld id="{E6ABF4C5-BF9C-40A8-A020-04F3F3965A01}" type="datetimeFigureOut">
               <a:rPr lang="en-US" smtClean="0"/>
-              <a:t>10/15/2026</a:t>
+              <a:t>10/16/26</a:t>
             </a:fld>
             <a:endParaRPr lang="en-US"/>
           </a:p>
@@ -688,7 +1103,7 @@
           <a:bodyPr/>
           <a:lstStyle/>
           <a:p>
-            <a:fld id="{C1FF6DA9-008F-8B48-92A6-B652298478BF}" type="slidenum">
+            <a:fld id="{CD7EFF58-81F3-4FED-A321-0429597B1631}" type="slidenum">
               <a:rPr lang="en-US" smtClean="0"/>
               <a:t>‹#›</a:t>
             </a:fld>
@@ -699,7 +1114,7 @@
     </p:spTree>
     <p:extLst>
       <p:ext uri="{BB962C8B-B14F-4D97-AF65-F5344CB8AC3E}">
-        <p14:creationId xmlns:p14="http://schemas.microsoft.com/office/powerpoint/2010/main" val="3612223792"/>
+        <p14:creationId xmlns:p14="http://schemas.microsoft.com/office/powerpoint/2010/main" val="27992169"/>
       </p:ext>
     </p:extLst>
   </p:cSld>
@@ -745,6 +1160,7 @@
               <a:rPr lang="en-US"/>
               <a:t>Click to edit Master title style</a:t>
             </a:r>
+            <a:endParaRPr lang="en-US" dirty="0"/>
           </a:p>
         </p:txBody>
       </p:sp>
@@ -796,6 +1212,7 @@
               <a:rPr lang="en-US"/>
               <a:t>Fifth level</a:t>
             </a:r>
+            <a:endParaRPr lang="en-US" dirty="0"/>
           </a:p>
         </p:txBody>
       </p:sp>
@@ -814,9 +1231,9 @@
           <a:bodyPr/>
           <a:lstStyle/>
           <a:p>
-            <a:fld id="{5BCAD085-E8A6-8845-BD4E-CB4CCA059FC4}" type="datetimeFigureOut">
+            <a:fld id="{E6ABF4C5-BF9C-40A8-A020-04F3F3965A01}" type="datetimeFigureOut">
               <a:rPr lang="en-US" smtClean="0"/>
-              <a:t>10/15/2026</a:t>
+              <a:t>10/16/26</a:t>
             </a:fld>
             <a:endParaRPr lang="en-US"/>
           </a:p>
@@ -856,7 +1273,7 @@
           <a:bodyPr/>
           <a:lstStyle/>
           <a:p>
-            <a:fld id="{C1FF6DA9-008F-8B48-92A6-B652298478BF}" type="slidenum">
+            <a:fld id="{CD7EFF58-81F3-4FED-A321-0429597B1631}" type="slidenum">
               <a:rPr lang="en-US" smtClean="0"/>
               <a:t>‹#›</a:t>
             </a:fld>
@@ -867,7 +1284,7 @@
     </p:spTree>
     <p:extLst>
       <p:ext uri="{BB962C8B-B14F-4D97-AF65-F5344CB8AC3E}">
-        <p14:creationId xmlns:p14="http://schemas.microsoft.com/office/powerpoint/2010/main" val="2614314258"/>
+        <p14:creationId xmlns:p14="http://schemas.microsoft.com/office/powerpoint/2010/main" val="3324722045"/>
       </p:ext>
     </p:extLst>
   </p:cSld>
@@ -906,15 +1323,15 @@
         </p:nvSpPr>
         <p:spPr>
           <a:xfrm>
-            <a:off x="722313" y="4406900"/>
-            <a:ext cx="7772400" cy="1362075"/>
-          </a:xfrm>
-        </p:spPr>
-        <p:txBody>
-          <a:bodyPr anchor="t"/>
+            <a:off x="530305" y="2507618"/>
+            <a:ext cx="6703695" cy="4184014"/>
+          </a:xfrm>
+        </p:spPr>
+        <p:txBody>
+          <a:bodyPr anchor="b"/>
           <a:lstStyle>
-            <a:lvl1pPr algn="l">
-              <a:defRPr sz="4000" b="1" cap="all"/>
+            <a:lvl1pPr>
+              <a:defRPr sz="5100"/>
             </a:lvl1pPr>
           </a:lstStyle>
           <a:p>
@@ -922,6 +1339,7 @@
               <a:rPr lang="en-US"/>
               <a:t>Click to edit Master title style</a:t>
             </a:r>
+            <a:endParaRPr lang="en-US" dirty="0"/>
           </a:p>
         </p:txBody>
       </p:sp>
@@ -937,99 +1355,99 @@
         </p:nvSpPr>
         <p:spPr>
           <a:xfrm>
-            <a:off x="722313" y="2906713"/>
-            <a:ext cx="7772400" cy="1500187"/>
-          </a:xfrm>
-        </p:spPr>
-        <p:txBody>
-          <a:bodyPr anchor="b"/>
+            <a:off x="530305" y="6731215"/>
+            <a:ext cx="6703695" cy="2200274"/>
+          </a:xfrm>
+        </p:spPr>
+        <p:txBody>
+          <a:bodyPr/>
           <a:lstStyle>
             <a:lvl1pPr marL="0" indent="0">
               <a:buNone/>
-              <a:defRPr sz="2000">
+              <a:defRPr sz="2040">
                 <a:solidFill>
                   <a:schemeClr val="tx1">
-                    <a:tint val="75000"/>
+                    <a:tint val="82000"/>
                   </a:schemeClr>
                 </a:solidFill>
               </a:defRPr>
             </a:lvl1pPr>
-            <a:lvl2pPr marL="457200" indent="0">
+            <a:lvl2pPr marL="388620" indent="0">
               <a:buNone/>
-              <a:defRPr sz="1800">
+              <a:defRPr sz="1700">
                 <a:solidFill>
                   <a:schemeClr val="tx1">
-                    <a:tint val="75000"/>
+                    <a:tint val="82000"/>
                   </a:schemeClr>
                 </a:solidFill>
               </a:defRPr>
             </a:lvl2pPr>
-            <a:lvl3pPr marL="914400" indent="0">
+            <a:lvl3pPr marL="777240" indent="0">
               <a:buNone/>
-              <a:defRPr sz="1600">
+              <a:defRPr sz="1530">
                 <a:solidFill>
                   <a:schemeClr val="tx1">
-                    <a:tint val="75000"/>
+                    <a:tint val="82000"/>
                   </a:schemeClr>
                 </a:solidFill>
               </a:defRPr>
             </a:lvl3pPr>
-            <a:lvl4pPr marL="1371600" indent="0">
+            <a:lvl4pPr marL="1165860" indent="0">
               <a:buNone/>
-              <a:defRPr sz="1400">
+              <a:defRPr sz="1360">
                 <a:solidFill>
                   <a:schemeClr val="tx1">
-                    <a:tint val="75000"/>
+                    <a:tint val="82000"/>
                   </a:schemeClr>
                 </a:solidFill>
               </a:defRPr>
             </a:lvl4pPr>
-            <a:lvl5pPr marL="1828800" indent="0">
+            <a:lvl5pPr marL="1554480" indent="0">
               <a:buNone/>
-              <a:defRPr sz="1400">
+              <a:defRPr sz="1360">
                 <a:solidFill>
                   <a:schemeClr val="tx1">
-                    <a:tint val="75000"/>
+                    <a:tint val="82000"/>
                   </a:schemeClr>
                 </a:solidFill>
               </a:defRPr>
             </a:lvl5pPr>
-            <a:lvl6pPr marL="2286000" indent="0">
+            <a:lvl6pPr marL="1943100" indent="0">
               <a:buNone/>
-              <a:defRPr sz="1400">
+              <a:defRPr sz="1360">
                 <a:solidFill>
                   <a:schemeClr val="tx1">
-                    <a:tint val="75000"/>
+                    <a:tint val="82000"/>
                   </a:schemeClr>
                 </a:solidFill>
               </a:defRPr>
             </a:lvl6pPr>
-            <a:lvl7pPr marL="2743200" indent="0">
+            <a:lvl7pPr marL="2331720" indent="0">
               <a:buNone/>
-              <a:defRPr sz="1400">
+              <a:defRPr sz="1360">
                 <a:solidFill>
                   <a:schemeClr val="tx1">
-                    <a:tint val="75000"/>
+                    <a:tint val="82000"/>
                   </a:schemeClr>
                 </a:solidFill>
               </a:defRPr>
             </a:lvl7pPr>
-            <a:lvl8pPr marL="3200400" indent="0">
+            <a:lvl8pPr marL="2720340" indent="0">
               <a:buNone/>
-              <a:defRPr sz="1400">
+              <a:defRPr sz="1360">
                 <a:solidFill>
                   <a:schemeClr val="tx1">
-                    <a:tint val="75000"/>
+                    <a:tint val="82000"/>
                   </a:schemeClr>
                 </a:solidFill>
               </a:defRPr>
             </a:lvl8pPr>
-            <a:lvl9pPr marL="3657600" indent="0">
+            <a:lvl9pPr marL="3108960" indent="0">
               <a:buNone/>
-              <a:defRPr sz="1400">
+              <a:defRPr sz="1360">
                 <a:solidFill>
                   <a:schemeClr val="tx1">
-                    <a:tint val="75000"/>
+                    <a:tint val="82000"/>
                   </a:schemeClr>
                 </a:solidFill>
               </a:defRPr>
@@ -1059,9 +1477,9 @@
           <a:bodyPr/>
           <a:lstStyle/>
           <a:p>
-            <a:fld id="{5BCAD085-E8A6-8845-BD4E-CB4CCA059FC4}" type="datetimeFigureOut">
+            <a:fld id="{E6ABF4C5-BF9C-40A8-A020-04F3F3965A01}" type="datetimeFigureOut">
               <a:rPr lang="en-US" smtClean="0"/>
-              <a:t>10/15/2026</a:t>
+              <a:t>10/16/26</a:t>
             </a:fld>
             <a:endParaRPr lang="en-US"/>
           </a:p>
@@ -1101,7 +1519,7 @@
           <a:bodyPr/>
           <a:lstStyle/>
           <a:p>
-            <a:fld id="{C1FF6DA9-008F-8B48-92A6-B652298478BF}" type="slidenum">
+            <a:fld id="{CD7EFF58-81F3-4FED-A321-0429597B1631}" type="slidenum">
               <a:rPr lang="en-US" smtClean="0"/>
               <a:t>‹#›</a:t>
             </a:fld>
@@ -1112,7 +1530,7 @@
     </p:spTree>
     <p:extLst>
       <p:ext uri="{BB962C8B-B14F-4D97-AF65-F5344CB8AC3E}">
-        <p14:creationId xmlns:p14="http://schemas.microsoft.com/office/powerpoint/2010/main" val="960648375"/>
+        <p14:creationId xmlns:p14="http://schemas.microsoft.com/office/powerpoint/2010/main" val="3534853148"/>
       </p:ext>
     </p:extLst>
   </p:cSld>
@@ -1158,6 +1576,7 @@
               <a:rPr lang="en-US"/>
               <a:t>Click to edit Master title style</a:t>
             </a:r>
+            <a:endParaRPr lang="en-US" dirty="0"/>
           </a:p>
         </p:txBody>
       </p:sp>
@@ -1173,41 +1592,13 @@
         </p:nvSpPr>
         <p:spPr>
           <a:xfrm>
-            <a:off x="457200" y="1600200"/>
-            <a:ext cx="4038600" cy="4525963"/>
+            <a:off x="534353" y="2677584"/>
+            <a:ext cx="3303270" cy="6381962"/>
           </a:xfrm>
         </p:spPr>
         <p:txBody>
           <a:bodyPr/>
-          <a:lstStyle>
-            <a:lvl1pPr>
-              <a:defRPr sz="2800"/>
-            </a:lvl1pPr>
-            <a:lvl2pPr>
-              <a:defRPr sz="2400"/>
-            </a:lvl2pPr>
-            <a:lvl3pPr>
-              <a:defRPr sz="2000"/>
-            </a:lvl3pPr>
-            <a:lvl4pPr>
-              <a:defRPr sz="1800"/>
-            </a:lvl4pPr>
-            <a:lvl5pPr>
-              <a:defRPr sz="1800"/>
-            </a:lvl5pPr>
-            <a:lvl6pPr>
-              <a:defRPr sz="1800"/>
-            </a:lvl6pPr>
-            <a:lvl7pPr>
-              <a:defRPr sz="1800"/>
-            </a:lvl7pPr>
-            <a:lvl8pPr>
-              <a:defRPr sz="1800"/>
-            </a:lvl8pPr>
-            <a:lvl9pPr>
-              <a:defRPr sz="1800"/>
-            </a:lvl9pPr>
-          </a:lstStyle>
+          <a:lstStyle/>
           <a:p>
             <a:pPr lvl="0"/>
             <a:r>
@@ -1242,6 +1633,7 @@
               <a:rPr lang="en-US"/>
               <a:t>Fifth level</a:t>
             </a:r>
+            <a:endParaRPr lang="en-US" dirty="0"/>
           </a:p>
         </p:txBody>
       </p:sp>
@@ -1257,41 +1649,13 @@
         </p:nvSpPr>
         <p:spPr>
           <a:xfrm>
-            <a:off x="4648200" y="1600200"/>
-            <a:ext cx="4038600" cy="4525963"/>
+            <a:off x="3934778" y="2677584"/>
+            <a:ext cx="3303270" cy="6381962"/>
           </a:xfrm>
         </p:spPr>
         <p:txBody>
           <a:bodyPr/>
-          <a:lstStyle>
-            <a:lvl1pPr>
-              <a:defRPr sz="2800"/>
-            </a:lvl1pPr>
-            <a:lvl2pPr>
-              <a:defRPr sz="2400"/>
-            </a:lvl2pPr>
-            <a:lvl3pPr>
-              <a:defRPr sz="2000"/>
-            </a:lvl3pPr>
-            <a:lvl4pPr>
-              <a:defRPr sz="1800"/>
-            </a:lvl4pPr>
-            <a:lvl5pPr>
-              <a:defRPr sz="1800"/>
-            </a:lvl5pPr>
-            <a:lvl6pPr>
-              <a:defRPr sz="1800"/>
-            </a:lvl6pPr>
-            <a:lvl7pPr>
-              <a:defRPr sz="1800"/>
-            </a:lvl7pPr>
-            <a:lvl8pPr>
-              <a:defRPr sz="1800"/>
-            </a:lvl8pPr>
-            <a:lvl9pPr>
-              <a:defRPr sz="1800"/>
-            </a:lvl9pPr>
-          </a:lstStyle>
+          <a:lstStyle/>
           <a:p>
             <a:pPr lvl="0"/>
             <a:r>
@@ -1326,6 +1690,7 @@
               <a:rPr lang="en-US"/>
               <a:t>Fifth level</a:t>
             </a:r>
+            <a:endParaRPr lang="en-US" dirty="0"/>
           </a:p>
         </p:txBody>
       </p:sp>
@@ -1344,9 +1709,9 @@
           <a:bodyPr/>
           <a:lstStyle/>
           <a:p>
-            <a:fld id="{5BCAD085-E8A6-8845-BD4E-CB4CCA059FC4}" type="datetimeFigureOut">
+            <a:fld id="{E6ABF4C5-BF9C-40A8-A020-04F3F3965A01}" type="datetimeFigureOut">
               <a:rPr lang="en-US" smtClean="0"/>
-              <a:t>10/15/2026</a:t>
+              <a:t>10/16/26</a:t>
             </a:fld>
             <a:endParaRPr lang="en-US"/>
           </a:p>
@@ -1386,7 +1751,7 @@
           <a:bodyPr/>
           <a:lstStyle/>
           <a:p>
-            <a:fld id="{C1FF6DA9-008F-8B48-92A6-B652298478BF}" type="slidenum">
+            <a:fld id="{CD7EFF58-81F3-4FED-A321-0429597B1631}" type="slidenum">
               <a:rPr lang="en-US" smtClean="0"/>
               <a:t>‹#›</a:t>
             </a:fld>
@@ -1397,7 +1762,7 @@
     </p:spTree>
     <p:extLst>
       <p:ext uri="{BB962C8B-B14F-4D97-AF65-F5344CB8AC3E}">
-        <p14:creationId xmlns:p14="http://schemas.microsoft.com/office/powerpoint/2010/main" val="2782244947"/>
+        <p14:creationId xmlns:p14="http://schemas.microsoft.com/office/powerpoint/2010/main" val="3256324792"/>
       </p:ext>
     </p:extLst>
   </p:cSld>
@@ -1434,19 +1799,21 @@
             <p:ph type="title"/>
           </p:nvPr>
         </p:nvSpPr>
-        <p:spPr/>
+        <p:spPr>
+          <a:xfrm>
+            <a:off x="535365" y="535519"/>
+            <a:ext cx="6703695" cy="1944159"/>
+          </a:xfrm>
+        </p:spPr>
         <p:txBody>
           <a:bodyPr/>
-          <a:lstStyle>
-            <a:lvl1pPr>
-              <a:defRPr/>
-            </a:lvl1pPr>
-          </a:lstStyle>
+          <a:lstStyle/>
           <a:p>
             <a:r>
               <a:rPr lang="en-US"/>
               <a:t>Click to edit Master title style</a:t>
             </a:r>
+            <a:endParaRPr lang="en-US" dirty="0"/>
           </a:p>
         </p:txBody>
       </p:sp>
@@ -1462,8 +1829,8 @@
         </p:nvSpPr>
         <p:spPr>
           <a:xfrm>
-            <a:off x="457200" y="1535113"/>
-            <a:ext cx="4040188" cy="639762"/>
+            <a:off x="535366" y="2465706"/>
+            <a:ext cx="3288089" cy="1208404"/>
           </a:xfrm>
         </p:spPr>
         <p:txBody>
@@ -1471,39 +1838,39 @@
           <a:lstStyle>
             <a:lvl1pPr marL="0" indent="0">
               <a:buNone/>
-              <a:defRPr sz="2400" b="1"/>
+              <a:defRPr sz="2040" b="1"/>
             </a:lvl1pPr>
-            <a:lvl2pPr marL="457200" indent="0">
+            <a:lvl2pPr marL="388620" indent="0">
               <a:buNone/>
-              <a:defRPr sz="2000" b="1"/>
+              <a:defRPr sz="1700" b="1"/>
             </a:lvl2pPr>
-            <a:lvl3pPr marL="914400" indent="0">
+            <a:lvl3pPr marL="777240" indent="0">
               <a:buNone/>
-              <a:defRPr sz="1800" b="1"/>
+              <a:defRPr sz="1530" b="1"/>
             </a:lvl3pPr>
-            <a:lvl4pPr marL="1371600" indent="0">
+            <a:lvl4pPr marL="1165860" indent="0">
               <a:buNone/>
-              <a:defRPr sz="1600" b="1"/>
+              <a:defRPr sz="1360" b="1"/>
             </a:lvl4pPr>
-            <a:lvl5pPr marL="1828800" indent="0">
+            <a:lvl5pPr marL="1554480" indent="0">
               <a:buNone/>
-              <a:defRPr sz="1600" b="1"/>
+              <a:defRPr sz="1360" b="1"/>
             </a:lvl5pPr>
-            <a:lvl6pPr marL="2286000" indent="0">
+            <a:lvl6pPr marL="1943100" indent="0">
               <a:buNone/>
-              <a:defRPr sz="1600" b="1"/>
+              <a:defRPr sz="1360" b="1"/>
             </a:lvl6pPr>
-            <a:lvl7pPr marL="2743200" indent="0">
+            <a:lvl7pPr marL="2331720" indent="0">
               <a:buNone/>
-              <a:defRPr sz="1600" b="1"/>
+              <a:defRPr sz="1360" b="1"/>
             </a:lvl7pPr>
-            <a:lvl8pPr marL="3200400" indent="0">
+            <a:lvl8pPr marL="2720340" indent="0">
               <a:buNone/>
-              <a:defRPr sz="1600" b="1"/>
+              <a:defRPr sz="1360" b="1"/>
             </a:lvl8pPr>
-            <a:lvl9pPr marL="3657600" indent="0">
+            <a:lvl9pPr marL="3108960" indent="0">
               <a:buNone/>
-              <a:defRPr sz="1600" b="1"/>
+              <a:defRPr sz="1360" b="1"/>
             </a:lvl9pPr>
           </a:lstStyle>
           <a:p>
@@ -1527,41 +1894,13 @@
         </p:nvSpPr>
         <p:spPr>
           <a:xfrm>
-            <a:off x="457200" y="2174875"/>
-            <a:ext cx="4040188" cy="3951288"/>
+            <a:off x="535366" y="3674110"/>
+            <a:ext cx="3288089" cy="5404062"/>
           </a:xfrm>
         </p:spPr>
         <p:txBody>
           <a:bodyPr/>
-          <a:lstStyle>
-            <a:lvl1pPr>
-              <a:defRPr sz="2400"/>
-            </a:lvl1pPr>
-            <a:lvl2pPr>
-              <a:defRPr sz="2000"/>
-            </a:lvl2pPr>
-            <a:lvl3pPr>
-              <a:defRPr sz="1800"/>
-            </a:lvl3pPr>
-            <a:lvl4pPr>
-              <a:defRPr sz="1600"/>
-            </a:lvl4pPr>
-            <a:lvl5pPr>
-              <a:defRPr sz="1600"/>
-            </a:lvl5pPr>
-            <a:lvl6pPr>
-              <a:defRPr sz="1600"/>
-            </a:lvl6pPr>
-            <a:lvl7pPr>
-              <a:defRPr sz="1600"/>
-            </a:lvl7pPr>
-            <a:lvl8pPr>
-              <a:defRPr sz="1600"/>
-            </a:lvl8pPr>
-            <a:lvl9pPr>
-              <a:defRPr sz="1600"/>
-            </a:lvl9pPr>
-          </a:lstStyle>
+          <a:lstStyle/>
           <a:p>
             <a:pPr lvl="0"/>
             <a:r>
@@ -1596,6 +1935,7 @@
               <a:rPr lang="en-US"/>
               <a:t>Fifth level</a:t>
             </a:r>
+            <a:endParaRPr lang="en-US" dirty="0"/>
           </a:p>
         </p:txBody>
       </p:sp>
@@ -1611,8 +1951,8 @@
         </p:nvSpPr>
         <p:spPr>
           <a:xfrm>
-            <a:off x="4645025" y="1535113"/>
-            <a:ext cx="4041775" cy="639762"/>
+            <a:off x="3934778" y="2465706"/>
+            <a:ext cx="3304282" cy="1208404"/>
           </a:xfrm>
         </p:spPr>
         <p:txBody>
@@ -1620,39 +1960,39 @@
           <a:lstStyle>
             <a:lvl1pPr marL="0" indent="0">
               <a:buNone/>
-              <a:defRPr sz="2400" b="1"/>
+              <a:defRPr sz="2040" b="1"/>
             </a:lvl1pPr>
-            <a:lvl2pPr marL="457200" indent="0">
+            <a:lvl2pPr marL="388620" indent="0">
               <a:buNone/>
-              <a:defRPr sz="2000" b="1"/>
+              <a:defRPr sz="1700" b="1"/>
             </a:lvl2pPr>
-            <a:lvl3pPr marL="914400" indent="0">
+            <a:lvl3pPr marL="777240" indent="0">
               <a:buNone/>
-              <a:defRPr sz="1800" b="1"/>
+              <a:defRPr sz="1530" b="1"/>
             </a:lvl3pPr>
-            <a:lvl4pPr marL="1371600" indent="0">
+            <a:lvl4pPr marL="1165860" indent="0">
               <a:buNone/>
-              <a:defRPr sz="1600" b="1"/>
+              <a:defRPr sz="1360" b="1"/>
             </a:lvl4pPr>
-            <a:lvl5pPr marL="1828800" indent="0">
+            <a:lvl5pPr marL="1554480" indent="0">
               <a:buNone/>
-              <a:defRPr sz="1600" b="1"/>
+              <a:defRPr sz="1360" b="1"/>
             </a:lvl5pPr>
-            <a:lvl6pPr marL="2286000" indent="0">
+            <a:lvl6pPr marL="1943100" indent="0">
               <a:buNone/>
-              <a:defRPr sz="1600" b="1"/>
+              <a:defRPr sz="1360" b="1"/>
             </a:lvl6pPr>
-            <a:lvl7pPr marL="2743200" indent="0">
+            <a:lvl7pPr marL="2331720" indent="0">
               <a:buNone/>
-              <a:defRPr sz="1600" b="1"/>
+              <a:defRPr sz="1360" b="1"/>
             </a:lvl7pPr>
-            <a:lvl8pPr marL="3200400" indent="0">
+            <a:lvl8pPr marL="2720340" indent="0">
               <a:buNone/>
-              <a:defRPr sz="1600" b="1"/>
+              <a:defRPr sz="1360" b="1"/>
             </a:lvl8pPr>
-            <a:lvl9pPr marL="3657600" indent="0">
+            <a:lvl9pPr marL="3108960" indent="0">
               <a:buNone/>
-              <a:defRPr sz="1600" b="1"/>
+              <a:defRPr sz="1360" b="1"/>
             </a:lvl9pPr>
           </a:lstStyle>
           <a:p>
@@ -1676,41 +2016,13 @@
         </p:nvSpPr>
         <p:spPr>
           <a:xfrm>
-            <a:off x="4645025" y="2174875"/>
-            <a:ext cx="4041775" cy="3951288"/>
+            <a:off x="3934778" y="3674110"/>
+            <a:ext cx="3304282" cy="5404062"/>
           </a:xfrm>
         </p:spPr>
         <p:txBody>
           <a:bodyPr/>
-          <a:lstStyle>
-            <a:lvl1pPr>
-              <a:defRPr sz="2400"/>
-            </a:lvl1pPr>
-            <a:lvl2pPr>
-              <a:defRPr sz="2000"/>
-            </a:lvl2pPr>
-            <a:lvl3pPr>
-              <a:defRPr sz="1800"/>
-            </a:lvl3pPr>
-            <a:lvl4pPr>
-              <a:defRPr sz="1600"/>
-            </a:lvl4pPr>
-            <a:lvl5pPr>
-              <a:defRPr sz="1600"/>
-            </a:lvl5pPr>
-            <a:lvl6pPr>
-              <a:defRPr sz="1600"/>
-            </a:lvl6pPr>
-            <a:lvl7pPr>
-              <a:defRPr sz="1600"/>
-            </a:lvl7pPr>
-            <a:lvl8pPr>
-              <a:defRPr sz="1600"/>
-            </a:lvl8pPr>
-            <a:lvl9pPr>
-              <a:defRPr sz="1600"/>
-            </a:lvl9pPr>
-          </a:lstStyle>
+          <a:lstStyle/>
           <a:p>
             <a:pPr lvl="0"/>
             <a:r>
@@ -1745,6 +2057,7 @@
               <a:rPr lang="en-US"/>
               <a:t>Fifth level</a:t>
             </a:r>
+            <a:endParaRPr lang="en-US" dirty="0"/>
           </a:p>
         </p:txBody>
       </p:sp>
@@ -1763,9 +2076,9 @@
           <a:bodyPr/>
           <a:lstStyle/>
           <a:p>
-            <a:fld id="{5BCAD085-E8A6-8845-BD4E-CB4CCA059FC4}" type="datetimeFigureOut">
+            <a:fld id="{E6ABF4C5-BF9C-40A8-A020-04F3F3965A01}" type="datetimeFigureOut">
               <a:rPr lang="en-US" smtClean="0"/>
-              <a:t>10/15/2026</a:t>
+              <a:t>10/16/26</a:t>
             </a:fld>
             <a:endParaRPr lang="en-US"/>
           </a:p>
@@ -1805,7 +2118,7 @@
           <a:bodyPr/>
           <a:lstStyle/>
           <a:p>
-            <a:fld id="{C1FF6DA9-008F-8B48-92A6-B652298478BF}" type="slidenum">
+            <a:fld id="{CD7EFF58-81F3-4FED-A321-0429597B1631}" type="slidenum">
               <a:rPr lang="en-US" smtClean="0"/>
               <a:t>‹#›</a:t>
             </a:fld>
@@ -1816,7 +2129,7 @@
     </p:spTree>
     <p:extLst>
       <p:ext uri="{BB962C8B-B14F-4D97-AF65-F5344CB8AC3E}">
-        <p14:creationId xmlns:p14="http://schemas.microsoft.com/office/powerpoint/2010/main" val="990158736"/>
+        <p14:creationId xmlns:p14="http://schemas.microsoft.com/office/powerpoint/2010/main" val="3891642478"/>
       </p:ext>
     </p:extLst>
   </p:cSld>
@@ -1862,6 +2175,7 @@
               <a:rPr lang="en-US"/>
               <a:t>Click to edit Master title style</a:t>
             </a:r>
+            <a:endParaRPr lang="en-US" dirty="0"/>
           </a:p>
         </p:txBody>
       </p:sp>
@@ -1880,9 +2194,9 @@
           <a:bodyPr/>
           <a:lstStyle/>
           <a:p>
-            <a:fld id="{5BCAD085-E8A6-8845-BD4E-CB4CCA059FC4}" type="datetimeFigureOut">
+            <a:fld id="{E6ABF4C5-BF9C-40A8-A020-04F3F3965A01}" type="datetimeFigureOut">
               <a:rPr lang="en-US" smtClean="0"/>
-              <a:t>10/15/2026</a:t>
+              <a:t>10/16/26</a:t>
             </a:fld>
             <a:endParaRPr lang="en-US"/>
           </a:p>
@@ -1922,7 +2236,7 @@
           <a:bodyPr/>
           <a:lstStyle/>
           <a:p>
-            <a:fld id="{C1FF6DA9-008F-8B48-92A6-B652298478BF}" type="slidenum">
+            <a:fld id="{CD7EFF58-81F3-4FED-A321-0429597B1631}" type="slidenum">
               <a:rPr lang="en-US" smtClean="0"/>
               <a:t>‹#›</a:t>
             </a:fld>
@@ -1933,7 +2247,7 @@
     </p:spTree>
     <p:extLst>
       <p:ext uri="{BB962C8B-B14F-4D97-AF65-F5344CB8AC3E}">
-        <p14:creationId xmlns:p14="http://schemas.microsoft.com/office/powerpoint/2010/main" val="727027711"/>
+        <p14:creationId xmlns:p14="http://schemas.microsoft.com/office/powerpoint/2010/main" val="3893406490"/>
       </p:ext>
     </p:extLst>
   </p:cSld>
@@ -1975,9 +2289,9 @@
           <a:bodyPr/>
           <a:lstStyle/>
           <a:p>
-            <a:fld id="{5BCAD085-E8A6-8845-BD4E-CB4CCA059FC4}" type="datetimeFigureOut">
+            <a:fld id="{E6ABF4C5-BF9C-40A8-A020-04F3F3965A01}" type="datetimeFigureOut">
               <a:rPr lang="en-US" smtClean="0"/>
-              <a:t>10/15/2026</a:t>
+              <a:t>10/16/26</a:t>
             </a:fld>
             <a:endParaRPr lang="en-US"/>
           </a:p>
@@ -2017,7 +2331,7 @@
           <a:bodyPr/>
           <a:lstStyle/>
           <a:p>
-            <a:fld id="{C1FF6DA9-008F-8B48-92A6-B652298478BF}" type="slidenum">
+            <a:fld id="{CD7EFF58-81F3-4FED-A321-0429597B1631}" type="slidenum">
               <a:rPr lang="en-US" smtClean="0"/>
               <a:t>‹#›</a:t>
             </a:fld>
@@ -2028,7 +2342,7 @@
     </p:spTree>
     <p:extLst>
       <p:ext uri="{BB962C8B-B14F-4D97-AF65-F5344CB8AC3E}">
-        <p14:creationId xmlns:p14="http://schemas.microsoft.com/office/powerpoint/2010/main" val="1212999818"/>
+        <p14:creationId xmlns:p14="http://schemas.microsoft.com/office/powerpoint/2010/main" val="553038758"/>
       </p:ext>
     </p:extLst>
   </p:cSld>
@@ -2067,15 +2381,15 @@
         </p:nvSpPr>
         <p:spPr>
           <a:xfrm>
-            <a:off x="457200" y="273050"/>
-            <a:ext cx="3008313" cy="1162050"/>
+            <a:off x="535365" y="670560"/>
+            <a:ext cx="2506801" cy="2346960"/>
           </a:xfrm>
         </p:spPr>
         <p:txBody>
           <a:bodyPr anchor="b"/>
           <a:lstStyle>
-            <a:lvl1pPr algn="l">
-              <a:defRPr sz="2000" b="1"/>
+            <a:lvl1pPr>
+              <a:defRPr sz="2720"/>
             </a:lvl1pPr>
           </a:lstStyle>
           <a:p>
@@ -2083,6 +2397,7 @@
               <a:rPr lang="en-US"/>
               <a:t>Click to edit Master title style</a:t>
             </a:r>
+            <a:endParaRPr lang="en-US" dirty="0"/>
           </a:p>
         </p:txBody>
       </p:sp>
@@ -2098,39 +2413,39 @@
         </p:nvSpPr>
         <p:spPr>
           <a:xfrm>
-            <a:off x="3575050" y="273050"/>
-            <a:ext cx="5111750" cy="5853113"/>
+            <a:off x="3304282" y="1448226"/>
+            <a:ext cx="3934778" cy="7147983"/>
           </a:xfrm>
         </p:spPr>
         <p:txBody>
           <a:bodyPr/>
           <a:lstStyle>
             <a:lvl1pPr>
-              <a:defRPr sz="3200"/>
+              <a:defRPr sz="2720"/>
             </a:lvl1pPr>
             <a:lvl2pPr>
-              <a:defRPr sz="2800"/>
+              <a:defRPr sz="2380"/>
             </a:lvl2pPr>
             <a:lvl3pPr>
-              <a:defRPr sz="2400"/>
+              <a:defRPr sz="2040"/>
             </a:lvl3pPr>
             <a:lvl4pPr>
-              <a:defRPr sz="2000"/>
+              <a:defRPr sz="1700"/>
             </a:lvl4pPr>
             <a:lvl5pPr>
-              <a:defRPr sz="2000"/>
+              <a:defRPr sz="1700"/>
             </a:lvl5pPr>
             <a:lvl6pPr>
-              <a:defRPr sz="2000"/>
+              <a:defRPr sz="1700"/>
             </a:lvl6pPr>
             <a:lvl7pPr>
-              <a:defRPr sz="2000"/>
+              <a:defRPr sz="1700"/>
             </a:lvl7pPr>
             <a:lvl8pPr>
-              <a:defRPr sz="2000"/>
+              <a:defRPr sz="1700"/>
             </a:lvl8pPr>
             <a:lvl9pPr>
-              <a:defRPr sz="2000"/>
+              <a:defRPr sz="1700"/>
             </a:lvl9pPr>
           </a:lstStyle>
           <a:p>
@@ -2167,6 +2482,7 @@
               <a:rPr lang="en-US"/>
               <a:t>Fifth level</a:t>
             </a:r>
+            <a:endParaRPr lang="en-US" dirty="0"/>
           </a:p>
         </p:txBody>
       </p:sp>
@@ -2182,8 +2498,8 @@
         </p:nvSpPr>
         <p:spPr>
           <a:xfrm>
-            <a:off x="457200" y="1435100"/>
-            <a:ext cx="3008313" cy="4691063"/>
+            <a:off x="535365" y="3017520"/>
+            <a:ext cx="2506801" cy="5590329"/>
           </a:xfrm>
         </p:spPr>
         <p:txBody>
@@ -2191,39 +2507,39 @@
           <a:lstStyle>
             <a:lvl1pPr marL="0" indent="0">
               <a:buNone/>
-              <a:defRPr sz="1400"/>
+              <a:defRPr sz="1360"/>
             </a:lvl1pPr>
-            <a:lvl2pPr marL="457200" indent="0">
+            <a:lvl2pPr marL="388620" indent="0">
               <a:buNone/>
-              <a:defRPr sz="1200"/>
+              <a:defRPr sz="1190"/>
             </a:lvl2pPr>
-            <a:lvl3pPr marL="914400" indent="0">
+            <a:lvl3pPr marL="777240" indent="0">
               <a:buNone/>
-              <a:defRPr sz="1000"/>
+              <a:defRPr sz="1020"/>
             </a:lvl3pPr>
-            <a:lvl4pPr marL="1371600" indent="0">
+            <a:lvl4pPr marL="1165860" indent="0">
               <a:buNone/>
-              <a:defRPr sz="900"/>
+              <a:defRPr sz="850"/>
             </a:lvl4pPr>
-            <a:lvl5pPr marL="1828800" indent="0">
+            <a:lvl5pPr marL="1554480" indent="0">
               <a:buNone/>
-              <a:defRPr sz="900"/>
+              <a:defRPr sz="850"/>
             </a:lvl5pPr>
-            <a:lvl6pPr marL="2286000" indent="0">
+            <a:lvl6pPr marL="1943100" indent="0">
               <a:buNone/>
-              <a:defRPr sz="900"/>
+              <a:defRPr sz="850"/>
             </a:lvl6pPr>
-            <a:lvl7pPr marL="2743200" indent="0">
+            <a:lvl7pPr marL="2331720" indent="0">
               <a:buNone/>
-              <a:defRPr sz="900"/>
+              <a:defRPr sz="850"/>
             </a:lvl7pPr>
-            <a:lvl8pPr marL="3200400" indent="0">
+            <a:lvl8pPr marL="2720340" indent="0">
               <a:buNone/>
-              <a:defRPr sz="900"/>
+              <a:defRPr sz="850"/>
             </a:lvl8pPr>
-            <a:lvl9pPr marL="3657600" indent="0">
+            <a:lvl9pPr marL="3108960" indent="0">
               <a:buNone/>
-              <a:defRPr sz="900"/>
+              <a:defRPr sz="850"/>
             </a:lvl9pPr>
           </a:lstStyle>
           <a:p>
@@ -2250,9 +2566,9 @@
           <a:bodyPr/>
           <a:lstStyle/>
           <a:p>
-            <a:fld id="{5BCAD085-E8A6-8845-BD4E-CB4CCA059FC4}" type="datetimeFigureOut">
+            <a:fld id="{E6ABF4C5-BF9C-40A8-A020-04F3F3965A01}" type="datetimeFigureOut">
               <a:rPr lang="en-US" smtClean="0"/>
-              <a:t>10/15/2026</a:t>
+              <a:t>10/16/26</a:t>
             </a:fld>
             <a:endParaRPr lang="en-US"/>
           </a:p>
@@ -2292,7 +2608,7 @@
           <a:bodyPr/>
           <a:lstStyle/>
           <a:p>
-            <a:fld id="{C1FF6DA9-008F-8B48-92A6-B652298478BF}" type="slidenum">
+            <a:fld id="{CD7EFF58-81F3-4FED-A321-0429597B1631}" type="slidenum">
               <a:rPr lang="en-US" smtClean="0"/>
               <a:t>‹#›</a:t>
             </a:fld>
@@ -2303,7 +2619,7 @@
     </p:spTree>
     <p:extLst>
       <p:ext uri="{BB962C8B-B14F-4D97-AF65-F5344CB8AC3E}">
-        <p14:creationId xmlns:p14="http://schemas.microsoft.com/office/powerpoint/2010/main" val="1840726560"/>
+        <p14:creationId xmlns:p14="http://schemas.microsoft.com/office/powerpoint/2010/main" val="2631762386"/>
       </p:ext>
     </p:extLst>
   </p:cSld>
@@ -2342,15 +2658,15 @@
         </p:nvSpPr>
         <p:spPr>
           <a:xfrm>
-            <a:off x="1792288" y="4800600"/>
-            <a:ext cx="5486400" cy="566738"/>
+            <a:off x="535365" y="670560"/>
+            <a:ext cx="2506801" cy="2346960"/>
           </a:xfrm>
         </p:spPr>
         <p:txBody>
           <a:bodyPr anchor="b"/>
           <a:lstStyle>
-            <a:lvl1pPr algn="l">
-              <a:defRPr sz="2000" b="1"/>
+            <a:lvl1pPr>
+              <a:defRPr sz="2720"/>
             </a:lvl1pPr>
           </a:lstStyle>
           <a:p>
@@ -2358,6 +2674,7 @@
               <a:rPr lang="en-US"/>
               <a:t>Click to edit Master title style</a:t>
             </a:r>
+            <a:endParaRPr lang="en-US" dirty="0"/>
           </a:p>
         </p:txBody>
       </p:sp>
@@ -2365,7 +2682,7 @@
         <p:nvSpPr>
           <p:cNvPr id="3" name="Picture Placeholder 2"/>
           <p:cNvSpPr>
-            <a:spLocks noGrp="1"/>
+            <a:spLocks noGrp="1" noChangeAspect="1"/>
           </p:cNvSpPr>
           <p:nvPr>
             <p:ph type="pic" idx="1"/>
@@ -2373,8 +2690,73 @@
         </p:nvSpPr>
         <p:spPr>
           <a:xfrm>
-            <a:off x="1792288" y="612775"/>
-            <a:ext cx="5486400" cy="4114800"/>
+            <a:off x="3304282" y="1448226"/>
+            <a:ext cx="3934778" cy="7147983"/>
+          </a:xfrm>
+        </p:spPr>
+        <p:txBody>
+          <a:bodyPr anchor="t"/>
+          <a:lstStyle>
+            <a:lvl1pPr marL="0" indent="0">
+              <a:buNone/>
+              <a:defRPr sz="2720"/>
+            </a:lvl1pPr>
+            <a:lvl2pPr marL="388620" indent="0">
+              <a:buNone/>
+              <a:defRPr sz="2380"/>
+            </a:lvl2pPr>
+            <a:lvl3pPr marL="777240" indent="0">
+              <a:buNone/>
+              <a:defRPr sz="2040"/>
+            </a:lvl3pPr>
+            <a:lvl4pPr marL="1165860" indent="0">
+              <a:buNone/>
+              <a:defRPr sz="1700"/>
+            </a:lvl4pPr>
+            <a:lvl5pPr marL="1554480" indent="0">
+              <a:buNone/>
+              <a:defRPr sz="1700"/>
+            </a:lvl5pPr>
+            <a:lvl6pPr marL="1943100" indent="0">
+              <a:buNone/>
+              <a:defRPr sz="1700"/>
+            </a:lvl6pPr>
+            <a:lvl7pPr marL="2331720" indent="0">
+              <a:buNone/>
+              <a:defRPr sz="1700"/>
+            </a:lvl7pPr>
+            <a:lvl8pPr marL="2720340" indent="0">
+              <a:buNone/>
+              <a:defRPr sz="1700"/>
+            </a:lvl8pPr>
+            <a:lvl9pPr marL="3108960" indent="0">
+              <a:buNone/>
+              <a:defRPr sz="1700"/>
+            </a:lvl9pPr>
+          </a:lstStyle>
+          <a:p>
+            <a:r>
+              <a:rPr lang="en-US"/>
+              <a:t>Click icon to add picture</a:t>
+            </a:r>
+            <a:endParaRPr lang="en-US" dirty="0"/>
+          </a:p>
+        </p:txBody>
+      </p:sp>
+      <p:sp>
+        <p:nvSpPr>
+          <p:cNvPr id="4" name="Text Placeholder 3"/>
+          <p:cNvSpPr>
+            <a:spLocks noGrp="1"/>
+          </p:cNvSpPr>
+          <p:nvPr>
+            <p:ph type="body" sz="half" idx="2"/>
+          </p:nvPr>
+        </p:nvSpPr>
+        <p:spPr>
+          <a:xfrm>
+            <a:off x="535365" y="3017520"/>
+            <a:ext cx="2506801" cy="5590329"/>
           </a:xfrm>
         </p:spPr>
         <p:txBody>
@@ -2382,129 +2764,68 @@
           <a:lstStyle>
             <a:lvl1pPr marL="0" indent="0">
               <a:buNone/>
-              <a:defRPr sz="3200"/>
+              <a:defRPr sz="1360"/>
             </a:lvl1pPr>
-            <a:lvl2pPr marL="457200" indent="0">
+            <a:lvl2pPr marL="388620" indent="0">
               <a:buNone/>
-              <a:defRPr sz="2800"/>
+              <a:defRPr sz="1190"/>
             </a:lvl2pPr>
-            <a:lvl3pPr marL="914400" indent="0">
+            <a:lvl3pPr marL="777240" indent="0">
               <a:buNone/>
-              <a:defRPr sz="2400"/>
+              <a:defRPr sz="1020"/>
             </a:lvl3pPr>
-            <a:lvl4pPr marL="1371600" indent="0">
+            <a:lvl4pPr marL="1165860" indent="0">
               <a:buNone/>
-              <a:defRPr sz="2000"/>
+              <a:defRPr sz="850"/>
             </a:lvl4pPr>
-            <a:lvl5pPr marL="1828800" indent="0">
+            <a:lvl5pPr marL="1554480" indent="0">
               <a:buNone/>
-              <a:defRPr sz="2000"/>
+              <a:defRPr sz="850"/>
             </a:lvl5pPr>
-            <a:lvl6pPr marL="2286000" indent="0">
+            <a:lvl6pPr marL="1943100" indent="0">
               <a:buNone/>
-              <a:defRPr sz="2000"/>
+              <a:defRPr sz="850"/>
             </a:lvl6pPr>
-            <a:lvl7pPr marL="2743200" indent="0">
+            <a:lvl7pPr marL="2331720" indent="0">
               <a:buNone/>
-              <a:defRPr sz="2000"/>
+              <a:defRPr sz="850"/>
             </a:lvl7pPr>
-            <a:lvl8pPr marL="3200400" indent="0">
+            <a:lvl8pPr marL="2720340" indent="0">
               <a:buNone/>
-              <a:defRPr sz="2000"/>
+              <a:defRPr sz="850"/>
             </a:lvl8pPr>
-            <a:lvl9pPr marL="3657600" indent="0">
+            <a:lvl9pPr marL="3108960" indent="0">
               <a:buNone/>
-              <a:defRPr sz="2000"/>
+              <a:defRPr sz="850"/>
             </a:lvl9pPr>
           </a:lstStyle>
           <a:p>
-            <a:endParaRPr lang="en-US"/>
-          </a:p>
-        </p:txBody>
-      </p:sp>
-      <p:sp>
-        <p:nvSpPr>
-          <p:cNvPr id="4" name="Text Placeholder 3"/>
-          <p:cNvSpPr>
-            <a:spLocks noGrp="1"/>
-          </p:cNvSpPr>
-          <p:nvPr>
-            <p:ph type="body" sz="half" idx="2"/>
-          </p:nvPr>
-        </p:nvSpPr>
-        <p:spPr>
-          <a:xfrm>
-            <a:off x="1792288" y="5367338"/>
-            <a:ext cx="5486400" cy="804862"/>
-          </a:xfrm>
-        </p:spPr>
+            <a:pPr lvl="0"/>
+            <a:r>
+              <a:rPr lang="en-US"/>
+              <a:t>Click to edit Master text styles</a:t>
+            </a:r>
+          </a:p>
+        </p:txBody>
+      </p:sp>
+      <p:sp>
+        <p:nvSpPr>
+          <p:cNvPr id="5" name="Date Placeholder 4"/>
+          <p:cNvSpPr>
+            <a:spLocks noGrp="1"/>
+          </p:cNvSpPr>
+          <p:nvPr>
+            <p:ph type="dt" sz="half" idx="10"/>
+          </p:nvPr>
+        </p:nvSpPr>
+        <p:spPr/>
         <p:txBody>
           <a:bodyPr/>
-          <a:lstStyle>
-            <a:lvl1pPr marL="0" indent="0">
-              <a:buNone/>
-              <a:defRPr sz="1400"/>
-            </a:lvl1pPr>
-            <a:lvl2pPr marL="457200" indent="0">
-              <a:buNone/>
-              <a:defRPr sz="1200"/>
-            </a:lvl2pPr>
-            <a:lvl3pPr marL="914400" indent="0">
-              <a:buNone/>
-              <a:defRPr sz="1000"/>
-            </a:lvl3pPr>
-            <a:lvl4pPr marL="1371600" indent="0">
-              <a:buNone/>
-              <a:defRPr sz="900"/>
-            </a:lvl4pPr>
-            <a:lvl5pPr marL="1828800" indent="0">
-              <a:buNone/>
-              <a:defRPr sz="900"/>
-            </a:lvl5pPr>
-            <a:lvl6pPr marL="2286000" indent="0">
-              <a:buNone/>
-              <a:defRPr sz="900"/>
-            </a:lvl6pPr>
-            <a:lvl7pPr marL="2743200" indent="0">
-              <a:buNone/>
-              <a:defRPr sz="900"/>
-            </a:lvl7pPr>
-            <a:lvl8pPr marL="3200400" indent="0">
-              <a:buNone/>
-              <a:defRPr sz="900"/>
-            </a:lvl8pPr>
-            <a:lvl9pPr marL="3657600" indent="0">
-              <a:buNone/>
-              <a:defRPr sz="900"/>
-            </a:lvl9pPr>
-          </a:lstStyle>
-          <a:p>
-            <a:pPr lvl="0"/>
-            <a:r>
-              <a:rPr lang="en-US"/>
-              <a:t>Click to edit Master text styles</a:t>
-            </a:r>
-          </a:p>
-        </p:txBody>
-      </p:sp>
-      <p:sp>
-        <p:nvSpPr>
-          <p:cNvPr id="5" name="Date Placeholder 4"/>
-          <p:cNvSpPr>
-            <a:spLocks noGrp="1"/>
-          </p:cNvSpPr>
-          <p:nvPr>
-            <p:ph type="dt" sz="half" idx="10"/>
-          </p:nvPr>
-        </p:nvSpPr>
-        <p:spPr/>
-        <p:txBody>
-          <a:bodyPr/>
-          <a:lstStyle/>
-          <a:p>
-            <a:fld id="{5BCAD085-E8A6-8845-BD4E-CB4CCA059FC4}" type="datetimeFigureOut">
+          <a:lstStyle/>
+          <a:p>
+            <a:fld id="{E6ABF4C5-BF9C-40A8-A020-04F3F3965A01}" type="datetimeFigureOut">
               <a:rPr lang="en-US" smtClean="0"/>
-              <a:t>10/15/2026</a:t>
+              <a:t>10/16/26</a:t>
             </a:fld>
             <a:endParaRPr lang="en-US"/>
           </a:p>
@@ -2544,7 +2865,7 @@
           <a:bodyPr/>
           <a:lstStyle/>
           <a:p>
-            <a:fld id="{C1FF6DA9-008F-8B48-92A6-B652298478BF}" type="slidenum">
+            <a:fld id="{CD7EFF58-81F3-4FED-A321-0429597B1631}" type="slidenum">
               <a:rPr lang="en-US" smtClean="0"/>
               <a:t>‹#›</a:t>
             </a:fld>
@@ -2555,7 +2876,7 @@
     </p:spTree>
     <p:extLst>
       <p:ext uri="{BB962C8B-B14F-4D97-AF65-F5344CB8AC3E}">
-        <p14:creationId xmlns:p14="http://schemas.microsoft.com/office/powerpoint/2010/main" val="3889236939"/>
+        <p14:creationId xmlns:p14="http://schemas.microsoft.com/office/powerpoint/2010/main" val="2716424180"/>
       </p:ext>
     </p:extLst>
   </p:cSld>
@@ -2599,8 +2920,8 @@
         </p:nvSpPr>
         <p:spPr>
           <a:xfrm>
-            <a:off x="457200" y="274638"/>
-            <a:ext cx="8229600" cy="1143000"/>
+            <a:off x="534353" y="535519"/>
+            <a:ext cx="6703695" cy="1944159"/>
           </a:xfrm>
           <a:prstGeom prst="rect">
             <a:avLst/>
@@ -2616,6 +2937,7 @@
               <a:rPr lang="en-US"/>
               <a:t>Click to edit Master title style</a:t>
             </a:r>
+            <a:endParaRPr lang="en-US" dirty="0"/>
           </a:p>
         </p:txBody>
       </p:sp>
@@ -2631,8 +2953,8 @@
         </p:nvSpPr>
         <p:spPr>
           <a:xfrm>
-            <a:off x="457200" y="1600200"/>
-            <a:ext cx="8229600" cy="4525963"/>
+            <a:off x="534353" y="2677584"/>
+            <a:ext cx="6703695" cy="6381962"/>
           </a:xfrm>
           <a:prstGeom prst="rect">
             <a:avLst/>
@@ -2677,6 +2999,7 @@
               <a:rPr lang="en-US"/>
               <a:t>Fifth level</a:t>
             </a:r>
+            <a:endParaRPr lang="en-US" dirty="0"/>
           </a:p>
         </p:txBody>
       </p:sp>
@@ -2692,8 +3015,8 @@
         </p:nvSpPr>
         <p:spPr>
           <a:xfrm>
-            <a:off x="457200" y="6356350"/>
-            <a:ext cx="2133600" cy="365125"/>
+            <a:off x="534353" y="9322649"/>
+            <a:ext cx="1748790" cy="535517"/>
           </a:xfrm>
           <a:prstGeom prst="rect">
             <a:avLst/>
@@ -2703,19 +3026,19 @@
           <a:bodyPr vert="horz" lIns="91440" tIns="45720" rIns="91440" bIns="45720" rtlCol="0" anchor="ctr"/>
           <a:lstStyle>
             <a:lvl1pPr algn="l">
-              <a:defRPr sz="1200">
+              <a:defRPr sz="1020">
                 <a:solidFill>
                   <a:schemeClr val="tx1">
-                    <a:tint val="75000"/>
+                    <a:tint val="82000"/>
                   </a:schemeClr>
                 </a:solidFill>
               </a:defRPr>
             </a:lvl1pPr>
           </a:lstStyle>
           <a:p>
-            <a:fld id="{5BCAD085-E8A6-8845-BD4E-CB4CCA059FC4}" type="datetimeFigureOut">
+            <a:fld id="{E6ABF4C5-BF9C-40A8-A020-04F3F3965A01}" type="datetimeFigureOut">
               <a:rPr lang="en-US" smtClean="0"/>
-              <a:t>10/15/2026</a:t>
+              <a:t>10/16/26</a:t>
             </a:fld>
             <a:endParaRPr lang="en-US"/>
           </a:p>
@@ -2733,8 +3056,8 @@
         </p:nvSpPr>
         <p:spPr>
           <a:xfrm>
-            <a:off x="3124200" y="6356350"/>
-            <a:ext cx="2895600" cy="365125"/>
+            <a:off x="2574608" y="9322649"/>
+            <a:ext cx="2623185" cy="535517"/>
           </a:xfrm>
           <a:prstGeom prst="rect">
             <a:avLst/>
@@ -2744,10 +3067,10 @@
           <a:bodyPr vert="horz" lIns="91440" tIns="45720" rIns="91440" bIns="45720" rtlCol="0" anchor="ctr"/>
           <a:lstStyle>
             <a:lvl1pPr algn="ctr">
-              <a:defRPr sz="1200">
+              <a:defRPr sz="1020">
                 <a:solidFill>
                   <a:schemeClr val="tx1">
-                    <a:tint val="75000"/>
+                    <a:tint val="82000"/>
                   </a:schemeClr>
                 </a:solidFill>
               </a:defRPr>
@@ -2770,8 +3093,8 @@
         </p:nvSpPr>
         <p:spPr>
           <a:xfrm>
-            <a:off x="6553200" y="6356350"/>
-            <a:ext cx="2133600" cy="365125"/>
+            <a:off x="5489258" y="9322649"/>
+            <a:ext cx="1748790" cy="535517"/>
           </a:xfrm>
           <a:prstGeom prst="rect">
             <a:avLst/>
@@ -2781,17 +3104,17 @@
           <a:bodyPr vert="horz" lIns="91440" tIns="45720" rIns="91440" bIns="45720" rtlCol="0" anchor="ctr"/>
           <a:lstStyle>
             <a:lvl1pPr algn="r">
-              <a:defRPr sz="1200">
+              <a:defRPr sz="1020">
                 <a:solidFill>
                   <a:schemeClr val="tx1">
-                    <a:tint val="75000"/>
+                    <a:tint val="82000"/>
                   </a:schemeClr>
                 </a:solidFill>
               </a:defRPr>
             </a:lvl1pPr>
           </a:lstStyle>
           <a:p>
-            <a:fld id="{C1FF6DA9-008F-8B48-92A6-B652298478BF}" type="slidenum">
+            <a:fld id="{CD7EFF58-81F3-4FED-A321-0429597B1631}" type="slidenum">
               <a:rPr lang="en-US" smtClean="0"/>
               <a:t>‹#›</a:t>
             </a:fld>
@@ -2802,32 +3125,35 @@
     </p:spTree>
     <p:extLst>
       <p:ext uri="{BB962C8B-B14F-4D97-AF65-F5344CB8AC3E}">
-        <p14:creationId xmlns:p14="http://schemas.microsoft.com/office/powerpoint/2010/main" val="2209977519"/>
+        <p14:creationId xmlns:p14="http://schemas.microsoft.com/office/powerpoint/2010/main" val="1564475830"/>
       </p:ext>
     </p:extLst>
   </p:cSld>
   <p:clrMap bg1="lt1" tx1="dk1" bg2="lt2" tx2="dk2" accent1="accent1" accent2="accent2" accent3="accent3" accent4="accent4" accent5="accent5" accent6="accent6" hlink="hlink" folHlink="folHlink"/>
   <p:sldLayoutIdLst>
-    <p:sldLayoutId id="2147483649" r:id="rId1"/>
-    <p:sldLayoutId id="2147483650" r:id="rId2"/>
-    <p:sldLayoutId id="2147483651" r:id="rId3"/>
-    <p:sldLayoutId id="2147483652" r:id="rId4"/>
-    <p:sldLayoutId id="2147483653" r:id="rId5"/>
-    <p:sldLayoutId id="2147483654" r:id="rId6"/>
-    <p:sldLayoutId id="2147483655" r:id="rId7"/>
-    <p:sldLayoutId id="2147483656" r:id="rId8"/>
-    <p:sldLayoutId id="2147483657" r:id="rId9"/>
-    <p:sldLayoutId id="2147483658" r:id="rId10"/>
-    <p:sldLayoutId id="2147483659" r:id="rId11"/>
+    <p:sldLayoutId id="2147483661" r:id="rId1"/>
+    <p:sldLayoutId id="2147483662" r:id="rId2"/>
+    <p:sldLayoutId id="2147483663" r:id="rId3"/>
+    <p:sldLayoutId id="2147483664" r:id="rId4"/>
+    <p:sldLayoutId id="2147483665" r:id="rId5"/>
+    <p:sldLayoutId id="2147483666" r:id="rId6"/>
+    <p:sldLayoutId id="2147483667" r:id="rId7"/>
+    <p:sldLayoutId id="2147483668" r:id="rId8"/>
+    <p:sldLayoutId id="2147483669" r:id="rId9"/>
+    <p:sldLayoutId id="2147483670" r:id="rId10"/>
+    <p:sldLayoutId id="2147483671" r:id="rId11"/>
   </p:sldLayoutIdLst>
   <p:txStyles>
     <p:titleStyle>
-      <a:lvl1pPr algn="ctr" defTabSz="457200" rtl="0" eaLnBrk="1" latinLnBrk="0" hangingPunct="1">
+      <a:lvl1pPr algn="l" defTabSz="777240" rtl="0" eaLnBrk="1" latinLnBrk="0" hangingPunct="1">
+        <a:lnSpc>
+          <a:spcPct val="90000"/>
+        </a:lnSpc>
         <a:spcBef>
           <a:spcPct val="0"/>
         </a:spcBef>
         <a:buNone/>
-        <a:defRPr sz="4400" kern="1200">
+        <a:defRPr sz="3740" kern="1200">
           <a:solidFill>
             <a:schemeClr val="tx1"/>
           </a:solidFill>
@@ -2838,13 +3164,16 @@
       </a:lvl1pPr>
     </p:titleStyle>
     <p:bodyStyle>
-      <a:lvl1pPr marL="342900" indent="-342900" algn="l" defTabSz="457200" rtl="0" eaLnBrk="1" latinLnBrk="0" hangingPunct="1">
+      <a:lvl1pPr marL="194310" indent="-194310" algn="l" defTabSz="777240" rtl="0" eaLnBrk="1" latinLnBrk="0" hangingPunct="1">
+        <a:lnSpc>
+          <a:spcPct val="90000"/>
+        </a:lnSpc>
         <a:spcBef>
-          <a:spcPct val="20000"/>
+          <a:spcPts val="850"/>
         </a:spcBef>
-        <a:buFont typeface="Arial"/>
+        <a:buFont typeface="Arial" panose="020B0604020202020204" pitchFamily="34" charset="0"/>
         <a:buChar char="•"/>
-        <a:defRPr sz="3200" kern="1200">
+        <a:defRPr sz="2380" kern="1200">
           <a:solidFill>
             <a:schemeClr val="tx1"/>
           </a:solidFill>
@@ -2853,13 +3182,16 @@
           <a:cs typeface="+mn-cs"/>
         </a:defRPr>
       </a:lvl1pPr>
-      <a:lvl2pPr marL="742950" indent="-285750" algn="l" defTabSz="457200" rtl="0" eaLnBrk="1" latinLnBrk="0" hangingPunct="1">
+      <a:lvl2pPr marL="582930" indent="-194310" algn="l" defTabSz="777240" rtl="0" eaLnBrk="1" latinLnBrk="0" hangingPunct="1">
+        <a:lnSpc>
+          <a:spcPct val="90000"/>
+        </a:lnSpc>
         <a:spcBef>
-          <a:spcPct val="20000"/>
+          <a:spcPts val="425"/>
         </a:spcBef>
-        <a:buFont typeface="Arial"/>
-        <a:buChar char="–"/>
-        <a:defRPr sz="2800" kern="1200">
+        <a:buFont typeface="Arial" panose="020B0604020202020204" pitchFamily="34" charset="0"/>
+        <a:buChar char="•"/>
+        <a:defRPr sz="2040" kern="1200">
           <a:solidFill>
             <a:schemeClr val="tx1"/>
           </a:solidFill>
@@ -2868,13 +3200,16 @@
           <a:cs typeface="+mn-cs"/>
         </a:defRPr>
       </a:lvl2pPr>
-      <a:lvl3pPr marL="1143000" indent="-228600" algn="l" defTabSz="457200" rtl="0" eaLnBrk="1" latinLnBrk="0" hangingPunct="1">
+      <a:lvl3pPr marL="971550" indent="-194310" algn="l" defTabSz="777240" rtl="0" eaLnBrk="1" latinLnBrk="0" hangingPunct="1">
+        <a:lnSpc>
+          <a:spcPct val="90000"/>
+        </a:lnSpc>
         <a:spcBef>
-          <a:spcPct val="20000"/>
+          <a:spcPts val="425"/>
         </a:spcBef>
-        <a:buFont typeface="Arial"/>
+        <a:buFont typeface="Arial" panose="020B0604020202020204" pitchFamily="34" charset="0"/>
         <a:buChar char="•"/>
-        <a:defRPr sz="2400" kern="1200">
+        <a:defRPr sz="1700" kern="1200">
           <a:solidFill>
             <a:schemeClr val="tx1"/>
           </a:solidFill>
@@ -2883,13 +3218,16 @@
           <a:cs typeface="+mn-cs"/>
         </a:defRPr>
       </a:lvl3pPr>
-      <a:lvl4pPr marL="1600200" indent="-228600" algn="l" defTabSz="457200" rtl="0" eaLnBrk="1" latinLnBrk="0" hangingPunct="1">
+      <a:lvl4pPr marL="1360170" indent="-194310" algn="l" defTabSz="777240" rtl="0" eaLnBrk="1" latinLnBrk="0" hangingPunct="1">
+        <a:lnSpc>
+          <a:spcPct val="90000"/>
+        </a:lnSpc>
         <a:spcBef>
-          <a:spcPct val="20000"/>
+          <a:spcPts val="425"/>
         </a:spcBef>
-        <a:buFont typeface="Arial"/>
-        <a:buChar char="–"/>
-        <a:defRPr sz="2000" kern="1200">
+        <a:buFont typeface="Arial" panose="020B0604020202020204" pitchFamily="34" charset="0"/>
+        <a:buChar char="•"/>
+        <a:defRPr sz="1530" kern="1200">
           <a:solidFill>
             <a:schemeClr val="tx1"/>
           </a:solidFill>
@@ -2898,13 +3236,16 @@
           <a:cs typeface="+mn-cs"/>
         </a:defRPr>
       </a:lvl4pPr>
-      <a:lvl5pPr marL="2057400" indent="-228600" algn="l" defTabSz="457200" rtl="0" eaLnBrk="1" latinLnBrk="0" hangingPunct="1">
+      <a:lvl5pPr marL="1748790" indent="-194310" algn="l" defTabSz="777240" rtl="0" eaLnBrk="1" latinLnBrk="0" hangingPunct="1">
+        <a:lnSpc>
+          <a:spcPct val="90000"/>
+        </a:lnSpc>
         <a:spcBef>
-          <a:spcPct val="20000"/>
+          <a:spcPts val="425"/>
         </a:spcBef>
-        <a:buFont typeface="Arial"/>
-        <a:buChar char="»"/>
-        <a:defRPr sz="2000" kern="1200">
+        <a:buFont typeface="Arial" panose="020B0604020202020204" pitchFamily="34" charset="0"/>
+        <a:buChar char="•"/>
+        <a:defRPr sz="1530" kern="1200">
           <a:solidFill>
             <a:schemeClr val="tx1"/>
           </a:solidFill>
@@ -2913,13 +3254,16 @@
           <a:cs typeface="+mn-cs"/>
         </a:defRPr>
       </a:lvl5pPr>
-      <a:lvl6pPr marL="2514600" indent="-228600" algn="l" defTabSz="457200" rtl="0" eaLnBrk="1" latinLnBrk="0" hangingPunct="1">
+      <a:lvl6pPr marL="2137410" indent="-194310" algn="l" defTabSz="777240" rtl="0" eaLnBrk="1" latinLnBrk="0" hangingPunct="1">
+        <a:lnSpc>
+          <a:spcPct val="90000"/>
+        </a:lnSpc>
         <a:spcBef>
-          <a:spcPct val="20000"/>
+          <a:spcPts val="425"/>
         </a:spcBef>
-        <a:buFont typeface="Arial"/>
+        <a:buFont typeface="Arial" panose="020B0604020202020204" pitchFamily="34" charset="0"/>
         <a:buChar char="•"/>
-        <a:defRPr sz="2000" kern="1200">
+        <a:defRPr sz="1530" kern="1200">
           <a:solidFill>
             <a:schemeClr val="tx1"/>
           </a:solidFill>
@@ -2928,13 +3272,16 @@
           <a:cs typeface="+mn-cs"/>
         </a:defRPr>
       </a:lvl6pPr>
-      <a:lvl7pPr marL="2971800" indent="-228600" algn="l" defTabSz="457200" rtl="0" eaLnBrk="1" latinLnBrk="0" hangingPunct="1">
+      <a:lvl7pPr marL="2526030" indent="-194310" algn="l" defTabSz="777240" rtl="0" eaLnBrk="1" latinLnBrk="0" hangingPunct="1">
+        <a:lnSpc>
+          <a:spcPct val="90000"/>
+        </a:lnSpc>
         <a:spcBef>
-          <a:spcPct val="20000"/>
+          <a:spcPts val="425"/>
         </a:spcBef>
-        <a:buFont typeface="Arial"/>
+        <a:buFont typeface="Arial" panose="020B0604020202020204" pitchFamily="34" charset="0"/>
         <a:buChar char="•"/>
-        <a:defRPr sz="2000" kern="1200">
+        <a:defRPr sz="1530" kern="1200">
           <a:solidFill>
             <a:schemeClr val="tx1"/>
           </a:solidFill>
@@ -2943,13 +3290,16 @@
           <a:cs typeface="+mn-cs"/>
         </a:defRPr>
       </a:lvl7pPr>
-      <a:lvl8pPr marL="3429000" indent="-228600" algn="l" defTabSz="457200" rtl="0" eaLnBrk="1" latinLnBrk="0" hangingPunct="1">
+      <a:lvl8pPr marL="2914650" indent="-194310" algn="l" defTabSz="777240" rtl="0" eaLnBrk="1" latinLnBrk="0" hangingPunct="1">
+        <a:lnSpc>
+          <a:spcPct val="90000"/>
+        </a:lnSpc>
         <a:spcBef>
-          <a:spcPct val="20000"/>
+          <a:spcPts val="425"/>
         </a:spcBef>
-        <a:buFont typeface="Arial"/>
+        <a:buFont typeface="Arial" panose="020B0604020202020204" pitchFamily="34" charset="0"/>
         <a:buChar char="•"/>
-        <a:defRPr sz="2000" kern="1200">
+        <a:defRPr sz="1530" kern="1200">
           <a:solidFill>
             <a:schemeClr val="tx1"/>
           </a:solidFill>
@@ -2958,13 +3308,16 @@
           <a:cs typeface="+mn-cs"/>
         </a:defRPr>
       </a:lvl8pPr>
-      <a:lvl9pPr marL="3886200" indent="-228600" algn="l" defTabSz="457200" rtl="0" eaLnBrk="1" latinLnBrk="0" hangingPunct="1">
+      <a:lvl9pPr marL="3303270" indent="-194310" algn="l" defTabSz="777240" rtl="0" eaLnBrk="1" latinLnBrk="0" hangingPunct="1">
+        <a:lnSpc>
+          <a:spcPct val="90000"/>
+        </a:lnSpc>
         <a:spcBef>
-          <a:spcPct val="20000"/>
+          <a:spcPts val="425"/>
         </a:spcBef>
-        <a:buFont typeface="Arial"/>
+        <a:buFont typeface="Arial" panose="020B0604020202020204" pitchFamily="34" charset="0"/>
         <a:buChar char="•"/>
-        <a:defRPr sz="2000" kern="1200">
+        <a:defRPr sz="1530" kern="1200">
           <a:solidFill>
             <a:schemeClr val="tx1"/>
           </a:solidFill>
@@ -2978,8 +3331,8 @@
       <a:defPPr>
         <a:defRPr lang="en-US"/>
       </a:defPPr>
-      <a:lvl1pPr marL="0" algn="l" defTabSz="457200" rtl="0" eaLnBrk="1" latinLnBrk="0" hangingPunct="1">
-        <a:defRPr sz="1800" kern="1200">
+      <a:lvl1pPr marL="0" algn="l" defTabSz="777240" rtl="0" eaLnBrk="1" latinLnBrk="0" hangingPunct="1">
+        <a:defRPr sz="1530" kern="1200">
           <a:solidFill>
             <a:schemeClr val="tx1"/>
           </a:solidFill>
@@ -2988,8 +3341,8 @@
           <a:cs typeface="+mn-cs"/>
         </a:defRPr>
       </a:lvl1pPr>
-      <a:lvl2pPr marL="457200" algn="l" defTabSz="457200" rtl="0" eaLnBrk="1" latinLnBrk="0" hangingPunct="1">
-        <a:defRPr sz="1800" kern="1200">
+      <a:lvl2pPr marL="388620" algn="l" defTabSz="777240" rtl="0" eaLnBrk="1" latinLnBrk="0" hangingPunct="1">
+        <a:defRPr sz="1530" kern="1200">
           <a:solidFill>
             <a:schemeClr val="tx1"/>
           </a:solidFill>
@@ -2998,8 +3351,8 @@
           <a:cs typeface="+mn-cs"/>
         </a:defRPr>
       </a:lvl2pPr>
-      <a:lvl3pPr marL="914400" algn="l" defTabSz="457200" rtl="0" eaLnBrk="1" latinLnBrk="0" hangingPunct="1">
-        <a:defRPr sz="1800" kern="1200">
+      <a:lvl3pPr marL="777240" algn="l" defTabSz="777240" rtl="0" eaLnBrk="1" latinLnBrk="0" hangingPunct="1">
+        <a:defRPr sz="1530" kern="1200">
           <a:solidFill>
             <a:schemeClr val="tx1"/>
           </a:solidFill>
@@ -3008,8 +3361,8 @@
           <a:cs typeface="+mn-cs"/>
         </a:defRPr>
       </a:lvl3pPr>
-      <a:lvl4pPr marL="1371600" algn="l" defTabSz="457200" rtl="0" eaLnBrk="1" latinLnBrk="0" hangingPunct="1">
-        <a:defRPr sz="1800" kern="1200">
+      <a:lvl4pPr marL="1165860" algn="l" defTabSz="777240" rtl="0" eaLnBrk="1" latinLnBrk="0" hangingPunct="1">
+        <a:defRPr sz="1530" kern="1200">
           <a:solidFill>
             <a:schemeClr val="tx1"/>
           </a:solidFill>
@@ -3018,8 +3371,8 @@
           <a:cs typeface="+mn-cs"/>
         </a:defRPr>
       </a:lvl4pPr>
-      <a:lvl5pPr marL="1828800" algn="l" defTabSz="457200" rtl="0" eaLnBrk="1" latinLnBrk="0" hangingPunct="1">
-        <a:defRPr sz="1800" kern="1200">
+      <a:lvl5pPr marL="1554480" algn="l" defTabSz="777240" rtl="0" eaLnBrk="1" latinLnBrk="0" hangingPunct="1">
+        <a:defRPr sz="1530" kern="1200">
           <a:solidFill>
             <a:schemeClr val="tx1"/>
           </a:solidFill>
@@ -3028,8 +3381,8 @@
           <a:cs typeface="+mn-cs"/>
         </a:defRPr>
       </a:lvl5pPr>
-      <a:lvl6pPr marL="2286000" algn="l" defTabSz="457200" rtl="0" eaLnBrk="1" latinLnBrk="0" hangingPunct="1">
-        <a:defRPr sz="1800" kern="1200">
+      <a:lvl6pPr marL="1943100" algn="l" defTabSz="777240" rtl="0" eaLnBrk="1" latinLnBrk="0" hangingPunct="1">
+        <a:defRPr sz="1530" kern="1200">
           <a:solidFill>
             <a:schemeClr val="tx1"/>
           </a:solidFill>
@@ -3038,8 +3391,8 @@
           <a:cs typeface="+mn-cs"/>
         </a:defRPr>
       </a:lvl6pPr>
-      <a:lvl7pPr marL="2743200" algn="l" defTabSz="457200" rtl="0" eaLnBrk="1" latinLnBrk="0" hangingPunct="1">
-        <a:defRPr sz="1800" kern="1200">
+      <a:lvl7pPr marL="2331720" algn="l" defTabSz="777240" rtl="0" eaLnBrk="1" latinLnBrk="0" hangingPunct="1">
+        <a:defRPr sz="1530" kern="1200">
           <a:solidFill>
             <a:schemeClr val="tx1"/>
           </a:solidFill>
@@ -3048,8 +3401,8 @@
           <a:cs typeface="+mn-cs"/>
         </a:defRPr>
       </a:lvl7pPr>
-      <a:lvl8pPr marL="3200400" algn="l" defTabSz="457200" rtl="0" eaLnBrk="1" latinLnBrk="0" hangingPunct="1">
-        <a:defRPr sz="1800" kern="1200">
+      <a:lvl8pPr marL="2720340" algn="l" defTabSz="777240" rtl="0" eaLnBrk="1" latinLnBrk="0" hangingPunct="1">
+        <a:defRPr sz="1530" kern="1200">
           <a:solidFill>
             <a:schemeClr val="tx1"/>
           </a:solidFill>
@@ -3058,8 +3411,8 @@
           <a:cs typeface="+mn-cs"/>
         </a:defRPr>
       </a:lvl8pPr>
-      <a:lvl9pPr marL="3657600" algn="l" defTabSz="457200" rtl="0" eaLnBrk="1" latinLnBrk="0" hangingPunct="1">
-        <a:defRPr sz="1800" kern="1200">
+      <a:lvl9pPr marL="3108960" algn="l" defTabSz="777240" rtl="0" eaLnBrk="1" latinLnBrk="0" hangingPunct="1">
+        <a:defRPr sz="1530" kern="1200">
           <a:solidFill>
             <a:schemeClr val="tx1"/>
           </a:solidFill>
@@ -3090,12 +3443,630 @@
           <a:chExt cx="0" cy="0"/>
         </a:xfrm>
       </p:grpSpPr>
-      <p:sp>
-        <p:nvSpPr>
-          <p:cNvPr id="14" name="fig1_H">
+      <p:pic>
+        <p:nvPicPr>
+          <p:cNvPr id="5" name="Picture 4">
             <a:extLst>
               <a:ext uri="{FF2B5EF4-FFF2-40B4-BE49-F238E27FC236}">
-                <a16:creationId xmlns:a16="http://schemas.microsoft.com/office/drawing/2014/main" id="{8C388E60-74BA-C247-ED30-69CF5931F5DE}"/>
+                <a16:creationId xmlns:a16="http://schemas.microsoft.com/office/drawing/2014/main" id="{A92E060D-5F58-8F63-3D7C-82AB369A5ED2}"/>
+              </a:ext>
+            </a:extLst>
+          </p:cNvPr>
+          <p:cNvPicPr>
+            <a:picLocks noChangeAspect="1"/>
+          </p:cNvPicPr>
+          <p:nvPr/>
+        </p:nvPicPr>
+        <p:blipFill>
+          <a:blip r:embed="rId2"/>
+          <a:srcRect l="6783" t="9525" r="5326" b="12093"/>
+          <a:stretch>
+            <a:fillRect/>
+          </a:stretch>
+        </p:blipFill>
+        <p:spPr>
+          <a:xfrm>
+            <a:off x="-588707" y="271362"/>
+            <a:ext cx="5007746" cy="3357451"/>
+          </a:xfrm>
+          <a:prstGeom prst="rect">
+            <a:avLst/>
+          </a:prstGeom>
+        </p:spPr>
+      </p:pic>
+      <p:pic>
+        <p:nvPicPr>
+          <p:cNvPr id="7" name="Picture 6">
+            <a:extLst>
+              <a:ext uri="{FF2B5EF4-FFF2-40B4-BE49-F238E27FC236}">
+                <a16:creationId xmlns:a16="http://schemas.microsoft.com/office/drawing/2014/main" id="{8956AC8A-E685-434A-39E1-E82BA8627DF4}"/>
+              </a:ext>
+              <a:ext uri="{C183D7F6-B498-43B3-948B-1728B52AA6E4}">
+                <adec:decorative xmlns:adec="http://schemas.microsoft.com/office/drawing/2017/decorative" val="1"/>
+              </a:ext>
+            </a:extLst>
+          </p:cNvPr>
+          <p:cNvPicPr>
+            <a:picLocks noChangeAspect="1"/>
+          </p:cNvPicPr>
+          <p:nvPr/>
+        </p:nvPicPr>
+        <p:blipFill>
+          <a:blip r:embed="rId3"/>
+          <a:srcRect r="51682" b="26756"/>
+          <a:stretch>
+            <a:fillRect/>
+          </a:stretch>
+        </p:blipFill>
+        <p:spPr>
+          <a:xfrm>
+            <a:off x="-850475" y="3735000"/>
+            <a:ext cx="3143323" cy="5540653"/>
+          </a:xfrm>
+          <a:prstGeom prst="rect">
+            <a:avLst/>
+          </a:prstGeom>
+        </p:spPr>
+      </p:pic>
+      <p:pic>
+        <p:nvPicPr>
+          <p:cNvPr id="9" name="Picture 8">
+            <a:extLst>
+              <a:ext uri="{FF2B5EF4-FFF2-40B4-BE49-F238E27FC236}">
+                <a16:creationId xmlns:a16="http://schemas.microsoft.com/office/drawing/2014/main" id="{81C040D6-CF5F-B360-0A86-DABB245AD8E1}"/>
+              </a:ext>
+              <a:ext uri="{C183D7F6-B498-43B3-948B-1728B52AA6E4}">
+                <adec:decorative xmlns:adec="http://schemas.microsoft.com/office/drawing/2017/decorative" val="1"/>
+              </a:ext>
+            </a:extLst>
+          </p:cNvPr>
+          <p:cNvPicPr>
+            <a:picLocks noChangeAspect="1"/>
+          </p:cNvPicPr>
+          <p:nvPr/>
+        </p:nvPicPr>
+        <p:blipFill>
+          <a:blip r:embed="rId3"/>
+          <a:srcRect l="74267" b="66297"/>
+          <a:stretch>
+            <a:fillRect/>
+          </a:stretch>
+        </p:blipFill>
+        <p:spPr>
+          <a:xfrm>
+            <a:off x="11197525" y="5655627"/>
+            <a:ext cx="1936447" cy="1992739"/>
+          </a:xfrm>
+          <a:prstGeom prst="rect">
+            <a:avLst/>
+          </a:prstGeom>
+        </p:spPr>
+      </p:pic>
+      <p:pic>
+        <p:nvPicPr>
+          <p:cNvPr id="11" name="Picture 10">
+            <a:extLst>
+              <a:ext uri="{FF2B5EF4-FFF2-40B4-BE49-F238E27FC236}">
+                <a16:creationId xmlns:a16="http://schemas.microsoft.com/office/drawing/2014/main" id="{784C85AE-FE3F-2B4B-3521-037776B082C2}"/>
+              </a:ext>
+            </a:extLst>
+          </p:cNvPr>
+          <p:cNvPicPr>
+            <a:picLocks noChangeAspect="1"/>
+          </p:cNvPicPr>
+          <p:nvPr/>
+        </p:nvPicPr>
+        <p:blipFill>
+          <a:blip r:embed="rId4"/>
+          <a:srcRect l="24085" r="56314" b="47997"/>
+          <a:stretch>
+            <a:fillRect/>
+          </a:stretch>
+        </p:blipFill>
+        <p:spPr>
+          <a:xfrm>
+            <a:off x="14393196" y="-2785240"/>
+            <a:ext cx="2248495" cy="4871813"/>
+          </a:xfrm>
+          <a:prstGeom prst="rect">
+            <a:avLst/>
+          </a:prstGeom>
+        </p:spPr>
+      </p:pic>
+      <p:grpSp>
+        <p:nvGrpSpPr>
+          <p:cNvPr id="16" name="Group 15">
+            <a:extLst>
+              <a:ext uri="{FF2B5EF4-FFF2-40B4-BE49-F238E27FC236}">
+                <a16:creationId xmlns:a16="http://schemas.microsoft.com/office/drawing/2014/main" id="{BFB4184D-B7E1-0978-B894-A61F485549DE}"/>
+              </a:ext>
+            </a:extLst>
+          </p:cNvPr>
+          <p:cNvGrpSpPr/>
+          <p:nvPr/>
+        </p:nvGrpSpPr>
+        <p:grpSpPr>
+          <a:xfrm>
+            <a:off x="11734081" y="-2474821"/>
+            <a:ext cx="2506786" cy="3538756"/>
+            <a:chOff x="2493995" y="2818228"/>
+            <a:chExt cx="1709172" cy="2412788"/>
+          </a:xfrm>
+        </p:grpSpPr>
+        <p:pic>
+          <p:nvPicPr>
+            <p:cNvPr id="13" name="Picture 12">
+              <a:extLst>
+                <a:ext uri="{FF2B5EF4-FFF2-40B4-BE49-F238E27FC236}">
+                  <a16:creationId xmlns:a16="http://schemas.microsoft.com/office/drawing/2014/main" id="{B170F021-109F-43C4-8822-ED15988406A7}"/>
+                </a:ext>
+              </a:extLst>
+            </p:cNvPr>
+            <p:cNvPicPr>
+              <a:picLocks noChangeAspect="1"/>
+            </p:cNvPicPr>
+            <p:nvPr/>
+          </p:nvPicPr>
+          <p:blipFill>
+            <a:blip r:embed="rId5"/>
+            <a:srcRect l="21272" t="27788"/>
+            <a:stretch>
+              <a:fillRect/>
+            </a:stretch>
+          </p:blipFill>
+          <p:spPr>
+            <a:xfrm>
+              <a:off x="2700017" y="2818228"/>
+              <a:ext cx="1503150" cy="2412788"/>
+            </a:xfrm>
+            <a:prstGeom prst="rect">
+              <a:avLst/>
+            </a:prstGeom>
+          </p:spPr>
+        </p:pic>
+        <p:pic>
+          <p:nvPicPr>
+            <p:cNvPr id="15" name="Picture 14">
+              <a:extLst>
+                <a:ext uri="{FF2B5EF4-FFF2-40B4-BE49-F238E27FC236}">
+                  <a16:creationId xmlns:a16="http://schemas.microsoft.com/office/drawing/2014/main" id="{726FF4FA-778C-779E-4488-142BB493A7F7}"/>
+                </a:ext>
+              </a:extLst>
+            </p:cNvPr>
+            <p:cNvPicPr>
+              <a:picLocks noChangeAspect="1"/>
+            </p:cNvPicPr>
+            <p:nvPr/>
+          </p:nvPicPr>
+          <p:blipFill>
+            <a:blip r:embed="rId5"/>
+            <a:srcRect l="14815" t="4981" r="35574" b="80283"/>
+            <a:stretch>
+              <a:fillRect/>
+            </a:stretch>
+          </p:blipFill>
+          <p:spPr>
+            <a:xfrm>
+              <a:off x="2493995" y="2884935"/>
+              <a:ext cx="1046678" cy="544065"/>
+            </a:xfrm>
+            <a:prstGeom prst="rect">
+              <a:avLst/>
+            </a:prstGeom>
+          </p:spPr>
+        </p:pic>
+      </p:grpSp>
+      <p:pic>
+        <p:nvPicPr>
+          <p:cNvPr id="18" name="Picture 17">
+            <a:extLst>
+              <a:ext uri="{FF2B5EF4-FFF2-40B4-BE49-F238E27FC236}">
+                <a16:creationId xmlns:a16="http://schemas.microsoft.com/office/drawing/2014/main" id="{6921583D-F1CE-258A-3A4A-722EB43A44F7}"/>
+              </a:ext>
+            </a:extLst>
+          </p:cNvPr>
+          <p:cNvPicPr>
+            <a:picLocks noChangeAspect="1"/>
+          </p:cNvPicPr>
+          <p:nvPr/>
+        </p:nvPicPr>
+        <p:blipFill>
+          <a:blip r:embed="rId6"/>
+          <a:srcRect l="26072" r="48043" b="72261"/>
+          <a:stretch>
+            <a:fillRect/>
+          </a:stretch>
+        </p:blipFill>
+        <p:spPr>
+          <a:xfrm>
+            <a:off x="4428666" y="366389"/>
+            <a:ext cx="1158989" cy="1158979"/>
+          </a:xfrm>
+          <a:prstGeom prst="rect">
+            <a:avLst/>
+          </a:prstGeom>
+        </p:spPr>
+      </p:pic>
+      <p:pic>
+        <p:nvPicPr>
+          <p:cNvPr id="2" name="Picture 1">
+            <a:extLst>
+              <a:ext uri="{FF2B5EF4-FFF2-40B4-BE49-F238E27FC236}">
+                <a16:creationId xmlns:a16="http://schemas.microsoft.com/office/drawing/2014/main" id="{A0E30D7C-E611-4E17-46FE-B27C91066C55}"/>
+              </a:ext>
+            </a:extLst>
+          </p:cNvPr>
+          <p:cNvPicPr>
+            <a:picLocks noChangeAspect="1"/>
+          </p:cNvPicPr>
+          <p:nvPr/>
+        </p:nvPicPr>
+        <p:blipFill>
+          <a:blip r:embed="rId7"/>
+          <a:srcRect l="48414" r="25476" b="69086"/>
+          <a:stretch>
+            <a:fillRect/>
+          </a:stretch>
+        </p:blipFill>
+        <p:spPr>
+          <a:xfrm>
+            <a:off x="4602604" y="1526474"/>
+            <a:ext cx="1084770" cy="983492"/>
+          </a:xfrm>
+          <a:prstGeom prst="rect">
+            <a:avLst/>
+          </a:prstGeom>
+        </p:spPr>
+      </p:pic>
+      <p:pic>
+        <p:nvPicPr>
+          <p:cNvPr id="3" name="Picture 2">
+            <a:extLst>
+              <a:ext uri="{FF2B5EF4-FFF2-40B4-BE49-F238E27FC236}">
+                <a16:creationId xmlns:a16="http://schemas.microsoft.com/office/drawing/2014/main" id="{62893457-C628-580D-DC6E-0C3FB925D75F}"/>
+              </a:ext>
+            </a:extLst>
+          </p:cNvPr>
+          <p:cNvPicPr>
+            <a:picLocks noChangeAspect="1"/>
+          </p:cNvPicPr>
+          <p:nvPr/>
+        </p:nvPicPr>
+        <p:blipFill>
+          <a:blip r:embed="rId8"/>
+          <a:stretch>
+            <a:fillRect/>
+          </a:stretch>
+        </p:blipFill>
+        <p:spPr>
+          <a:xfrm>
+            <a:off x="4604338" y="2634460"/>
+            <a:ext cx="1090470" cy="1096543"/>
+          </a:xfrm>
+          <a:prstGeom prst="rect">
+            <a:avLst/>
+          </a:prstGeom>
+        </p:spPr>
+      </p:pic>
+      <p:pic>
+        <p:nvPicPr>
+          <p:cNvPr id="4" name="Picture 3">
+            <a:extLst>
+              <a:ext uri="{FF2B5EF4-FFF2-40B4-BE49-F238E27FC236}">
+                <a16:creationId xmlns:a16="http://schemas.microsoft.com/office/drawing/2014/main" id="{D41E9461-3D1A-7182-7361-340320A12CB9}"/>
+              </a:ext>
+            </a:extLst>
+          </p:cNvPr>
+          <p:cNvPicPr>
+            <a:picLocks noChangeAspect="1"/>
+          </p:cNvPicPr>
+          <p:nvPr/>
+        </p:nvPicPr>
+        <p:blipFill>
+          <a:blip r:embed="rId9"/>
+          <a:stretch>
+            <a:fillRect/>
+          </a:stretch>
+        </p:blipFill>
+        <p:spPr>
+          <a:xfrm>
+            <a:off x="2293181" y="3717234"/>
+            <a:ext cx="4271249" cy="5774268"/>
+          </a:xfrm>
+          <a:prstGeom prst="rect">
+            <a:avLst/>
+          </a:prstGeom>
+        </p:spPr>
+      </p:pic>
+    </p:spTree>
+    <p:extLst>
+      <p:ext uri="{BB962C8B-B14F-4D97-AF65-F5344CB8AC3E}">
+        <p14:creationId xmlns:p14="http://schemas.microsoft.com/office/powerpoint/2010/main" val="417269656"/>
+      </p:ext>
+    </p:extLst>
+  </p:cSld>
+  <p:clrMapOvr>
+    <a:masterClrMapping/>
+  </p:clrMapOvr>
+</p:sld>
+</file>
+
+<file path=ppt/slides/slide2.xml><?xml version="1.0" encoding="utf-8"?>
+<p:sld xmlns:a="http://schemas.openxmlformats.org/drawingml/2006/main" xmlns:r="http://schemas.openxmlformats.org/officeDocument/2006/relationships" xmlns:p="http://schemas.openxmlformats.org/presentationml/2006/main">
+  <p:cSld>
+    <p:spTree>
+      <p:nvGrpSpPr>
+        <p:cNvPr id="1" name=""/>
+        <p:cNvGrpSpPr/>
+        <p:nvPr/>
+      </p:nvGrpSpPr>
+      <p:grpSpPr>
+        <a:xfrm>
+          <a:off x="0" y="0"/>
+          <a:ext cx="0" cy="0"/>
+          <a:chOff x="0" y="0"/>
+          <a:chExt cx="0" cy="0"/>
+        </a:xfrm>
+      </p:grpSpPr>
+      <p:pic>
+        <p:nvPicPr>
+          <p:cNvPr id="2" name="Picture 1">
+            <a:extLst>
+              <a:ext uri="{FF2B5EF4-FFF2-40B4-BE49-F238E27FC236}">
+                <a16:creationId xmlns:a16="http://schemas.microsoft.com/office/drawing/2014/main" id="{0EF1144B-68CC-2F3C-9183-A5444CA21E7D}"/>
+              </a:ext>
+            </a:extLst>
+          </p:cNvPr>
+          <p:cNvPicPr>
+            <a:picLocks noChangeAspect="1"/>
+          </p:cNvPicPr>
+          <p:nvPr/>
+        </p:nvPicPr>
+        <p:blipFill>
+          <a:blip r:embed="rId2"/>
+          <a:srcRect b="74851"/>
+          <a:stretch>
+            <a:fillRect/>
+          </a:stretch>
+        </p:blipFill>
+        <p:spPr>
+          <a:xfrm>
+            <a:off x="0" y="-526943"/>
+            <a:ext cx="7772400" cy="1658319"/>
+          </a:xfrm>
+          <a:prstGeom prst="rect">
+            <a:avLst/>
+          </a:prstGeom>
+        </p:spPr>
+      </p:pic>
+      <p:pic>
+        <p:nvPicPr>
+          <p:cNvPr id="4" name="Picture 3">
+            <a:extLst>
+              <a:ext uri="{FF2B5EF4-FFF2-40B4-BE49-F238E27FC236}">
+                <a16:creationId xmlns:a16="http://schemas.microsoft.com/office/drawing/2014/main" id="{8ADE3429-9A2E-C1A4-3B3A-14318882AF6F}"/>
+              </a:ext>
+            </a:extLst>
+          </p:cNvPr>
+          <p:cNvPicPr>
+            <a:picLocks noChangeAspect="1"/>
+          </p:cNvPicPr>
+          <p:nvPr/>
+        </p:nvPicPr>
+        <p:blipFill>
+          <a:blip r:embed="rId2"/>
+          <a:srcRect t="36485"/>
+          <a:stretch>
+            <a:fillRect/>
+          </a:stretch>
+        </p:blipFill>
+        <p:spPr>
+          <a:xfrm>
+            <a:off x="0" y="1131376"/>
+            <a:ext cx="7772400" cy="4188155"/>
+          </a:xfrm>
+          <a:prstGeom prst="rect">
+            <a:avLst/>
+          </a:prstGeom>
+        </p:spPr>
+      </p:pic>
+      <p:pic>
+        <p:nvPicPr>
+          <p:cNvPr id="6" name="Picture 5">
+            <a:extLst>
+              <a:ext uri="{FF2B5EF4-FFF2-40B4-BE49-F238E27FC236}">
+                <a16:creationId xmlns:a16="http://schemas.microsoft.com/office/drawing/2014/main" id="{9F89CF50-806F-BE8A-8C51-A42D016AB92D}"/>
+              </a:ext>
+              <a:ext uri="{C183D7F6-B498-43B3-948B-1728B52AA6E4}">
+                <adec:decorative xmlns:adec="http://schemas.microsoft.com/office/drawing/2017/decorative" val="1"/>
+              </a:ext>
+            </a:extLst>
+          </p:cNvPr>
+          <p:cNvPicPr>
+            <a:picLocks noChangeAspect="1"/>
+          </p:cNvPicPr>
+          <p:nvPr/>
+        </p:nvPicPr>
+        <p:blipFill>
+          <a:blip r:embed="rId3"/>
+          <a:srcRect r="51682" b="26756"/>
+          <a:stretch>
+            <a:fillRect/>
+          </a:stretch>
+        </p:blipFill>
+        <p:spPr>
+          <a:xfrm>
+            <a:off x="457200" y="6977850"/>
+            <a:ext cx="2299326" cy="2636611"/>
+          </a:xfrm>
+          <a:prstGeom prst="rect">
+            <a:avLst/>
+          </a:prstGeom>
+        </p:spPr>
+      </p:pic>
+      <p:pic>
+        <p:nvPicPr>
+          <p:cNvPr id="9" name="Picture 8">
+            <a:extLst>
+              <a:ext uri="{FF2B5EF4-FFF2-40B4-BE49-F238E27FC236}">
+                <a16:creationId xmlns:a16="http://schemas.microsoft.com/office/drawing/2014/main" id="{EA9200E4-C859-4834-25B0-94D83E7DC3E8}"/>
+              </a:ext>
+            </a:extLst>
+          </p:cNvPr>
+          <p:cNvPicPr>
+            <a:picLocks noChangeAspect="1"/>
+          </p:cNvPicPr>
+          <p:nvPr/>
+        </p:nvPicPr>
+        <p:blipFill>
+          <a:blip r:embed="rId4"/>
+          <a:srcRect l="48414" r="25476" b="69086"/>
+          <a:stretch>
+            <a:fillRect/>
+          </a:stretch>
+        </p:blipFill>
+        <p:spPr>
+          <a:xfrm>
+            <a:off x="2717690" y="7310744"/>
+            <a:ext cx="916663" cy="831080"/>
+          </a:xfrm>
+          <a:prstGeom prst="rect">
+            <a:avLst/>
+          </a:prstGeom>
+        </p:spPr>
+      </p:pic>
+      <p:pic>
+        <p:nvPicPr>
+          <p:cNvPr id="10" name="Picture 9">
+            <a:extLst>
+              <a:ext uri="{FF2B5EF4-FFF2-40B4-BE49-F238E27FC236}">
+                <a16:creationId xmlns:a16="http://schemas.microsoft.com/office/drawing/2014/main" id="{6968ED23-7786-3B2D-3BAB-7EB4890CEA28}"/>
+              </a:ext>
+            </a:extLst>
+          </p:cNvPr>
+          <p:cNvPicPr>
+            <a:picLocks noChangeAspect="1"/>
+          </p:cNvPicPr>
+          <p:nvPr/>
+        </p:nvPicPr>
+        <p:blipFill>
+          <a:blip r:embed="rId5"/>
+          <a:stretch>
+            <a:fillRect/>
+          </a:stretch>
+        </p:blipFill>
+        <p:spPr>
+          <a:xfrm>
+            <a:off x="2717690" y="8296154"/>
+            <a:ext cx="916663" cy="921767"/>
+          </a:xfrm>
+          <a:prstGeom prst="rect">
+            <a:avLst/>
+          </a:prstGeom>
+        </p:spPr>
+      </p:pic>
+      <p:pic>
+        <p:nvPicPr>
+          <p:cNvPr id="11" name="Picture 10">
+            <a:extLst>
+              <a:ext uri="{FF2B5EF4-FFF2-40B4-BE49-F238E27FC236}">
+                <a16:creationId xmlns:a16="http://schemas.microsoft.com/office/drawing/2014/main" id="{26AF85CF-7472-E407-888B-6FF29177B817}"/>
+              </a:ext>
+            </a:extLst>
+          </p:cNvPr>
+          <p:cNvPicPr>
+            <a:picLocks noChangeAspect="1"/>
+          </p:cNvPicPr>
+          <p:nvPr/>
+        </p:nvPicPr>
+        <p:blipFill>
+          <a:blip r:embed="rId6"/>
+          <a:stretch>
+            <a:fillRect/>
+          </a:stretch>
+        </p:blipFill>
+        <p:spPr>
+          <a:xfrm>
+            <a:off x="3634353" y="5224759"/>
+            <a:ext cx="3680847" cy="4171971"/>
+          </a:xfrm>
+          <a:prstGeom prst="rect">
+            <a:avLst/>
+          </a:prstGeom>
+        </p:spPr>
+      </p:pic>
+      <p:pic>
+        <p:nvPicPr>
+          <p:cNvPr id="12" name="Picture 11">
+            <a:extLst>
+              <a:ext uri="{FF2B5EF4-FFF2-40B4-BE49-F238E27FC236}">
+                <a16:creationId xmlns:a16="http://schemas.microsoft.com/office/drawing/2014/main" id="{8AA978B3-A28F-C916-9699-FFF12FFF8A6B}"/>
+              </a:ext>
+            </a:extLst>
+          </p:cNvPr>
+          <p:cNvPicPr>
+            <a:picLocks noChangeAspect="1"/>
+          </p:cNvPicPr>
+          <p:nvPr/>
+        </p:nvPicPr>
+        <p:blipFill>
+          <a:blip r:embed="rId7"/>
+          <a:stretch>
+            <a:fillRect/>
+          </a:stretch>
+        </p:blipFill>
+        <p:spPr>
+          <a:xfrm>
+            <a:off x="473671" y="5293596"/>
+            <a:ext cx="3160682" cy="1597556"/>
+          </a:xfrm>
+          <a:prstGeom prst="rect">
+            <a:avLst/>
+          </a:prstGeom>
+        </p:spPr>
+      </p:pic>
+    </p:spTree>
+    <p:extLst>
+      <p:ext uri="{BB962C8B-B14F-4D97-AF65-F5344CB8AC3E}">
+        <p14:creationId xmlns:p14="http://schemas.microsoft.com/office/powerpoint/2010/main" val="1225941338"/>
+      </p:ext>
+    </p:extLst>
+  </p:cSld>
+  <p:clrMapOvr>
+    <a:masterClrMapping/>
+  </p:clrMapOvr>
+</p:sld>
+</file>
+
+<file path=ppt/slides/slide3.xml><?xml version="1.0" encoding="utf-8"?>
+<p:sld xmlns:a="http://schemas.openxmlformats.org/drawingml/2006/main" xmlns:r="http://schemas.openxmlformats.org/officeDocument/2006/relationships" xmlns:p="http://schemas.openxmlformats.org/presentationml/2006/main">
+  <p:cSld>
+    <p:spTree>
+      <p:nvGrpSpPr>
+        <p:cNvPr id="1" name="">
+          <a:extLst>
+            <a:ext uri="{FF2B5EF4-FFF2-40B4-BE49-F238E27FC236}">
+              <a16:creationId xmlns:a16="http://schemas.microsoft.com/office/drawing/2014/main" id="{FB25ABCA-280C-558C-CD3E-1FDD17264CD1}"/>
+            </a:ext>
+          </a:extLst>
+        </p:cNvPr>
+        <p:cNvGrpSpPr/>
+        <p:nvPr/>
+      </p:nvGrpSpPr>
+      <p:grpSpPr>
+        <a:xfrm>
+          <a:off x="0" y="0"/>
+          <a:ext cx="0" cy="0"/>
+          <a:chOff x="0" y="0"/>
+          <a:chExt cx="0" cy="0"/>
+        </a:xfrm>
+      </p:grpSpPr>
+      <p:sp>
+        <p:nvSpPr>
+          <p:cNvPr id="3" name="fig1_A">
+            <a:extLst>
+              <a:ext uri="{FF2B5EF4-FFF2-40B4-BE49-F238E27FC236}">
+                <a16:creationId xmlns:a16="http://schemas.microsoft.com/office/drawing/2014/main" id="{267AB746-F621-096F-D7D7-3073B80F5200}"/>
               </a:ext>
             </a:extLst>
           </p:cNvPr>
@@ -3104,29 +4075,1291 @@
         </p:nvSpPr>
         <p:spPr>
           <a:xfrm>
-            <a:off x="2970212" y="4531599"/>
-            <a:ext cx="2117798" cy="990067"/>
-          </a:xfrm>
-          <a:prstGeom prst="rect">
-            <a:avLst/>
-          </a:prstGeom>
-          <a:solidFill>
-            <a:srgbClr val="D0F5F5"/>
-          </a:solidFill>
-          <a:ln w="6350">
-            <a:solidFill>
-              <a:srgbClr val="808080"/>
-            </a:solidFill>
-          </a:ln>
+            <a:off x="457200" y="457200"/>
+            <a:ext cx="3177153" cy="1653119"/>
+          </a:xfrm>
+          <a:prstGeom prst="rect">
+            <a:avLst/>
+          </a:prstGeom>
+          <a:noFill/>
         </p:spPr>
         <p:style>
-          <a:lnRef idx="1">
-            <a:schemeClr val="accent1"/>
+          <a:lnRef idx="2">
+            <a:schemeClr val="dk1">
+              <a:shade val="15000"/>
+            </a:schemeClr>
           </a:lnRef>
-          <a:fillRef idx="3">
+          <a:fillRef idx="1">
+            <a:schemeClr val="dk1"/>
+          </a:fillRef>
+          <a:effectRef idx="0">
+            <a:schemeClr val="dk1"/>
+          </a:effectRef>
+          <a:fontRef idx="minor">
+            <a:schemeClr val="lt1"/>
+          </a:fontRef>
+        </p:style>
+        <p:txBody>
+          <a:bodyPr rtlCol="0" anchor="ctr"/>
+          <a:lstStyle/>
+          <a:p>
+            <a:pPr algn="ctr"/>
+            <a:r>
+              <a:rPr lang="en-US" b="1" dirty="0">
+                <a:solidFill>
+                  <a:schemeClr val="tx1"/>
+                </a:solidFill>
+              </a:rPr>
+              <a:t>A</a:t>
+            </a:r>
+          </a:p>
+        </p:txBody>
+      </p:sp>
+      <p:sp>
+        <p:nvSpPr>
+          <p:cNvPr id="5" name="fig1_B">
+            <a:extLst>
+              <a:ext uri="{FF2B5EF4-FFF2-40B4-BE49-F238E27FC236}">
+                <a16:creationId xmlns:a16="http://schemas.microsoft.com/office/drawing/2014/main" id="{09A83E48-D8DF-3624-39EF-2AC75412C193}"/>
+              </a:ext>
+            </a:extLst>
+          </p:cNvPr>
+          <p:cNvSpPr/>
+          <p:nvPr/>
+        </p:nvSpPr>
+        <p:spPr>
+          <a:xfrm>
+            <a:off x="457200" y="2123593"/>
+            <a:ext cx="2315798" cy="2710048"/>
+          </a:xfrm>
+          <a:prstGeom prst="rect">
+            <a:avLst/>
+          </a:prstGeom>
+          <a:noFill/>
+        </p:spPr>
+        <p:style>
+          <a:lnRef idx="2">
+            <a:schemeClr val="dk1">
+              <a:shade val="15000"/>
+            </a:schemeClr>
+          </a:lnRef>
+          <a:fillRef idx="1">
+            <a:schemeClr val="dk1"/>
+          </a:fillRef>
+          <a:effectRef idx="0">
+            <a:schemeClr val="dk1"/>
+          </a:effectRef>
+          <a:fontRef idx="minor">
+            <a:schemeClr val="lt1"/>
+          </a:fontRef>
+        </p:style>
+        <p:txBody>
+          <a:bodyPr rtlCol="0" anchor="ctr"/>
+          <a:lstStyle/>
+          <a:p>
+            <a:pPr algn="ctr"/>
+            <a:r>
+              <a:rPr lang="en-US" b="1" dirty="0">
+                <a:solidFill>
+                  <a:schemeClr val="tx1"/>
+                </a:solidFill>
+              </a:rPr>
+              <a:t>B</a:t>
+            </a:r>
+          </a:p>
+        </p:txBody>
+      </p:sp>
+      <p:sp>
+        <p:nvSpPr>
+          <p:cNvPr id="13" name="fig1_F">
+            <a:extLst>
+              <a:ext uri="{FF2B5EF4-FFF2-40B4-BE49-F238E27FC236}">
+                <a16:creationId xmlns:a16="http://schemas.microsoft.com/office/drawing/2014/main" id="{0FFFBFC8-4F89-8064-773D-BF884851B7A1}"/>
+              </a:ext>
+            </a:extLst>
+          </p:cNvPr>
+          <p:cNvSpPr/>
+          <p:nvPr/>
+        </p:nvSpPr>
+        <p:spPr>
+          <a:xfrm>
+            <a:off x="3727494" y="457200"/>
+            <a:ext cx="1288306" cy="589369"/>
+          </a:xfrm>
+          <a:prstGeom prst="rect">
+            <a:avLst/>
+          </a:prstGeom>
+          <a:noFill/>
+        </p:spPr>
+        <p:style>
+          <a:lnRef idx="2">
+            <a:schemeClr val="dk1">
+              <a:shade val="15000"/>
+            </a:schemeClr>
+          </a:lnRef>
+          <a:fillRef idx="1">
+            <a:schemeClr val="dk1"/>
+          </a:fillRef>
+          <a:effectRef idx="0">
+            <a:schemeClr val="dk1"/>
+          </a:effectRef>
+          <a:fontRef idx="minor">
+            <a:schemeClr val="lt1"/>
+          </a:fontRef>
+        </p:style>
+        <p:txBody>
+          <a:bodyPr rtlCol="0" anchor="ctr"/>
+          <a:lstStyle/>
+          <a:p>
+            <a:pPr algn="ctr"/>
+            <a:r>
+              <a:rPr lang="en-US" b="1" dirty="0">
+                <a:solidFill>
+                  <a:schemeClr val="tx1"/>
+                </a:solidFill>
+              </a:rPr>
+              <a:t>F</a:t>
+            </a:r>
+          </a:p>
+        </p:txBody>
+      </p:sp>
+      <p:sp>
+        <p:nvSpPr>
+          <p:cNvPr id="16" name="fig1_H">
+            <a:extLst>
+              <a:ext uri="{FF2B5EF4-FFF2-40B4-BE49-F238E27FC236}">
+                <a16:creationId xmlns:a16="http://schemas.microsoft.com/office/drawing/2014/main" id="{72FA8B80-4F98-4286-70C5-846DF40DD15A}"/>
+              </a:ext>
+            </a:extLst>
+          </p:cNvPr>
+          <p:cNvSpPr/>
+          <p:nvPr/>
+        </p:nvSpPr>
+        <p:spPr>
+          <a:xfrm>
+            <a:off x="3727494" y="1053147"/>
+            <a:ext cx="1288306" cy="869881"/>
+          </a:xfrm>
+          <a:prstGeom prst="rect">
+            <a:avLst/>
+          </a:prstGeom>
+          <a:noFill/>
+        </p:spPr>
+        <p:style>
+          <a:lnRef idx="2">
+            <a:schemeClr val="dk1">
+              <a:shade val="15000"/>
+            </a:schemeClr>
+          </a:lnRef>
+          <a:fillRef idx="1">
+            <a:schemeClr val="dk1"/>
+          </a:fillRef>
+          <a:effectRef idx="0">
+            <a:schemeClr val="dk1"/>
+          </a:effectRef>
+          <a:fontRef idx="minor">
+            <a:schemeClr val="lt1"/>
+          </a:fontRef>
+        </p:style>
+        <p:txBody>
+          <a:bodyPr rtlCol="0" anchor="ctr"/>
+          <a:lstStyle/>
+          <a:p>
+            <a:pPr algn="ctr"/>
+            <a:r>
+              <a:rPr lang="en-US" b="1" dirty="0">
+                <a:solidFill>
+                  <a:schemeClr val="tx1"/>
+                </a:solidFill>
+              </a:rPr>
+              <a:t>H</a:t>
+            </a:r>
+          </a:p>
+        </p:txBody>
+      </p:sp>
+      <p:sp>
+        <p:nvSpPr>
+          <p:cNvPr id="18" name="fig1_L">
+            <a:extLst>
+              <a:ext uri="{FF2B5EF4-FFF2-40B4-BE49-F238E27FC236}">
+                <a16:creationId xmlns:a16="http://schemas.microsoft.com/office/drawing/2014/main" id="{AC336900-CF21-26E7-4BBE-893950376373}"/>
+              </a:ext>
+            </a:extLst>
+          </p:cNvPr>
+          <p:cNvSpPr/>
+          <p:nvPr/>
+        </p:nvSpPr>
+        <p:spPr>
+          <a:xfrm>
+            <a:off x="3727494" y="2003540"/>
+            <a:ext cx="1288306" cy="589369"/>
+          </a:xfrm>
+          <a:prstGeom prst="rect">
+            <a:avLst/>
+          </a:prstGeom>
+          <a:noFill/>
+        </p:spPr>
+        <p:style>
+          <a:lnRef idx="2">
+            <a:schemeClr val="dk1">
+              <a:shade val="15000"/>
+            </a:schemeClr>
+          </a:lnRef>
+          <a:fillRef idx="1">
+            <a:schemeClr val="dk1"/>
+          </a:fillRef>
+          <a:effectRef idx="0">
+            <a:schemeClr val="dk1"/>
+          </a:effectRef>
+          <a:fontRef idx="minor">
+            <a:schemeClr val="lt1"/>
+          </a:fontRef>
+        </p:style>
+        <p:txBody>
+          <a:bodyPr rtlCol="0" anchor="ctr"/>
+          <a:lstStyle/>
+          <a:p>
+            <a:pPr algn="ctr"/>
+            <a:r>
+              <a:rPr lang="en-US" b="1" dirty="0">
+                <a:solidFill>
+                  <a:schemeClr val="tx1"/>
+                </a:solidFill>
+              </a:rPr>
+              <a:t>L</a:t>
+            </a:r>
+          </a:p>
+        </p:txBody>
+      </p:sp>
+      <p:sp>
+        <p:nvSpPr>
+          <p:cNvPr id="19" name="fig1_N">
+            <a:extLst>
+              <a:ext uri="{FF2B5EF4-FFF2-40B4-BE49-F238E27FC236}">
+                <a16:creationId xmlns:a16="http://schemas.microsoft.com/office/drawing/2014/main" id="{C03A3210-1851-5DCB-BE39-0DFEFF343ABA}"/>
+              </a:ext>
+            </a:extLst>
+          </p:cNvPr>
+          <p:cNvSpPr/>
+          <p:nvPr/>
+        </p:nvSpPr>
+        <p:spPr>
+          <a:xfrm>
+            <a:off x="3727494" y="2599487"/>
+            <a:ext cx="1288306" cy="773279"/>
+          </a:xfrm>
+          <a:prstGeom prst="rect">
+            <a:avLst/>
+          </a:prstGeom>
+          <a:noFill/>
+        </p:spPr>
+        <p:style>
+          <a:lnRef idx="2">
+            <a:schemeClr val="dk1">
+              <a:shade val="15000"/>
+            </a:schemeClr>
+          </a:lnRef>
+          <a:fillRef idx="1">
+            <a:schemeClr val="dk1"/>
+          </a:fillRef>
+          <a:effectRef idx="0">
+            <a:schemeClr val="dk1"/>
+          </a:effectRef>
+          <a:fontRef idx="minor">
+            <a:schemeClr val="lt1"/>
+          </a:fontRef>
+        </p:style>
+        <p:txBody>
+          <a:bodyPr rtlCol="0" anchor="ctr"/>
+          <a:lstStyle/>
+          <a:p>
+            <a:pPr algn="ctr"/>
+            <a:r>
+              <a:rPr lang="en-US" b="1" dirty="0">
+                <a:solidFill>
+                  <a:schemeClr val="tx1"/>
+                </a:solidFill>
+              </a:rPr>
+              <a:t>N</a:t>
+            </a:r>
+          </a:p>
+        </p:txBody>
+      </p:sp>
+      <p:sp>
+        <p:nvSpPr>
+          <p:cNvPr id="20" name="fig1_Q">
+            <a:extLst>
+              <a:ext uri="{FF2B5EF4-FFF2-40B4-BE49-F238E27FC236}">
+                <a16:creationId xmlns:a16="http://schemas.microsoft.com/office/drawing/2014/main" id="{AF693FF7-4153-040D-27C1-9FEB36F384D1}"/>
+              </a:ext>
+            </a:extLst>
+          </p:cNvPr>
+          <p:cNvSpPr/>
+          <p:nvPr/>
+        </p:nvSpPr>
+        <p:spPr>
+          <a:xfrm>
+            <a:off x="3727493" y="3461031"/>
+            <a:ext cx="1272927" cy="589369"/>
+          </a:xfrm>
+          <a:prstGeom prst="rect">
+            <a:avLst/>
+          </a:prstGeom>
+          <a:noFill/>
+        </p:spPr>
+        <p:style>
+          <a:lnRef idx="2">
+            <a:schemeClr val="dk1">
+              <a:shade val="15000"/>
+            </a:schemeClr>
+          </a:lnRef>
+          <a:fillRef idx="1">
+            <a:schemeClr val="dk1"/>
+          </a:fillRef>
+          <a:effectRef idx="0">
+            <a:schemeClr val="dk1"/>
+          </a:effectRef>
+          <a:fontRef idx="minor">
+            <a:schemeClr val="lt1"/>
+          </a:fontRef>
+        </p:style>
+        <p:txBody>
+          <a:bodyPr rtlCol="0" anchor="ctr"/>
+          <a:lstStyle/>
+          <a:p>
+            <a:pPr algn="ctr"/>
+            <a:r>
+              <a:rPr lang="en-US" b="1" dirty="0">
+                <a:solidFill>
+                  <a:schemeClr val="tx1"/>
+                </a:solidFill>
+              </a:rPr>
+              <a:t>Q</a:t>
+            </a:r>
+          </a:p>
+        </p:txBody>
+      </p:sp>
+      <p:sp>
+        <p:nvSpPr>
+          <p:cNvPr id="21" name="fig1_S">
+            <a:extLst>
+              <a:ext uri="{FF2B5EF4-FFF2-40B4-BE49-F238E27FC236}">
+                <a16:creationId xmlns:a16="http://schemas.microsoft.com/office/drawing/2014/main" id="{974061AC-95DA-16FB-2F66-E51C130C1879}"/>
+              </a:ext>
+            </a:extLst>
+          </p:cNvPr>
+          <p:cNvSpPr/>
+          <p:nvPr/>
+        </p:nvSpPr>
+        <p:spPr>
+          <a:xfrm>
+            <a:off x="3727493" y="4056978"/>
+            <a:ext cx="1272927" cy="773279"/>
+          </a:xfrm>
+          <a:prstGeom prst="rect">
+            <a:avLst/>
+          </a:prstGeom>
+          <a:noFill/>
+        </p:spPr>
+        <p:style>
+          <a:lnRef idx="2">
+            <a:schemeClr val="dk1">
+              <a:shade val="15000"/>
+            </a:schemeClr>
+          </a:lnRef>
+          <a:fillRef idx="1">
+            <a:schemeClr val="dk1"/>
+          </a:fillRef>
+          <a:effectRef idx="0">
+            <a:schemeClr val="dk1"/>
+          </a:effectRef>
+          <a:fontRef idx="minor">
+            <a:schemeClr val="lt1"/>
+          </a:fontRef>
+        </p:style>
+        <p:txBody>
+          <a:bodyPr rtlCol="0" anchor="ctr"/>
+          <a:lstStyle/>
+          <a:p>
+            <a:pPr algn="ctr"/>
+            <a:r>
+              <a:rPr lang="en-US" b="1" dirty="0">
+                <a:solidFill>
+                  <a:schemeClr val="tx1"/>
+                </a:solidFill>
+              </a:rPr>
+              <a:t>S</a:t>
+            </a:r>
+          </a:p>
+        </p:txBody>
+      </p:sp>
+      <p:sp>
+        <p:nvSpPr>
+          <p:cNvPr id="22" name="fig1_G">
+            <a:extLst>
+              <a:ext uri="{FF2B5EF4-FFF2-40B4-BE49-F238E27FC236}">
+                <a16:creationId xmlns:a16="http://schemas.microsoft.com/office/drawing/2014/main" id="{72FAA8CB-6D13-332F-949B-AF24CAA318F3}"/>
+              </a:ext>
+            </a:extLst>
+          </p:cNvPr>
+          <p:cNvSpPr/>
+          <p:nvPr/>
+        </p:nvSpPr>
+        <p:spPr>
+          <a:xfrm>
+            <a:off x="5032268" y="457200"/>
+            <a:ext cx="1775540" cy="589369"/>
+          </a:xfrm>
+          <a:prstGeom prst="rect">
+            <a:avLst/>
+          </a:prstGeom>
+          <a:noFill/>
+        </p:spPr>
+        <p:style>
+          <a:lnRef idx="2">
+            <a:schemeClr val="dk1">
+              <a:shade val="15000"/>
+            </a:schemeClr>
+          </a:lnRef>
+          <a:fillRef idx="1">
+            <a:schemeClr val="dk1"/>
+          </a:fillRef>
+          <a:effectRef idx="0">
+            <a:schemeClr val="dk1"/>
+          </a:effectRef>
+          <a:fontRef idx="minor">
+            <a:schemeClr val="lt1"/>
+          </a:fontRef>
+        </p:style>
+        <p:txBody>
+          <a:bodyPr rtlCol="0" anchor="ctr"/>
+          <a:lstStyle/>
+          <a:p>
+            <a:pPr algn="ctr"/>
+            <a:r>
+              <a:rPr lang="en-US" b="1" dirty="0">
+                <a:solidFill>
+                  <a:schemeClr val="tx1"/>
+                </a:solidFill>
+              </a:rPr>
+              <a:t>G</a:t>
+            </a:r>
+          </a:p>
+        </p:txBody>
+      </p:sp>
+      <p:sp>
+        <p:nvSpPr>
+          <p:cNvPr id="23" name="fig1_M">
+            <a:extLst>
+              <a:ext uri="{FF2B5EF4-FFF2-40B4-BE49-F238E27FC236}">
+                <a16:creationId xmlns:a16="http://schemas.microsoft.com/office/drawing/2014/main" id="{0BA1D22F-9935-76C5-BCE7-0645D4404667}"/>
+              </a:ext>
+            </a:extLst>
+          </p:cNvPr>
+          <p:cNvSpPr/>
+          <p:nvPr/>
+        </p:nvSpPr>
+        <p:spPr>
+          <a:xfrm>
+            <a:off x="5032270" y="2003540"/>
+            <a:ext cx="1775538" cy="595947"/>
+          </a:xfrm>
+          <a:prstGeom prst="rect">
+            <a:avLst/>
+          </a:prstGeom>
+          <a:noFill/>
+        </p:spPr>
+        <p:style>
+          <a:lnRef idx="2">
+            <a:schemeClr val="dk1">
+              <a:shade val="15000"/>
+            </a:schemeClr>
+          </a:lnRef>
+          <a:fillRef idx="1">
+            <a:schemeClr val="dk1"/>
+          </a:fillRef>
+          <a:effectRef idx="0">
+            <a:schemeClr val="dk1"/>
+          </a:effectRef>
+          <a:fontRef idx="minor">
+            <a:schemeClr val="lt1"/>
+          </a:fontRef>
+        </p:style>
+        <p:txBody>
+          <a:bodyPr rtlCol="0" anchor="ctr"/>
+          <a:lstStyle/>
+          <a:p>
+            <a:pPr algn="ctr"/>
+            <a:r>
+              <a:rPr lang="en-US" b="1" dirty="0">
+                <a:solidFill>
+                  <a:schemeClr val="tx1"/>
+                </a:solidFill>
+              </a:rPr>
+              <a:t>M</a:t>
+            </a:r>
+          </a:p>
+        </p:txBody>
+      </p:sp>
+      <p:sp>
+        <p:nvSpPr>
+          <p:cNvPr id="24" name="fig1_R">
+            <a:extLst>
+              <a:ext uri="{FF2B5EF4-FFF2-40B4-BE49-F238E27FC236}">
+                <a16:creationId xmlns:a16="http://schemas.microsoft.com/office/drawing/2014/main" id="{E3D84538-01B3-24CE-03EE-50357AB516E8}"/>
+              </a:ext>
+            </a:extLst>
+          </p:cNvPr>
+          <p:cNvSpPr/>
+          <p:nvPr/>
+        </p:nvSpPr>
+        <p:spPr>
+          <a:xfrm>
+            <a:off x="5000420" y="3461030"/>
+            <a:ext cx="1807388" cy="631297"/>
+          </a:xfrm>
+          <a:prstGeom prst="rect">
+            <a:avLst/>
+          </a:prstGeom>
+          <a:noFill/>
+        </p:spPr>
+        <p:style>
+          <a:lnRef idx="2">
+            <a:schemeClr val="dk1">
+              <a:shade val="15000"/>
+            </a:schemeClr>
+          </a:lnRef>
+          <a:fillRef idx="1">
+            <a:schemeClr val="dk1"/>
+          </a:fillRef>
+          <a:effectRef idx="0">
+            <a:schemeClr val="dk1"/>
+          </a:effectRef>
+          <a:fontRef idx="minor">
+            <a:schemeClr val="lt1"/>
+          </a:fontRef>
+        </p:style>
+        <p:txBody>
+          <a:bodyPr rtlCol="0" anchor="ctr"/>
+          <a:lstStyle/>
+          <a:p>
+            <a:pPr algn="ctr"/>
+            <a:r>
+              <a:rPr lang="en-US" b="1" dirty="0">
+                <a:solidFill>
+                  <a:schemeClr val="tx1"/>
+                </a:solidFill>
+              </a:rPr>
+              <a:t>R</a:t>
+            </a:r>
+          </a:p>
+        </p:txBody>
+      </p:sp>
+      <p:sp>
+        <p:nvSpPr>
+          <p:cNvPr id="25" name="fig1_I">
+            <a:extLst>
+              <a:ext uri="{FF2B5EF4-FFF2-40B4-BE49-F238E27FC236}">
+                <a16:creationId xmlns:a16="http://schemas.microsoft.com/office/drawing/2014/main" id="{9BE228B9-ED2C-61E2-A01C-987205A1E14E}"/>
+              </a:ext>
+            </a:extLst>
+          </p:cNvPr>
+          <p:cNvSpPr/>
+          <p:nvPr/>
+        </p:nvSpPr>
+        <p:spPr>
+          <a:xfrm>
+            <a:off x="5032268" y="1060035"/>
+            <a:ext cx="588051" cy="862131"/>
+          </a:xfrm>
+          <a:prstGeom prst="rect">
+            <a:avLst/>
+          </a:prstGeom>
+          <a:noFill/>
+        </p:spPr>
+        <p:style>
+          <a:lnRef idx="2">
+            <a:schemeClr val="dk1">
+              <a:shade val="15000"/>
+            </a:schemeClr>
+          </a:lnRef>
+          <a:fillRef idx="1">
+            <a:schemeClr val="dk1"/>
+          </a:fillRef>
+          <a:effectRef idx="0">
+            <a:schemeClr val="dk1"/>
+          </a:effectRef>
+          <a:fontRef idx="minor">
+            <a:schemeClr val="lt1"/>
+          </a:fontRef>
+        </p:style>
+        <p:txBody>
+          <a:bodyPr rtlCol="0" anchor="ctr"/>
+          <a:lstStyle/>
+          <a:p>
+            <a:pPr algn="ctr"/>
+            <a:r>
+              <a:rPr lang="en-US" b="1" dirty="0">
+                <a:solidFill>
+                  <a:schemeClr val="tx1"/>
+                </a:solidFill>
+              </a:rPr>
+              <a:t>I</a:t>
+            </a:r>
+          </a:p>
+        </p:txBody>
+      </p:sp>
+      <p:sp>
+        <p:nvSpPr>
+          <p:cNvPr id="26" name="fig1_J">
+            <a:extLst>
+              <a:ext uri="{FF2B5EF4-FFF2-40B4-BE49-F238E27FC236}">
+                <a16:creationId xmlns:a16="http://schemas.microsoft.com/office/drawing/2014/main" id="{68E54AF0-1CF1-C02D-6158-F1A603DD98AC}"/>
+              </a:ext>
+            </a:extLst>
+          </p:cNvPr>
+          <p:cNvSpPr/>
+          <p:nvPr/>
+        </p:nvSpPr>
+        <p:spPr>
+          <a:xfrm>
+            <a:off x="5631706" y="1060035"/>
+            <a:ext cx="588051" cy="862131"/>
+          </a:xfrm>
+          <a:prstGeom prst="rect">
+            <a:avLst/>
+          </a:prstGeom>
+          <a:noFill/>
+        </p:spPr>
+        <p:style>
+          <a:lnRef idx="2">
+            <a:schemeClr val="dk1">
+              <a:shade val="15000"/>
+            </a:schemeClr>
+          </a:lnRef>
+          <a:fillRef idx="1">
+            <a:schemeClr val="dk1"/>
+          </a:fillRef>
+          <a:effectRef idx="0">
+            <a:schemeClr val="dk1"/>
+          </a:effectRef>
+          <a:fontRef idx="minor">
+            <a:schemeClr val="lt1"/>
+          </a:fontRef>
+        </p:style>
+        <p:txBody>
+          <a:bodyPr rtlCol="0" anchor="ctr"/>
+          <a:lstStyle/>
+          <a:p>
+            <a:pPr algn="ctr"/>
+            <a:r>
+              <a:rPr lang="en-US" b="1" dirty="0">
+                <a:solidFill>
+                  <a:schemeClr val="tx1"/>
+                </a:solidFill>
+              </a:rPr>
+              <a:t>J</a:t>
+            </a:r>
+          </a:p>
+        </p:txBody>
+      </p:sp>
+      <p:sp>
+        <p:nvSpPr>
+          <p:cNvPr id="27" name="fig1_K">
+            <a:extLst>
+              <a:ext uri="{FF2B5EF4-FFF2-40B4-BE49-F238E27FC236}">
+                <a16:creationId xmlns:a16="http://schemas.microsoft.com/office/drawing/2014/main" id="{B3B84019-2668-4A57-7CF1-259CA5611964}"/>
+              </a:ext>
+            </a:extLst>
+          </p:cNvPr>
+          <p:cNvSpPr/>
+          <p:nvPr/>
+        </p:nvSpPr>
+        <p:spPr>
+          <a:xfrm>
+            <a:off x="6219757" y="1056590"/>
+            <a:ext cx="588051" cy="862131"/>
+          </a:xfrm>
+          <a:prstGeom prst="rect">
+            <a:avLst/>
+          </a:prstGeom>
+          <a:noFill/>
+        </p:spPr>
+        <p:style>
+          <a:lnRef idx="2">
+            <a:schemeClr val="dk1">
+              <a:shade val="15000"/>
+            </a:schemeClr>
+          </a:lnRef>
+          <a:fillRef idx="1">
+            <a:schemeClr val="dk1"/>
+          </a:fillRef>
+          <a:effectRef idx="0">
+            <a:schemeClr val="dk1"/>
+          </a:effectRef>
+          <a:fontRef idx="minor">
+            <a:schemeClr val="lt1"/>
+          </a:fontRef>
+        </p:style>
+        <p:txBody>
+          <a:bodyPr rtlCol="0" anchor="ctr"/>
+          <a:lstStyle/>
+          <a:p>
+            <a:pPr algn="ctr"/>
+            <a:r>
+              <a:rPr lang="en-US" b="1" dirty="0">
+                <a:solidFill>
+                  <a:schemeClr val="tx1"/>
+                </a:solidFill>
+              </a:rPr>
+              <a:t>K</a:t>
+            </a:r>
+          </a:p>
+        </p:txBody>
+      </p:sp>
+      <p:sp>
+        <p:nvSpPr>
+          <p:cNvPr id="28" name="fig1_O">
+            <a:extLst>
+              <a:ext uri="{FF2B5EF4-FFF2-40B4-BE49-F238E27FC236}">
+                <a16:creationId xmlns:a16="http://schemas.microsoft.com/office/drawing/2014/main" id="{57C1E085-C758-29DE-2A26-1F7BF5359DB5}"/>
+              </a:ext>
+            </a:extLst>
+          </p:cNvPr>
+          <p:cNvSpPr/>
+          <p:nvPr/>
+        </p:nvSpPr>
+        <p:spPr>
+          <a:xfrm>
+            <a:off x="5032268" y="2606376"/>
+            <a:ext cx="1099226" cy="766390"/>
+          </a:xfrm>
+          <a:prstGeom prst="rect">
+            <a:avLst/>
+          </a:prstGeom>
+          <a:noFill/>
+        </p:spPr>
+        <p:style>
+          <a:lnRef idx="2">
+            <a:schemeClr val="dk1">
+              <a:shade val="15000"/>
+            </a:schemeClr>
+          </a:lnRef>
+          <a:fillRef idx="1">
+            <a:schemeClr val="dk1"/>
+          </a:fillRef>
+          <a:effectRef idx="0">
+            <a:schemeClr val="dk1"/>
+          </a:effectRef>
+          <a:fontRef idx="minor">
+            <a:schemeClr val="lt1"/>
+          </a:fontRef>
+        </p:style>
+        <p:txBody>
+          <a:bodyPr rtlCol="0" anchor="ctr"/>
+          <a:lstStyle/>
+          <a:p>
+            <a:pPr algn="ctr"/>
+            <a:r>
+              <a:rPr lang="en-US" b="1" dirty="0">
+                <a:solidFill>
+                  <a:schemeClr val="tx1"/>
+                </a:solidFill>
+              </a:rPr>
+              <a:t>O</a:t>
+            </a:r>
+          </a:p>
+        </p:txBody>
+      </p:sp>
+      <p:sp>
+        <p:nvSpPr>
+          <p:cNvPr id="29" name="fig1_P">
+            <a:extLst>
+              <a:ext uri="{FF2B5EF4-FFF2-40B4-BE49-F238E27FC236}">
+                <a16:creationId xmlns:a16="http://schemas.microsoft.com/office/drawing/2014/main" id="{C65DC210-694F-29CD-BAB0-15CB01CB17F8}"/>
+              </a:ext>
+            </a:extLst>
+          </p:cNvPr>
+          <p:cNvSpPr/>
+          <p:nvPr/>
+        </p:nvSpPr>
+        <p:spPr>
+          <a:xfrm>
+            <a:off x="6131494" y="2606376"/>
+            <a:ext cx="676314" cy="766390"/>
+          </a:xfrm>
+          <a:prstGeom prst="rect">
+            <a:avLst/>
+          </a:prstGeom>
+          <a:noFill/>
+        </p:spPr>
+        <p:style>
+          <a:lnRef idx="2">
+            <a:schemeClr val="dk1">
+              <a:shade val="15000"/>
+            </a:schemeClr>
+          </a:lnRef>
+          <a:fillRef idx="1">
+            <a:schemeClr val="dk1"/>
+          </a:fillRef>
+          <a:effectRef idx="0">
+            <a:schemeClr val="dk1"/>
+          </a:effectRef>
+          <a:fontRef idx="minor">
+            <a:schemeClr val="lt1"/>
+          </a:fontRef>
+        </p:style>
+        <p:txBody>
+          <a:bodyPr rtlCol="0" anchor="ctr"/>
+          <a:lstStyle/>
+          <a:p>
+            <a:pPr algn="ctr"/>
+            <a:r>
+              <a:rPr lang="en-US" b="1" dirty="0">
+                <a:solidFill>
+                  <a:schemeClr val="tx1"/>
+                </a:solidFill>
+              </a:rPr>
+              <a:t>P</a:t>
+            </a:r>
+          </a:p>
+        </p:txBody>
+      </p:sp>
+      <p:sp>
+        <p:nvSpPr>
+          <p:cNvPr id="30" name="fig1_T">
+            <a:extLst>
+              <a:ext uri="{FF2B5EF4-FFF2-40B4-BE49-F238E27FC236}">
+                <a16:creationId xmlns:a16="http://schemas.microsoft.com/office/drawing/2014/main" id="{324DA3A9-5F6C-C9C7-7818-E30A15F5A025}"/>
+              </a:ext>
+            </a:extLst>
+          </p:cNvPr>
+          <p:cNvSpPr/>
+          <p:nvPr/>
+        </p:nvSpPr>
+        <p:spPr>
+          <a:xfrm>
+            <a:off x="5000420" y="4098905"/>
+            <a:ext cx="1807388" cy="728874"/>
+          </a:xfrm>
+          <a:prstGeom prst="rect">
+            <a:avLst/>
+          </a:prstGeom>
+          <a:noFill/>
+        </p:spPr>
+        <p:style>
+          <a:lnRef idx="2">
+            <a:schemeClr val="dk1">
+              <a:shade val="15000"/>
+            </a:schemeClr>
+          </a:lnRef>
+          <a:fillRef idx="1">
+            <a:schemeClr val="dk1"/>
+          </a:fillRef>
+          <a:effectRef idx="0">
+            <a:schemeClr val="dk1"/>
+          </a:effectRef>
+          <a:fontRef idx="minor">
+            <a:schemeClr val="lt1"/>
+          </a:fontRef>
+        </p:style>
+        <p:txBody>
+          <a:bodyPr rtlCol="0" anchor="ctr"/>
+          <a:lstStyle/>
+          <a:p>
+            <a:pPr algn="ctr"/>
+            <a:r>
+              <a:rPr lang="en-US" b="1" dirty="0">
+                <a:solidFill>
+                  <a:schemeClr val="tx1"/>
+                </a:solidFill>
+              </a:rPr>
+              <a:t>T</a:t>
+            </a:r>
+          </a:p>
+        </p:txBody>
+      </p:sp>
+      <p:sp>
+        <p:nvSpPr>
+          <p:cNvPr id="34" name="fig1_C">
+            <a:extLst>
+              <a:ext uri="{FF2B5EF4-FFF2-40B4-BE49-F238E27FC236}">
+                <a16:creationId xmlns:a16="http://schemas.microsoft.com/office/drawing/2014/main" id="{24E5BCC2-7E0F-D286-C810-3EE8B6DAFAF0}"/>
+              </a:ext>
+            </a:extLst>
+          </p:cNvPr>
+          <p:cNvSpPr/>
+          <p:nvPr/>
+        </p:nvSpPr>
+        <p:spPr>
+          <a:xfrm>
+            <a:off x="2788253" y="2127757"/>
+            <a:ext cx="844883" cy="884969"/>
+          </a:xfrm>
+          <a:prstGeom prst="rect">
+            <a:avLst/>
+          </a:prstGeom>
+          <a:noFill/>
+        </p:spPr>
+        <p:style>
+          <a:lnRef idx="2">
+            <a:schemeClr val="dk1">
+              <a:shade val="15000"/>
+            </a:schemeClr>
+          </a:lnRef>
+          <a:fillRef idx="1">
+            <a:schemeClr val="dk1"/>
+          </a:fillRef>
+          <a:effectRef idx="0">
+            <a:schemeClr val="dk1"/>
+          </a:effectRef>
+          <a:fontRef idx="minor">
+            <a:schemeClr val="lt1"/>
+          </a:fontRef>
+        </p:style>
+        <p:txBody>
+          <a:bodyPr rtlCol="0" anchor="ctr"/>
+          <a:lstStyle/>
+          <a:p>
+            <a:pPr algn="ctr"/>
+            <a:r>
+              <a:rPr lang="en-US" b="1" dirty="0">
+                <a:solidFill>
+                  <a:schemeClr val="tx1"/>
+                </a:solidFill>
+              </a:rPr>
+              <a:t>C</a:t>
+            </a:r>
+          </a:p>
+        </p:txBody>
+      </p:sp>
+      <p:sp>
+        <p:nvSpPr>
+          <p:cNvPr id="35" name="fig1_D">
+            <a:extLst>
+              <a:ext uri="{FF2B5EF4-FFF2-40B4-BE49-F238E27FC236}">
+                <a16:creationId xmlns:a16="http://schemas.microsoft.com/office/drawing/2014/main" id="{F4B1E1FB-07B4-88CB-999F-887A4141C55B}"/>
+              </a:ext>
+            </a:extLst>
+          </p:cNvPr>
+          <p:cNvSpPr/>
+          <p:nvPr/>
+        </p:nvSpPr>
+        <p:spPr>
+          <a:xfrm>
+            <a:off x="2780626" y="3024988"/>
+            <a:ext cx="852510" cy="884969"/>
+          </a:xfrm>
+          <a:prstGeom prst="rect">
+            <a:avLst/>
+          </a:prstGeom>
+          <a:noFill/>
+        </p:spPr>
+        <p:style>
+          <a:lnRef idx="2">
+            <a:schemeClr val="dk1">
+              <a:shade val="15000"/>
+            </a:schemeClr>
+          </a:lnRef>
+          <a:fillRef idx="1">
+            <a:schemeClr val="dk1"/>
+          </a:fillRef>
+          <a:effectRef idx="0">
+            <a:schemeClr val="dk1"/>
+          </a:effectRef>
+          <a:fontRef idx="minor">
+            <a:schemeClr val="lt1"/>
+          </a:fontRef>
+        </p:style>
+        <p:txBody>
+          <a:bodyPr rtlCol="0" anchor="ctr"/>
+          <a:lstStyle/>
+          <a:p>
+            <a:pPr algn="ctr"/>
+            <a:r>
+              <a:rPr lang="en-US" b="1" dirty="0">
+                <a:solidFill>
+                  <a:schemeClr val="tx1"/>
+                </a:solidFill>
+              </a:rPr>
+              <a:t>D</a:t>
+            </a:r>
+          </a:p>
+        </p:txBody>
+      </p:sp>
+      <p:sp>
+        <p:nvSpPr>
+          <p:cNvPr id="36" name="fig1_E">
+            <a:extLst>
+              <a:ext uri="{FF2B5EF4-FFF2-40B4-BE49-F238E27FC236}">
+                <a16:creationId xmlns:a16="http://schemas.microsoft.com/office/drawing/2014/main" id="{762D5EEB-8E7C-296E-BD16-4EC126DD9A92}"/>
+              </a:ext>
+            </a:extLst>
+          </p:cNvPr>
+          <p:cNvSpPr/>
+          <p:nvPr/>
+        </p:nvSpPr>
+        <p:spPr>
+          <a:xfrm>
+            <a:off x="2788253" y="3926011"/>
+            <a:ext cx="844883" cy="907630"/>
+          </a:xfrm>
+          <a:prstGeom prst="rect">
+            <a:avLst/>
+          </a:prstGeom>
+          <a:noFill/>
+        </p:spPr>
+        <p:style>
+          <a:lnRef idx="2">
+            <a:schemeClr val="dk1">
+              <a:shade val="15000"/>
+            </a:schemeClr>
+          </a:lnRef>
+          <a:fillRef idx="1">
+            <a:schemeClr val="dk1"/>
+          </a:fillRef>
+          <a:effectRef idx="0">
+            <a:schemeClr val="dk1"/>
+          </a:effectRef>
+          <a:fontRef idx="minor">
+            <a:schemeClr val="lt1"/>
+          </a:fontRef>
+        </p:style>
+        <p:txBody>
+          <a:bodyPr rtlCol="0" anchor="ctr"/>
+          <a:lstStyle/>
+          <a:p>
+            <a:pPr algn="ctr"/>
+            <a:r>
+              <a:rPr lang="en-US" b="1" dirty="0">
+                <a:solidFill>
+                  <a:schemeClr val="tx1"/>
+                </a:solidFill>
+              </a:rPr>
+              <a:t>E</a:t>
+            </a:r>
+          </a:p>
+        </p:txBody>
+      </p:sp>
+    </p:spTree>
+    <p:extLst>
+      <p:ext uri="{BB962C8B-B14F-4D97-AF65-F5344CB8AC3E}">
+        <p14:creationId xmlns:p14="http://schemas.microsoft.com/office/powerpoint/2010/main" val="1874870207"/>
+      </p:ext>
+    </p:extLst>
+  </p:cSld>
+  <p:clrMapOvr>
+    <a:masterClrMapping/>
+  </p:clrMapOvr>
+</p:sld>
+</file>
+
+<file path=ppt/slides/slide4.xml><?xml version="1.0" encoding="utf-8"?>
+<p:sld xmlns:a="http://schemas.openxmlformats.org/drawingml/2006/main" xmlns:r="http://schemas.openxmlformats.org/officeDocument/2006/relationships" xmlns:p="http://schemas.openxmlformats.org/presentationml/2006/main">
+  <p:cSld>
+    <p:spTree>
+      <p:nvGrpSpPr>
+        <p:cNvPr id="1" name=""/>
+        <p:cNvGrpSpPr/>
+        <p:nvPr/>
+      </p:nvGrpSpPr>
+      <p:grpSpPr>
+        <a:xfrm>
+          <a:off x="0" y="0"/>
+          <a:ext cx="0" cy="0"/>
+          <a:chOff x="0" y="0"/>
+          <a:chExt cx="0" cy="0"/>
+        </a:xfrm>
+      </p:grpSpPr>
+      <p:pic>
+        <p:nvPicPr>
+          <p:cNvPr id="5" name="Picture 4">
+            <a:extLst>
+              <a:ext uri="{FF2B5EF4-FFF2-40B4-BE49-F238E27FC236}">
+                <a16:creationId xmlns:a16="http://schemas.microsoft.com/office/drawing/2014/main" id="{39A88F0D-50E8-B5D1-2BAD-59C733E49C05}"/>
+              </a:ext>
+            </a:extLst>
+          </p:cNvPr>
+          <p:cNvPicPr>
+            <a:picLocks noChangeAspect="1"/>
+          </p:cNvPicPr>
+          <p:nvPr/>
+        </p:nvPicPr>
+        <p:blipFill>
+          <a:blip r:embed="rId2"/>
+          <a:srcRect r="73453" b="72228"/>
+          <a:stretch>
+            <a:fillRect/>
+          </a:stretch>
+        </p:blipFill>
+        <p:spPr>
+          <a:xfrm>
+            <a:off x="-2379795" y="1191719"/>
+            <a:ext cx="1985985" cy="1963060"/>
+          </a:xfrm>
+          <a:prstGeom prst="rect">
+            <a:avLst/>
+          </a:prstGeom>
+        </p:spPr>
+      </p:pic>
+      <p:pic>
+        <p:nvPicPr>
+          <p:cNvPr id="7" name="Picture 6">
+            <a:extLst>
+              <a:ext uri="{FF2B5EF4-FFF2-40B4-BE49-F238E27FC236}">
+                <a16:creationId xmlns:a16="http://schemas.microsoft.com/office/drawing/2014/main" id="{72ED79FA-F41C-607C-D84A-7C17BB4F1AE3}"/>
+              </a:ext>
+            </a:extLst>
+          </p:cNvPr>
+          <p:cNvPicPr>
+            <a:picLocks noChangeAspect="1"/>
+          </p:cNvPicPr>
+          <p:nvPr/>
+        </p:nvPicPr>
+        <p:blipFill>
+          <a:blip r:embed="rId2"/>
+          <a:srcRect l="51599" r="458" b="72228"/>
+          <a:stretch>
+            <a:fillRect/>
+          </a:stretch>
+        </p:blipFill>
+        <p:spPr>
+          <a:xfrm>
+            <a:off x="-398260" y="1189084"/>
+            <a:ext cx="3666464" cy="1984831"/>
+          </a:xfrm>
+          <a:prstGeom prst="rect">
+            <a:avLst/>
+          </a:prstGeom>
+        </p:spPr>
+      </p:pic>
+      <p:pic>
+        <p:nvPicPr>
+          <p:cNvPr id="9" name="Picture 8">
+            <a:extLst>
+              <a:ext uri="{FF2B5EF4-FFF2-40B4-BE49-F238E27FC236}">
+                <a16:creationId xmlns:a16="http://schemas.microsoft.com/office/drawing/2014/main" id="{A087C8CA-CF61-DC12-5729-477C5953808F}"/>
+              </a:ext>
+            </a:extLst>
+          </p:cNvPr>
+          <p:cNvPicPr>
+            <a:picLocks noChangeAspect="1"/>
+          </p:cNvPicPr>
+          <p:nvPr/>
+        </p:nvPicPr>
+        <p:blipFill>
+          <a:blip r:embed="rId2"/>
+          <a:srcRect l="51599" t="26799" r="458" b="52282"/>
+          <a:stretch>
+            <a:fillRect/>
+          </a:stretch>
+        </p:blipFill>
+        <p:spPr>
+          <a:xfrm>
+            <a:off x="-408754" y="4750361"/>
+            <a:ext cx="2684054" cy="1478668"/>
+          </a:xfrm>
+          <a:prstGeom prst="rect">
+            <a:avLst/>
+          </a:prstGeom>
+        </p:spPr>
+      </p:pic>
+      <p:pic>
+        <p:nvPicPr>
+          <p:cNvPr id="11" name="Picture 10">
+            <a:extLst>
+              <a:ext uri="{FF2B5EF4-FFF2-40B4-BE49-F238E27FC236}">
+                <a16:creationId xmlns:a16="http://schemas.microsoft.com/office/drawing/2014/main" id="{A499B3D8-01D1-90B0-FC31-AD8F1797B460}"/>
+              </a:ext>
+            </a:extLst>
+          </p:cNvPr>
+          <p:cNvPicPr>
+            <a:picLocks noChangeAspect="1"/>
+          </p:cNvPicPr>
+          <p:nvPr/>
+        </p:nvPicPr>
+        <p:blipFill>
+          <a:blip r:embed="rId2"/>
+          <a:srcRect l="894" t="28453" r="51163" b="53036"/>
+          <a:stretch>
+            <a:fillRect/>
+          </a:stretch>
+        </p:blipFill>
+        <p:spPr>
+          <a:xfrm>
+            <a:off x="-411652" y="3236924"/>
+            <a:ext cx="2453657" cy="1308450"/>
+          </a:xfrm>
+          <a:prstGeom prst="rect">
+            <a:avLst/>
+          </a:prstGeom>
+        </p:spPr>
+      </p:pic>
+      <p:pic>
+        <p:nvPicPr>
+          <p:cNvPr id="15" name="Picture 14">
+            <a:extLst>
+              <a:ext uri="{FF2B5EF4-FFF2-40B4-BE49-F238E27FC236}">
+                <a16:creationId xmlns:a16="http://schemas.microsoft.com/office/drawing/2014/main" id="{BC5F228A-2C15-9372-BFA0-6B1A9CC49051}"/>
+              </a:ext>
+              <a:ext uri="{C183D7F6-B498-43B3-948B-1728B52AA6E4}">
+                <adec:decorative xmlns:adec="http://schemas.microsoft.com/office/drawing/2017/decorative" val="1"/>
+              </a:ext>
+            </a:extLst>
+          </p:cNvPr>
+          <p:cNvPicPr>
+            <a:picLocks noChangeAspect="1"/>
+          </p:cNvPicPr>
+          <p:nvPr/>
+        </p:nvPicPr>
+        <p:blipFill>
+          <a:blip r:embed="rId3"/>
+          <a:srcRect l="73575" t="65896" r="356" b="990"/>
+          <a:stretch>
+            <a:fillRect/>
+          </a:stretch>
+        </p:blipFill>
+        <p:spPr>
+          <a:xfrm>
+            <a:off x="-2226507" y="3040104"/>
+            <a:ext cx="1701858" cy="1698575"/>
+          </a:xfrm>
+          <a:prstGeom prst="rect">
+            <a:avLst/>
+          </a:prstGeom>
+        </p:spPr>
+      </p:pic>
+      <p:sp>
+        <p:nvSpPr>
+          <p:cNvPr id="16" name="Rectangle 15">
+            <a:extLst>
+              <a:ext uri="{FF2B5EF4-FFF2-40B4-BE49-F238E27FC236}">
+                <a16:creationId xmlns:a16="http://schemas.microsoft.com/office/drawing/2014/main" id="{44524501-00EF-9323-3261-B06155488DC3}"/>
+              </a:ext>
+            </a:extLst>
+          </p:cNvPr>
+          <p:cNvSpPr/>
+          <p:nvPr/>
+        </p:nvSpPr>
+        <p:spPr>
+          <a:xfrm>
+            <a:off x="-2076598" y="4874723"/>
+            <a:ext cx="1544998" cy="1225853"/>
+          </a:xfrm>
+          <a:prstGeom prst="rect">
+            <a:avLst/>
+          </a:prstGeom>
+        </p:spPr>
+        <p:style>
+          <a:lnRef idx="2">
+            <a:schemeClr val="accent1">
+              <a:shade val="15000"/>
+            </a:schemeClr>
+          </a:lnRef>
+          <a:fillRef idx="1">
             <a:schemeClr val="accent1"/>
           </a:fillRef>
-          <a:effectRef idx="2">
+          <a:effectRef idx="0">
             <a:schemeClr val="accent1"/>
           </a:effectRef>
           <a:fontRef idx="minor">
@@ -3134,53 +5367,111 @@
           </a:fontRef>
         </p:style>
         <p:txBody>
-          <a:bodyPr wrap="none" rtlCol="0" anchor="ctr"/>
+          <a:bodyPr rtlCol="0" anchor="ctr"/>
           <a:lstStyle/>
           <a:p>
             <a:pPr algn="ctr"/>
             <a:r>
-              <a:rPr sz="1000" b="1" dirty="0">
-                <a:solidFill>
-                  <a:srgbClr val="333333"/>
-                </a:solidFill>
-              </a:rPr>
-              <a:t>F
-52×55 mm</a:t>
-            </a:r>
-          </a:p>
-        </p:txBody>
-      </p:sp>
-      <p:sp>
-        <p:nvSpPr>
-          <p:cNvPr id="7" name="fig1_G"/>
+              <a:rPr lang="en-US" sz="2640"/>
+              <a:t>Same for model</a:t>
+            </a:r>
+          </a:p>
+        </p:txBody>
+      </p:sp>
+      <p:pic>
+        <p:nvPicPr>
+          <p:cNvPr id="21" name="Picture 20">
+            <a:extLst>
+              <a:ext uri="{FF2B5EF4-FFF2-40B4-BE49-F238E27FC236}">
+                <a16:creationId xmlns:a16="http://schemas.microsoft.com/office/drawing/2014/main" id="{E67FB46E-3200-88AD-4F4C-E2E6296A7634}"/>
+              </a:ext>
+            </a:extLst>
+          </p:cNvPr>
+          <p:cNvPicPr>
+            <a:picLocks noChangeAspect="1"/>
+          </p:cNvPicPr>
+          <p:nvPr/>
+        </p:nvPicPr>
+        <p:blipFill>
+          <a:blip r:embed="rId4"/>
+          <a:srcRect r="49398"/>
+          <a:stretch>
+            <a:fillRect/>
+          </a:stretch>
+        </p:blipFill>
+        <p:spPr>
+          <a:xfrm>
+            <a:off x="4029425" y="1413930"/>
+            <a:ext cx="3202855" cy="3278905"/>
+          </a:xfrm>
+          <a:prstGeom prst="rect">
+            <a:avLst/>
+          </a:prstGeom>
+        </p:spPr>
+      </p:pic>
+      <p:pic>
+        <p:nvPicPr>
+          <p:cNvPr id="24" name="Picture 23">
+            <a:extLst>
+              <a:ext uri="{FF2B5EF4-FFF2-40B4-BE49-F238E27FC236}">
+                <a16:creationId xmlns:a16="http://schemas.microsoft.com/office/drawing/2014/main" id="{B3A9B486-A55C-A88C-65B6-65885F7335AC}"/>
+              </a:ext>
+            </a:extLst>
+          </p:cNvPr>
+          <p:cNvPicPr>
+            <a:picLocks noChangeAspect="1"/>
+          </p:cNvPicPr>
+          <p:nvPr/>
+        </p:nvPicPr>
+        <p:blipFill>
+          <a:blip r:embed="rId5"/>
+          <a:stretch>
+            <a:fillRect/>
+          </a:stretch>
+        </p:blipFill>
+        <p:spPr>
+          <a:xfrm>
+            <a:off x="2342907" y="4874722"/>
+            <a:ext cx="5080454" cy="2728255"/>
+          </a:xfrm>
+          <a:prstGeom prst="rect">
+            <a:avLst/>
+          </a:prstGeom>
+        </p:spPr>
+      </p:pic>
+      <p:sp>
+        <p:nvSpPr>
+          <p:cNvPr id="6" name="Rectangle 5">
+            <a:extLst>
+              <a:ext uri="{FF2B5EF4-FFF2-40B4-BE49-F238E27FC236}">
+                <a16:creationId xmlns:a16="http://schemas.microsoft.com/office/drawing/2014/main" id="{FA2F1790-7007-61EE-652D-78BC43D76B3E}"/>
+              </a:ext>
+            </a:extLst>
+          </p:cNvPr>
           <p:cNvSpPr/>
           <p:nvPr/>
         </p:nvSpPr>
         <p:spPr>
           <a:xfrm>
-            <a:off x="2970212" y="3462975"/>
-            <a:ext cx="2117798" cy="990067"/>
-          </a:xfrm>
-          <a:prstGeom prst="rect">
-            <a:avLst/>
-          </a:prstGeom>
-          <a:solidFill>
-            <a:srgbClr val="D0F5F5"/>
-          </a:solidFill>
-          <a:ln w="6350">
-            <a:solidFill>
-              <a:srgbClr val="808080"/>
-            </a:solidFill>
-          </a:ln>
+            <a:off x="3762422" y="1189086"/>
+            <a:ext cx="2100654" cy="3489515"/>
+          </a:xfrm>
+          <a:prstGeom prst="rect">
+            <a:avLst/>
+          </a:prstGeom>
+          <a:noFill/>
+          <a:ln w="12700"/>
         </p:spPr>
         <p:style>
-          <a:lnRef idx="1">
-            <a:schemeClr val="accent1"/>
+          <a:lnRef idx="2">
+            <a:schemeClr val="accent1">
+              <a:shade val="15000"/>
+            </a:schemeClr>
           </a:lnRef>
-          <a:fillRef idx="3">
+          <a:fillRef idx="1">
             <a:schemeClr val="accent1"/>
           </a:fillRef>
-          <a:effectRef idx="2">
+          <a:effectRef idx="0">
             <a:schemeClr val="accent1"/>
           </a:effectRef>
           <a:fontRef idx="minor">
@@ -3188,53 +5479,47 @@
           </a:fontRef>
         </p:style>
         <p:txBody>
-          <a:bodyPr wrap="none" rtlCol="0" anchor="ctr"/>
+          <a:bodyPr rtlCol="0" anchor="ctr"/>
           <a:lstStyle/>
           <a:p>
             <a:pPr algn="ctr"/>
-            <a:r>
-              <a:rPr sz="1000" b="1" dirty="0">
-                <a:solidFill>
-                  <a:srgbClr val="333333"/>
-                </a:solidFill>
-              </a:rPr>
-              <a:t>F
-52×55 mm</a:t>
-            </a:r>
-          </a:p>
-        </p:txBody>
-      </p:sp>
-      <p:sp>
-        <p:nvSpPr>
-          <p:cNvPr id="5" name="fig1_F"/>
+            <a:endParaRPr lang="en-US" sz="2640"/>
+          </a:p>
+        </p:txBody>
+      </p:sp>
+      <p:sp>
+        <p:nvSpPr>
+          <p:cNvPr id="8" name="Rectangle 7">
+            <a:extLst>
+              <a:ext uri="{FF2B5EF4-FFF2-40B4-BE49-F238E27FC236}">
+                <a16:creationId xmlns:a16="http://schemas.microsoft.com/office/drawing/2014/main" id="{399F9235-35B4-6CC5-2915-C5587B47219C}"/>
+              </a:ext>
+            </a:extLst>
+          </p:cNvPr>
           <p:cNvSpPr/>
           <p:nvPr/>
         </p:nvSpPr>
         <p:spPr>
           <a:xfrm>
-            <a:off x="2970212" y="2244969"/>
-            <a:ext cx="2117798" cy="1139449"/>
-          </a:xfrm>
-          <a:prstGeom prst="rect">
-            <a:avLst/>
-          </a:prstGeom>
-          <a:solidFill>
-            <a:srgbClr val="F0D0F0"/>
-          </a:solidFill>
-          <a:ln w="6350">
-            <a:solidFill>
-              <a:srgbClr val="808080"/>
-            </a:solidFill>
-          </a:ln>
+            <a:off x="5859735" y="1189085"/>
+            <a:ext cx="1563627" cy="3496772"/>
+          </a:xfrm>
+          <a:prstGeom prst="rect">
+            <a:avLst/>
+          </a:prstGeom>
+          <a:noFill/>
+          <a:ln w="12700"/>
         </p:spPr>
         <p:style>
-          <a:lnRef idx="1">
-            <a:schemeClr val="accent1"/>
+          <a:lnRef idx="2">
+            <a:schemeClr val="accent1">
+              <a:shade val="15000"/>
+            </a:schemeClr>
           </a:lnRef>
-          <a:fillRef idx="3">
+          <a:fillRef idx="1">
             <a:schemeClr val="accent1"/>
           </a:fillRef>
-          <a:effectRef idx="2">
+          <a:effectRef idx="0">
             <a:schemeClr val="accent1"/>
           </a:effectRef>
           <a:fontRef idx="minor">
@@ -3242,28 +5527,303 @@
           </a:fontRef>
         </p:style>
         <p:txBody>
-          <a:bodyPr wrap="none" rtlCol="0" anchor="ctr"/>
+          <a:bodyPr rtlCol="0" anchor="ctr"/>
           <a:lstStyle/>
           <a:p>
             <a:pPr algn="ctr"/>
-            <a:r>
-              <a:rPr sz="1000" b="1">
-                <a:solidFill>
-                  <a:srgbClr val="333333"/>
-                </a:solidFill>
-              </a:rPr>
-              <a:t>D
-51×55 mm</a:t>
-            </a:r>
-          </a:p>
-        </p:txBody>
-      </p:sp>
-      <p:sp>
-        <p:nvSpPr>
-          <p:cNvPr id="12" name="fig1_E">
+            <a:endParaRPr lang="en-US" sz="2640"/>
+          </a:p>
+        </p:txBody>
+      </p:sp>
+    </p:spTree>
+    <p:extLst>
+      <p:ext uri="{BB962C8B-B14F-4D97-AF65-F5344CB8AC3E}">
+        <p14:creationId xmlns:p14="http://schemas.microsoft.com/office/powerpoint/2010/main" val="2984753816"/>
+      </p:ext>
+    </p:extLst>
+  </p:cSld>
+  <p:clrMapOvr>
+    <a:masterClrMapping/>
+  </p:clrMapOvr>
+</p:sld>
+</file>
+
+<file path=ppt/slides/slide5.xml><?xml version="1.0" encoding="utf-8"?>
+<p:sld xmlns:a="http://schemas.openxmlformats.org/drawingml/2006/main" xmlns:r="http://schemas.openxmlformats.org/officeDocument/2006/relationships" xmlns:p="http://schemas.openxmlformats.org/presentationml/2006/main">
+  <p:cSld>
+    <p:spTree>
+      <p:nvGrpSpPr>
+        <p:cNvPr id="1" name=""/>
+        <p:cNvGrpSpPr/>
+        <p:nvPr/>
+      </p:nvGrpSpPr>
+      <p:grpSpPr>
+        <a:xfrm>
+          <a:off x="0" y="0"/>
+          <a:ext cx="0" cy="0"/>
+          <a:chOff x="0" y="0"/>
+          <a:chExt cx="0" cy="0"/>
+        </a:xfrm>
+      </p:grpSpPr>
+      <p:pic>
+        <p:nvPicPr>
+          <p:cNvPr id="5" name="Picture 4">
             <a:extLst>
               <a:ext uri="{FF2B5EF4-FFF2-40B4-BE49-F238E27FC236}">
-                <a16:creationId xmlns:a16="http://schemas.microsoft.com/office/drawing/2014/main" id="{E23DCF68-356D-89E5-360E-0972F29F2B3D}"/>
+                <a16:creationId xmlns:a16="http://schemas.microsoft.com/office/drawing/2014/main" id="{60579976-3093-3C4F-807D-51C4F18332B1}"/>
+              </a:ext>
+            </a:extLst>
+          </p:cNvPr>
+          <p:cNvPicPr>
+            <a:picLocks noChangeAspect="1"/>
+          </p:cNvPicPr>
+          <p:nvPr/>
+        </p:nvPicPr>
+        <p:blipFill>
+          <a:blip r:embed="rId2"/>
+          <a:srcRect r="73453" b="72228"/>
+          <a:stretch>
+            <a:fillRect/>
+          </a:stretch>
+        </p:blipFill>
+        <p:spPr>
+          <a:xfrm>
+            <a:off x="95617" y="249665"/>
+            <a:ext cx="2954560" cy="1513040"/>
+          </a:xfrm>
+          <a:prstGeom prst="rect">
+            <a:avLst/>
+          </a:prstGeom>
+        </p:spPr>
+      </p:pic>
+      <p:pic>
+        <p:nvPicPr>
+          <p:cNvPr id="7" name="Picture 6">
+            <a:extLst>
+              <a:ext uri="{FF2B5EF4-FFF2-40B4-BE49-F238E27FC236}">
+                <a16:creationId xmlns:a16="http://schemas.microsoft.com/office/drawing/2014/main" id="{EA1412E5-172C-A208-9DA7-312D2A21423A}"/>
+              </a:ext>
+            </a:extLst>
+          </p:cNvPr>
+          <p:cNvPicPr>
+            <a:picLocks noChangeAspect="1"/>
+          </p:cNvPicPr>
+          <p:nvPr/>
+        </p:nvPicPr>
+        <p:blipFill>
+          <a:blip r:embed="rId2"/>
+          <a:srcRect l="51599" r="458" b="72228"/>
+          <a:stretch>
+            <a:fillRect/>
+          </a:stretch>
+        </p:blipFill>
+        <p:spPr>
+          <a:xfrm>
+            <a:off x="3233800" y="154106"/>
+            <a:ext cx="3126119" cy="1704157"/>
+          </a:xfrm>
+          <a:prstGeom prst="rect">
+            <a:avLst/>
+          </a:prstGeom>
+        </p:spPr>
+      </p:pic>
+      <p:pic>
+        <p:nvPicPr>
+          <p:cNvPr id="9" name="Picture 8">
+            <a:extLst>
+              <a:ext uri="{FF2B5EF4-FFF2-40B4-BE49-F238E27FC236}">
+                <a16:creationId xmlns:a16="http://schemas.microsoft.com/office/drawing/2014/main" id="{678ED9A4-37EC-0FE1-84A1-6CF4D93BA7CE}"/>
+              </a:ext>
+            </a:extLst>
+          </p:cNvPr>
+          <p:cNvPicPr>
+            <a:picLocks noChangeAspect="1"/>
+          </p:cNvPicPr>
+          <p:nvPr/>
+        </p:nvPicPr>
+        <p:blipFill>
+          <a:blip r:embed="rId2"/>
+          <a:srcRect l="51599" t="26799" r="15981" b="52282"/>
+          <a:stretch>
+            <a:fillRect/>
+          </a:stretch>
+        </p:blipFill>
+        <p:spPr>
+          <a:xfrm>
+            <a:off x="3233800" y="1698745"/>
+            <a:ext cx="1814994" cy="1478668"/>
+          </a:xfrm>
+          <a:prstGeom prst="rect">
+            <a:avLst/>
+          </a:prstGeom>
+        </p:spPr>
+      </p:pic>
+      <p:pic>
+        <p:nvPicPr>
+          <p:cNvPr id="11" name="Picture 10">
+            <a:extLst>
+              <a:ext uri="{FF2B5EF4-FFF2-40B4-BE49-F238E27FC236}">
+                <a16:creationId xmlns:a16="http://schemas.microsoft.com/office/drawing/2014/main" id="{53BDE978-9C1F-58F6-901C-0495B0A7AC7A}"/>
+              </a:ext>
+            </a:extLst>
+          </p:cNvPr>
+          <p:cNvPicPr>
+            <a:picLocks noChangeAspect="1"/>
+          </p:cNvPicPr>
+          <p:nvPr/>
+        </p:nvPicPr>
+        <p:blipFill>
+          <a:blip r:embed="rId2"/>
+          <a:srcRect l="894" t="28453" r="67136" b="53036"/>
+          <a:stretch>
+            <a:fillRect/>
+          </a:stretch>
+        </p:blipFill>
+        <p:spPr>
+          <a:xfrm>
+            <a:off x="210086" y="1762705"/>
+            <a:ext cx="1567220" cy="1308450"/>
+          </a:xfrm>
+          <a:prstGeom prst="rect">
+            <a:avLst/>
+          </a:prstGeom>
+        </p:spPr>
+      </p:pic>
+      <p:pic>
+        <p:nvPicPr>
+          <p:cNvPr id="13" name="Picture 12">
+            <a:extLst>
+              <a:ext uri="{FF2B5EF4-FFF2-40B4-BE49-F238E27FC236}">
+                <a16:creationId xmlns:a16="http://schemas.microsoft.com/office/drawing/2014/main" id="{42AFE248-205D-3609-E889-5A891712C0A5}"/>
+              </a:ext>
+              <a:ext uri="{C183D7F6-B498-43B3-948B-1728B52AA6E4}">
+                <adec:decorative xmlns:adec="http://schemas.microsoft.com/office/drawing/2017/decorative" val="1"/>
+              </a:ext>
+            </a:extLst>
+          </p:cNvPr>
+          <p:cNvPicPr>
+            <a:picLocks noChangeAspect="1"/>
+          </p:cNvPicPr>
+          <p:nvPr/>
+        </p:nvPicPr>
+        <p:blipFill>
+          <a:blip r:embed="rId3"/>
+          <a:srcRect l="73575" t="65896" r="356" b="990"/>
+          <a:stretch>
+            <a:fillRect/>
+          </a:stretch>
+        </p:blipFill>
+        <p:spPr>
+          <a:xfrm>
+            <a:off x="1792642" y="1818302"/>
+            <a:ext cx="1425822" cy="1423071"/>
+          </a:xfrm>
+          <a:prstGeom prst="rect">
+            <a:avLst/>
+          </a:prstGeom>
+        </p:spPr>
+      </p:pic>
+      <p:pic>
+        <p:nvPicPr>
+          <p:cNvPr id="15" name="Picture 14">
+            <a:extLst>
+              <a:ext uri="{FF2B5EF4-FFF2-40B4-BE49-F238E27FC236}">
+                <a16:creationId xmlns:a16="http://schemas.microsoft.com/office/drawing/2014/main" id="{C5875C78-6BBF-3750-ECFB-1E0C101CD9F1}"/>
+              </a:ext>
+              <a:ext uri="{C183D7F6-B498-43B3-948B-1728B52AA6E4}">
+                <adec:decorative xmlns:adec="http://schemas.microsoft.com/office/drawing/2017/decorative" val="1"/>
+              </a:ext>
+            </a:extLst>
+          </p:cNvPr>
+          <p:cNvPicPr>
+            <a:picLocks noChangeAspect="1"/>
+          </p:cNvPicPr>
+          <p:nvPr/>
+        </p:nvPicPr>
+        <p:blipFill>
+          <a:blip r:embed="rId3"/>
+          <a:srcRect l="73575" t="65896" r="356" b="990"/>
+          <a:stretch>
+            <a:fillRect/>
+          </a:stretch>
+        </p:blipFill>
+        <p:spPr>
+          <a:xfrm>
+            <a:off x="5011110" y="1840987"/>
+            <a:ext cx="1425822" cy="1423071"/>
+          </a:xfrm>
+          <a:prstGeom prst="rect">
+            <a:avLst/>
+          </a:prstGeom>
+        </p:spPr>
+      </p:pic>
+      <p:pic>
+        <p:nvPicPr>
+          <p:cNvPr id="17" name="Picture 16">
+            <a:extLst>
+              <a:ext uri="{FF2B5EF4-FFF2-40B4-BE49-F238E27FC236}">
+                <a16:creationId xmlns:a16="http://schemas.microsoft.com/office/drawing/2014/main" id="{03E720A0-359A-4BD7-6D48-A7DEA4078F27}"/>
+              </a:ext>
+            </a:extLst>
+          </p:cNvPr>
+          <p:cNvPicPr>
+            <a:picLocks noChangeAspect="1"/>
+          </p:cNvPicPr>
+          <p:nvPr/>
+        </p:nvPicPr>
+        <p:blipFill>
+          <a:blip r:embed="rId4"/>
+          <a:srcRect l="1" r="74268" b="48027"/>
+          <a:stretch>
+            <a:fillRect/>
+          </a:stretch>
+        </p:blipFill>
+        <p:spPr>
+          <a:xfrm>
+            <a:off x="95618" y="3219321"/>
+            <a:ext cx="1628680" cy="1704157"/>
+          </a:xfrm>
+          <a:prstGeom prst="rect">
+            <a:avLst/>
+          </a:prstGeom>
+        </p:spPr>
+      </p:pic>
+      <p:pic>
+        <p:nvPicPr>
+          <p:cNvPr id="19" name="Picture 18">
+            <a:extLst>
+              <a:ext uri="{FF2B5EF4-FFF2-40B4-BE49-F238E27FC236}">
+                <a16:creationId xmlns:a16="http://schemas.microsoft.com/office/drawing/2014/main" id="{4E27B7C4-94E9-F4E7-9ACB-D06E48377118}"/>
+              </a:ext>
+            </a:extLst>
+          </p:cNvPr>
+          <p:cNvPicPr>
+            <a:picLocks noChangeAspect="1"/>
+          </p:cNvPicPr>
+          <p:nvPr/>
+        </p:nvPicPr>
+        <p:blipFill>
+          <a:blip r:embed="rId5"/>
+          <a:stretch>
+            <a:fillRect/>
+          </a:stretch>
+        </p:blipFill>
+        <p:spPr>
+          <a:xfrm>
+            <a:off x="210085" y="4965386"/>
+            <a:ext cx="5798756" cy="3113991"/>
+          </a:xfrm>
+          <a:prstGeom prst="rect">
+            <a:avLst/>
+          </a:prstGeom>
+        </p:spPr>
+      </p:pic>
+      <p:sp>
+        <p:nvSpPr>
+          <p:cNvPr id="21" name="Rectangle 20">
+            <a:extLst>
+              <a:ext uri="{FF2B5EF4-FFF2-40B4-BE49-F238E27FC236}">
+                <a16:creationId xmlns:a16="http://schemas.microsoft.com/office/drawing/2014/main" id="{E682172D-4804-821B-9032-693804A487A1}"/>
               </a:ext>
             </a:extLst>
           </p:cNvPr>
@@ -3272,29 +5832,25 @@
         </p:nvSpPr>
         <p:spPr>
           <a:xfrm>
-            <a:off x="4339123" y="1536709"/>
-            <a:ext cx="748887" cy="671509"/>
-          </a:xfrm>
-          <a:prstGeom prst="rect">
-            <a:avLst/>
-          </a:prstGeom>
-          <a:solidFill>
-            <a:srgbClr val="D0F0E0"/>
-          </a:solidFill>
-          <a:ln w="6350">
-            <a:solidFill>
-              <a:srgbClr val="808080"/>
-            </a:solidFill>
-          </a:ln>
+            <a:off x="9575393" y="1870964"/>
+            <a:ext cx="2100654" cy="3489515"/>
+          </a:xfrm>
+          <a:prstGeom prst="rect">
+            <a:avLst/>
+          </a:prstGeom>
+          <a:noFill/>
+          <a:ln w="12700"/>
         </p:spPr>
         <p:style>
-          <a:lnRef idx="1">
-            <a:schemeClr val="accent1"/>
+          <a:lnRef idx="2">
+            <a:schemeClr val="accent1">
+              <a:shade val="15000"/>
+            </a:schemeClr>
           </a:lnRef>
-          <a:fillRef idx="3">
+          <a:fillRef idx="1">
             <a:schemeClr val="accent1"/>
           </a:fillRef>
-          <a:effectRef idx="2">
+          <a:effectRef idx="0">
             <a:schemeClr val="accent1"/>
           </a:effectRef>
           <a:fontRef idx="minor">
@@ -3302,28 +5858,20 @@
           </a:fontRef>
         </p:style>
         <p:txBody>
-          <a:bodyPr wrap="none" rtlCol="0" anchor="ctr"/>
+          <a:bodyPr rtlCol="0" anchor="ctr"/>
           <a:lstStyle/>
           <a:p>
             <a:pPr algn="ctr"/>
-            <a:r>
-              <a:rPr sz="1000" b="1" dirty="0">
-                <a:solidFill>
-                  <a:srgbClr val="333333"/>
-                </a:solidFill>
-              </a:rPr>
-              <a:t>B
-52×55 mm</a:t>
-            </a:r>
-          </a:p>
-        </p:txBody>
-      </p:sp>
-      <p:sp>
-        <p:nvSpPr>
-          <p:cNvPr id="10" name="fig1_D">
+            <a:endParaRPr lang="en-US" sz="2640"/>
+          </a:p>
+        </p:txBody>
+      </p:sp>
+      <p:sp>
+        <p:nvSpPr>
+          <p:cNvPr id="23" name="Rectangle 22">
             <a:extLst>
               <a:ext uri="{FF2B5EF4-FFF2-40B4-BE49-F238E27FC236}">
-                <a16:creationId xmlns:a16="http://schemas.microsoft.com/office/drawing/2014/main" id="{C741465E-251B-2D14-7AB8-017C5773C8AC}"/>
+                <a16:creationId xmlns:a16="http://schemas.microsoft.com/office/drawing/2014/main" id="{0634B715-16B4-0F8B-052B-B872B64588EE}"/>
               </a:ext>
             </a:extLst>
           </p:cNvPr>
@@ -3332,29 +5880,25 @@
         </p:nvSpPr>
         <p:spPr>
           <a:xfrm>
-            <a:off x="4339123" y="819608"/>
-            <a:ext cx="748887" cy="671509"/>
-          </a:xfrm>
-          <a:prstGeom prst="rect">
-            <a:avLst/>
-          </a:prstGeom>
-          <a:solidFill>
-            <a:srgbClr val="D0F0E0"/>
-          </a:solidFill>
-          <a:ln w="6350">
-            <a:solidFill>
-              <a:srgbClr val="808080"/>
-            </a:solidFill>
-          </a:ln>
+            <a:off x="11672706" y="1870963"/>
+            <a:ext cx="1563627" cy="3496772"/>
+          </a:xfrm>
+          <a:prstGeom prst="rect">
+            <a:avLst/>
+          </a:prstGeom>
+          <a:noFill/>
+          <a:ln w="12700"/>
         </p:spPr>
         <p:style>
-          <a:lnRef idx="1">
-            <a:schemeClr val="accent1"/>
+          <a:lnRef idx="2">
+            <a:schemeClr val="accent1">
+              <a:shade val="15000"/>
+            </a:schemeClr>
           </a:lnRef>
-          <a:fillRef idx="3">
+          <a:fillRef idx="1">
             <a:schemeClr val="accent1"/>
           </a:fillRef>
-          <a:effectRef idx="2">
+          <a:effectRef idx="0">
             <a:schemeClr val="accent1"/>
           </a:effectRef>
           <a:fontRef idx="minor">
@@ -3362,185 +5906,113 @@
           </a:fontRef>
         </p:style>
         <p:txBody>
-          <a:bodyPr wrap="none" rtlCol="0" anchor="ctr"/>
+          <a:bodyPr rtlCol="0" anchor="ctr"/>
           <a:lstStyle/>
           <a:p>
             <a:pPr algn="ctr"/>
-            <a:r>
-              <a:rPr sz="1000" b="1">
-                <a:solidFill>
-                  <a:srgbClr val="333333"/>
-                </a:solidFill>
-              </a:rPr>
-              <a:t>B
-52×55 mm</a:t>
-            </a:r>
-          </a:p>
-        </p:txBody>
-      </p:sp>
-      <p:sp>
-        <p:nvSpPr>
-          <p:cNvPr id="3" name="fig1_C"/>
-          <p:cNvSpPr/>
+            <a:endParaRPr lang="en-US" sz="2640"/>
+          </a:p>
+        </p:txBody>
+      </p:sp>
+      <p:pic>
+        <p:nvPicPr>
+          <p:cNvPr id="25" name="Picture 24">
+            <a:extLst>
+              <a:ext uri="{FF2B5EF4-FFF2-40B4-BE49-F238E27FC236}">
+                <a16:creationId xmlns:a16="http://schemas.microsoft.com/office/drawing/2014/main" id="{2AD0FA0D-DDA1-B98E-D70E-0B1F8B41DD43}"/>
+              </a:ext>
+            </a:extLst>
+          </p:cNvPr>
+          <p:cNvPicPr>
+            <a:picLocks noChangeAspect="1"/>
+          </p:cNvPicPr>
           <p:nvPr/>
-        </p:nvSpPr>
-        <p:spPr>
-          <a:xfrm>
-            <a:off x="4339123" y="60138"/>
-            <a:ext cx="748887" cy="713878"/>
-          </a:xfrm>
-          <a:prstGeom prst="rect">
-            <a:avLst/>
-          </a:prstGeom>
-          <a:solidFill>
-            <a:srgbClr val="D0F0E0"/>
-          </a:solidFill>
-          <a:ln w="6350">
-            <a:solidFill>
-              <a:srgbClr val="808080"/>
-            </a:solidFill>
-          </a:ln>
-        </p:spPr>
-        <p:style>
-          <a:lnRef idx="1">
-            <a:schemeClr val="accent1"/>
-          </a:lnRef>
-          <a:fillRef idx="3">
-            <a:schemeClr val="accent1"/>
-          </a:fillRef>
-          <a:effectRef idx="2">
-            <a:schemeClr val="accent1"/>
-          </a:effectRef>
-          <a:fontRef idx="minor">
-            <a:schemeClr val="lt1"/>
-          </a:fontRef>
-        </p:style>
-        <p:txBody>
-          <a:bodyPr wrap="none" rtlCol="0" anchor="ctr"/>
-          <a:lstStyle/>
-          <a:p>
-            <a:pPr algn="ctr"/>
-            <a:r>
-              <a:rPr sz="1000" b="1">
-                <a:solidFill>
-                  <a:srgbClr val="333333"/>
-                </a:solidFill>
-              </a:rPr>
-              <a:t>B
-52×55 mm</a:t>
-            </a:r>
-          </a:p>
-        </p:txBody>
-      </p:sp>
-      <p:sp>
-        <p:nvSpPr>
-          <p:cNvPr id="4" name="fig1_B"/>
-          <p:cNvSpPr/>
+        </p:nvPicPr>
+        <p:blipFill>
+          <a:blip r:embed="rId4"/>
+          <a:srcRect l="25757" t="51011" r="49397"/>
+          <a:stretch>
+            <a:fillRect/>
+          </a:stretch>
+        </p:blipFill>
+        <p:spPr>
+          <a:xfrm>
+            <a:off x="5048794" y="3350704"/>
+            <a:ext cx="1572619" cy="1606321"/>
+          </a:xfrm>
+          <a:prstGeom prst="rect">
+            <a:avLst/>
+          </a:prstGeom>
+        </p:spPr>
+      </p:pic>
+      <p:pic>
+        <p:nvPicPr>
+          <p:cNvPr id="27" name="Picture 26">
+            <a:extLst>
+              <a:ext uri="{FF2B5EF4-FFF2-40B4-BE49-F238E27FC236}">
+                <a16:creationId xmlns:a16="http://schemas.microsoft.com/office/drawing/2014/main" id="{EAD88213-17B9-EE3C-85FF-C64F27F4AA4D}"/>
+              </a:ext>
+            </a:extLst>
+          </p:cNvPr>
+          <p:cNvPicPr>
+            <a:picLocks noChangeAspect="1"/>
+          </p:cNvPicPr>
           <p:nvPr/>
-        </p:nvSpPr>
-        <p:spPr>
-          <a:xfrm>
-            <a:off x="645012" y="2244969"/>
-            <a:ext cx="2265131" cy="3276697"/>
-          </a:xfrm>
-          <a:prstGeom prst="rect">
-            <a:avLst/>
-          </a:prstGeom>
-          <a:solidFill>
-            <a:srgbClr val="F5E8D0"/>
-          </a:solidFill>
-          <a:ln w="6350">
-            <a:solidFill>
-              <a:srgbClr val="808080"/>
-            </a:solidFill>
-          </a:ln>
-        </p:spPr>
-        <p:style>
-          <a:lnRef idx="1">
-            <a:schemeClr val="accent1"/>
-          </a:lnRef>
-          <a:fillRef idx="3">
-            <a:schemeClr val="accent1"/>
-          </a:fillRef>
-          <a:effectRef idx="2">
-            <a:schemeClr val="accent1"/>
-          </a:effectRef>
-          <a:fontRef idx="minor">
-            <a:schemeClr val="lt1"/>
-          </a:fontRef>
-        </p:style>
-        <p:txBody>
-          <a:bodyPr wrap="none" rtlCol="0" anchor="ctr"/>
-          <a:lstStyle/>
-          <a:p>
-            <a:pPr algn="ctr"/>
-            <a:r>
-              <a:rPr sz="1000" b="1">
-                <a:solidFill>
-                  <a:srgbClr val="333333"/>
-                </a:solidFill>
-              </a:rPr>
-              <a:t>C
-52×55 mm</a:t>
-            </a:r>
-          </a:p>
-        </p:txBody>
-      </p:sp>
-      <p:sp>
-        <p:nvSpPr>
-          <p:cNvPr id="2" name="fig1_A"/>
-          <p:cNvSpPr/>
+        </p:nvPicPr>
+        <p:blipFill>
+          <a:blip r:embed="rId4"/>
+          <a:srcRect t="51011" r="74278"/>
+          <a:stretch>
+            <a:fillRect/>
+          </a:stretch>
+        </p:blipFill>
+        <p:spPr>
+          <a:xfrm>
+            <a:off x="1739644" y="3359065"/>
+            <a:ext cx="1628059" cy="1606321"/>
+          </a:xfrm>
+          <a:prstGeom prst="rect">
+            <a:avLst/>
+          </a:prstGeom>
+        </p:spPr>
+      </p:pic>
+      <p:pic>
+        <p:nvPicPr>
+          <p:cNvPr id="29" name="Picture 28">
+            <a:extLst>
+              <a:ext uri="{FF2B5EF4-FFF2-40B4-BE49-F238E27FC236}">
+                <a16:creationId xmlns:a16="http://schemas.microsoft.com/office/drawing/2014/main" id="{E7F703BF-8956-CD72-F7F2-9ED6EB33E977}"/>
+              </a:ext>
+            </a:extLst>
+          </p:cNvPr>
+          <p:cNvPicPr>
+            <a:picLocks noChangeAspect="1"/>
+          </p:cNvPicPr>
           <p:nvPr/>
-        </p:nvSpPr>
-        <p:spPr>
-          <a:xfrm>
-            <a:off x="645013" y="60137"/>
-            <a:ext cx="3650012" cy="2148081"/>
-          </a:xfrm>
-          <a:prstGeom prst="rect">
-            <a:avLst/>
-          </a:prstGeom>
-          <a:solidFill>
-            <a:srgbClr val="D0E8F5"/>
-          </a:solidFill>
-          <a:ln w="6350">
-            <a:solidFill>
-              <a:srgbClr val="808080"/>
-            </a:solidFill>
-          </a:ln>
-        </p:spPr>
-        <p:style>
-          <a:lnRef idx="1">
-            <a:schemeClr val="accent1"/>
-          </a:lnRef>
-          <a:fillRef idx="3">
-            <a:schemeClr val="accent1"/>
-          </a:fillRef>
-          <a:effectRef idx="2">
-            <a:schemeClr val="accent1"/>
-          </a:effectRef>
-          <a:fontRef idx="minor">
-            <a:schemeClr val="lt1"/>
-          </a:fontRef>
-        </p:style>
-        <p:txBody>
-          <a:bodyPr wrap="none" rtlCol="0" anchor="ctr"/>
-          <a:lstStyle/>
-          <a:p>
-            <a:pPr algn="ctr"/>
-            <a:r>
-              <a:rPr sz="1000" b="1" dirty="0">
-                <a:solidFill>
-                  <a:srgbClr val="333333"/>
-                </a:solidFill>
-              </a:rPr>
-              <a:t>A
-165×38 mm</a:t>
-            </a:r>
-          </a:p>
-        </p:txBody>
-      </p:sp>
+        </p:nvPicPr>
+        <p:blipFill>
+          <a:blip r:embed="rId4"/>
+          <a:srcRect l="25321" r="49834" b="48027"/>
+          <a:stretch>
+            <a:fillRect/>
+          </a:stretch>
+        </p:blipFill>
+        <p:spPr>
+          <a:xfrm>
+            <a:off x="3421939" y="3219320"/>
+            <a:ext cx="1572619" cy="1704157"/>
+          </a:xfrm>
+          <a:prstGeom prst="rect">
+            <a:avLst/>
+          </a:prstGeom>
+        </p:spPr>
+      </p:pic>
     </p:spTree>
+    <p:extLst>
+      <p:ext uri="{BB962C8B-B14F-4D97-AF65-F5344CB8AC3E}">
+        <p14:creationId xmlns:p14="http://schemas.microsoft.com/office/powerpoint/2010/main" val="1432069628"/>
+      </p:ext>
+    </p:extLst>
   </p:cSld>
   <p:clrMapOvr>
     <a:masterClrMapping/>
@@ -3551,7 +6023,7 @@
 <file path=ppt/theme/theme1.xml><?xml version="1.0" encoding="utf-8"?>
 <a:theme xmlns:a="http://schemas.openxmlformats.org/drawingml/2006/main" name="Office Theme">
   <a:themeElements>
-    <a:clrScheme name="Office">
+    <a:clrScheme name="Office Theme">
       <a:dk1>
         <a:sysClr val="windowText" lastClr="000000"/>
       </a:dk1>
@@ -3559,44 +6031,44 @@
         <a:sysClr val="window" lastClr="FFFFFF"/>
       </a:lt1>
       <a:dk2>
-        <a:srgbClr val="1F497D"/>
+        <a:srgbClr val="0E2841"/>
       </a:dk2>
       <a:lt2>
-        <a:srgbClr val="EEECE1"/>
+        <a:srgbClr val="E8E8E8"/>
       </a:lt2>
       <a:accent1>
-        <a:srgbClr val="4F81BD"/>
+        <a:srgbClr val="156082"/>
       </a:accent1>
       <a:accent2>
-        <a:srgbClr val="C0504D"/>
+        <a:srgbClr val="E97132"/>
       </a:accent2>
       <a:accent3>
-        <a:srgbClr val="9BBB59"/>
+        <a:srgbClr val="196B24"/>
       </a:accent3>
       <a:accent4>
-        <a:srgbClr val="8064A2"/>
+        <a:srgbClr val="0F9ED5"/>
       </a:accent4>
       <a:accent5>
-        <a:srgbClr val="4BACC6"/>
+        <a:srgbClr val="A02B93"/>
       </a:accent5>
       <a:accent6>
-        <a:srgbClr val="F79646"/>
+        <a:srgbClr val="4EA72E"/>
       </a:accent6>
       <a:hlink>
-        <a:srgbClr val="0000FF"/>
+        <a:srgbClr val="467886"/>
       </a:hlink>
       <a:folHlink>
-        <a:srgbClr val="800080"/>
+        <a:srgbClr val="96607D"/>
       </a:folHlink>
     </a:clrScheme>
-    <a:fontScheme name="Office">
+    <a:fontScheme name="Office Theme">
       <a:majorFont>
-        <a:latin typeface="Calibri"/>
+        <a:latin typeface="Aptos Display" panose="02110004020202020204"/>
         <a:ea typeface=""/>
         <a:cs typeface=""/>
-        <a:font script="Jpan" typeface="ＭＳ Ｐゴシック"/>
+        <a:font script="Jpan" typeface="游ゴシック Light"/>
         <a:font script="Hang" typeface="맑은 고딕"/>
-        <a:font script="Hans" typeface="宋体"/>
+        <a:font script="Hans" typeface="等线 Light"/>
         <a:font script="Hant" typeface="新細明體"/>
         <a:font script="Arab" typeface="Times New Roman"/>
         <a:font script="Hebr" typeface="Times New Roman"/>
@@ -3624,14 +6096,31 @@
         <a:font script="Viet" typeface="Times New Roman"/>
         <a:font script="Uigh" typeface="Microsoft Uighur"/>
         <a:font script="Geor" typeface="Sylfaen"/>
+        <a:font script="Armn" typeface="Arial"/>
+        <a:font script="Bugi" typeface="Leelawadee UI"/>
+        <a:font script="Bopo" typeface="Microsoft JhengHei"/>
+        <a:font script="Java" typeface="Javanese Text"/>
+        <a:font script="Lisu" typeface="Segoe UI"/>
+        <a:font script="Mymr" typeface="Myanmar Text"/>
+        <a:font script="Nkoo" typeface="Ebrima"/>
+        <a:font script="Olck" typeface="Nirmala UI"/>
+        <a:font script="Osma" typeface="Ebrima"/>
+        <a:font script="Phag" typeface="Phagspa"/>
+        <a:font script="Syrn" typeface="Estrangelo Edessa"/>
+        <a:font script="Syrj" typeface="Estrangelo Edessa"/>
+        <a:font script="Syre" typeface="Estrangelo Edessa"/>
+        <a:font script="Sora" typeface="Nirmala UI"/>
+        <a:font script="Tale" typeface="Microsoft Tai Le"/>
+        <a:font script="Talu" typeface="Microsoft New Tai Lue"/>
+        <a:font script="Tfng" typeface="Ebrima"/>
       </a:majorFont>
       <a:minorFont>
-        <a:latin typeface="Calibri"/>
+        <a:latin typeface="Aptos" panose="02110004020202020204"/>
         <a:ea typeface=""/>
         <a:cs typeface=""/>
-        <a:font script="Jpan" typeface="ＭＳ Ｐゴシック"/>
+        <a:font script="Jpan" typeface="游ゴシック"/>
         <a:font script="Hang" typeface="맑은 고딕"/>
-        <a:font script="Hans" typeface="宋体"/>
+        <a:font script="Hans" typeface="等线"/>
         <a:font script="Hant" typeface="新細明體"/>
         <a:font script="Arab" typeface="Arial"/>
         <a:font script="Hebr" typeface="Arial"/>
@@ -3659,9 +6148,26 @@
         <a:font script="Viet" typeface="Arial"/>
         <a:font script="Uigh" typeface="Microsoft Uighur"/>
         <a:font script="Geor" typeface="Sylfaen"/>
+        <a:font script="Armn" typeface="Arial"/>
+        <a:font script="Bugi" typeface="Leelawadee UI"/>
+        <a:font script="Bopo" typeface="Microsoft JhengHei"/>
+        <a:font script="Java" typeface="Javanese Text"/>
+        <a:font script="Lisu" typeface="Segoe UI"/>
+        <a:font script="Mymr" typeface="Myanmar Text"/>
+        <a:font script="Nkoo" typeface="Ebrima"/>
+        <a:font script="Olck" typeface="Nirmala UI"/>
+        <a:font script="Osma" typeface="Ebrima"/>
+        <a:font script="Phag" typeface="Phagspa"/>
+        <a:font script="Syrn" typeface="Estrangelo Edessa"/>
+        <a:font script="Syrj" typeface="Estrangelo Edessa"/>
+        <a:font script="Syre" typeface="Estrangelo Edessa"/>
+        <a:font script="Sora" typeface="Nirmala UI"/>
+        <a:font script="Tale" typeface="Microsoft Tai Le"/>
+        <a:font script="Talu" typeface="Microsoft New Tai Lue"/>
+        <a:font script="Tfng" typeface="Ebrima"/>
       </a:minorFont>
     </a:fontScheme>
-    <a:fmtScheme name="Office">
+    <a:fmtScheme name="Office Theme">
       <a:fillStyleLst>
         <a:solidFill>
           <a:schemeClr val="phClr"/>
@@ -3670,180 +6176,136 @@
           <a:gsLst>
             <a:gs pos="0">
               <a:schemeClr val="phClr">
-                <a:tint val="50000"/>
-                <a:satMod val="300000"/>
+                <a:lumMod val="110000"/>
+                <a:satMod val="105000"/>
+                <a:tint val="67000"/>
               </a:schemeClr>
             </a:gs>
-            <a:gs pos="35000">
+            <a:gs pos="50000">
               <a:schemeClr val="phClr">
-                <a:tint val="37000"/>
-                <a:satMod val="300000"/>
+                <a:lumMod val="105000"/>
+                <a:satMod val="103000"/>
+                <a:tint val="73000"/>
               </a:schemeClr>
             </a:gs>
             <a:gs pos="100000">
               <a:schemeClr val="phClr">
-                <a:tint val="15000"/>
-                <a:satMod val="350000"/>
+                <a:lumMod val="105000"/>
+                <a:satMod val="109000"/>
+                <a:tint val="81000"/>
               </a:schemeClr>
             </a:gs>
           </a:gsLst>
-          <a:lin ang="16200000" scaled="1"/>
+          <a:lin ang="5400000" scaled="0"/>
         </a:gradFill>
         <a:gradFill rotWithShape="1">
           <a:gsLst>
             <a:gs pos="0">
               <a:schemeClr val="phClr">
-                <a:tint val="100000"/>
+                <a:satMod val="103000"/>
+                <a:lumMod val="102000"/>
+                <a:tint val="94000"/>
+              </a:schemeClr>
+            </a:gs>
+            <a:gs pos="50000">
+              <a:schemeClr val="phClr">
+                <a:satMod val="110000"/>
+                <a:lumMod val="100000"/>
                 <a:shade val="100000"/>
-                <a:satMod val="130000"/>
               </a:schemeClr>
             </a:gs>
             <a:gs pos="100000">
               <a:schemeClr val="phClr">
-                <a:tint val="50000"/>
-                <a:shade val="100000"/>
-                <a:satMod val="350000"/>
+                <a:lumMod val="99000"/>
+                <a:satMod val="120000"/>
+                <a:shade val="78000"/>
               </a:schemeClr>
             </a:gs>
           </a:gsLst>
-          <a:lin ang="16200000" scaled="0"/>
+          <a:lin ang="5400000" scaled="0"/>
         </a:gradFill>
       </a:fillStyleLst>
       <a:lnStyleLst>
-        <a:ln w="9525" cap="flat" cmpd="sng" algn="ctr">
+        <a:ln w="12700" cap="flat" cmpd="sng" algn="ctr">
           <a:solidFill>
-            <a:schemeClr val="phClr">
-              <a:shade val="95000"/>
-              <a:satMod val="105000"/>
-            </a:schemeClr>
+            <a:schemeClr val="phClr"/>
           </a:solidFill>
           <a:prstDash val="solid"/>
+          <a:miter lim="800000"/>
+        </a:ln>
+        <a:ln w="19050" cap="flat" cmpd="sng" algn="ctr">
+          <a:solidFill>
+            <a:schemeClr val="phClr"/>
+          </a:solidFill>
+          <a:prstDash val="solid"/>
+          <a:miter lim="800000"/>
         </a:ln>
         <a:ln w="25400" cap="flat" cmpd="sng" algn="ctr">
           <a:solidFill>
             <a:schemeClr val="phClr"/>
           </a:solidFill>
           <a:prstDash val="solid"/>
-        </a:ln>
-        <a:ln w="38100" cap="flat" cmpd="sng" algn="ctr">
-          <a:solidFill>
-            <a:schemeClr val="phClr"/>
-          </a:solidFill>
-          <a:prstDash val="solid"/>
+          <a:miter lim="800000"/>
         </a:ln>
       </a:lnStyleLst>
       <a:effectStyleLst>
         <a:effectStyle>
+          <a:effectLst/>
+        </a:effectStyle>
+        <a:effectStyle>
+          <a:effectLst/>
+        </a:effectStyle>
+        <a:effectStyle>
           <a:effectLst>
-            <a:outerShdw blurRad="40000" dist="20000" dir="5400000" rotWithShape="0">
+            <a:outerShdw blurRad="57150" dist="19050" dir="5400000" algn="ctr" rotWithShape="0">
               <a:srgbClr val="000000">
-                <a:alpha val="38000"/>
+                <a:alpha val="63000"/>
               </a:srgbClr>
             </a:outerShdw>
           </a:effectLst>
-        </a:effectStyle>
-        <a:effectStyle>
-          <a:effectLst>
-            <a:outerShdw blurRad="40000" dist="23000" dir="5400000" rotWithShape="0">
-              <a:srgbClr val="000000">
-                <a:alpha val="35000"/>
-              </a:srgbClr>
-            </a:outerShdw>
-          </a:effectLst>
-        </a:effectStyle>
-        <a:effectStyle>
-          <a:effectLst>
-            <a:outerShdw blurRad="40000" dist="23000" dir="5400000" rotWithShape="0">
-              <a:srgbClr val="000000">
-                <a:alpha val="35000"/>
-              </a:srgbClr>
-            </a:outerShdw>
-          </a:effectLst>
-          <a:scene3d>
-            <a:camera prst="orthographicFront">
-              <a:rot lat="0" lon="0" rev="0"/>
-            </a:camera>
-            <a:lightRig rig="threePt" dir="t">
-              <a:rot lat="0" lon="0" rev="1200000"/>
-            </a:lightRig>
-          </a:scene3d>
-          <a:sp3d>
-            <a:bevelT w="63500" h="25400"/>
-          </a:sp3d>
         </a:effectStyle>
       </a:effectStyleLst>
       <a:bgFillStyleLst>
         <a:solidFill>
           <a:schemeClr val="phClr"/>
         </a:solidFill>
+        <a:solidFill>
+          <a:schemeClr val="phClr">
+            <a:tint val="95000"/>
+            <a:satMod val="170000"/>
+          </a:schemeClr>
+        </a:solidFill>
         <a:gradFill rotWithShape="1">
           <a:gsLst>
             <a:gs pos="0">
               <a:schemeClr val="phClr">
-                <a:tint val="40000"/>
-                <a:satMod val="350000"/>
+                <a:tint val="93000"/>
+                <a:satMod val="150000"/>
+                <a:shade val="98000"/>
+                <a:lumMod val="102000"/>
               </a:schemeClr>
             </a:gs>
-            <a:gs pos="40000">
+            <a:gs pos="50000">
               <a:schemeClr val="phClr">
-                <a:tint val="45000"/>
-                <a:shade val="99000"/>
-                <a:satMod val="350000"/>
+                <a:tint val="98000"/>
+                <a:satMod val="130000"/>
+                <a:shade val="90000"/>
+                <a:lumMod val="103000"/>
               </a:schemeClr>
             </a:gs>
             <a:gs pos="100000">
               <a:schemeClr val="phClr">
-                <a:shade val="20000"/>
-                <a:satMod val="255000"/>
+                <a:shade val="63000"/>
+                <a:satMod val="120000"/>
               </a:schemeClr>
             </a:gs>
           </a:gsLst>
-          <a:path path="circle">
-            <a:fillToRect l="50000" t="-80000" r="50000" b="180000"/>
-          </a:path>
-        </a:gradFill>
-        <a:gradFill rotWithShape="1">
-          <a:gsLst>
-            <a:gs pos="0">
-              <a:schemeClr val="phClr">
-                <a:tint val="80000"/>
-                <a:satMod val="300000"/>
-              </a:schemeClr>
-            </a:gs>
-            <a:gs pos="100000">
-              <a:schemeClr val="phClr">
-                <a:shade val="30000"/>
-                <a:satMod val="200000"/>
-              </a:schemeClr>
-            </a:gs>
-          </a:gsLst>
-          <a:path path="circle">
-            <a:fillToRect l="50000" t="50000" r="50000" b="50000"/>
-          </a:path>
+          <a:lin ang="5400000" scaled="0"/>
         </a:gradFill>
       </a:bgFillStyleLst>
     </a:fmtScheme>
   </a:themeElements>
   <a:objectDefaults>
-    <a:spDef>
-      <a:spPr/>
-      <a:bodyPr/>
-      <a:lstStyle/>
-      <a:style>
-        <a:lnRef idx="1">
-          <a:schemeClr val="accent1"/>
-        </a:lnRef>
-        <a:fillRef idx="3">
-          <a:schemeClr val="accent1"/>
-        </a:fillRef>
-        <a:effectRef idx="2">
-          <a:schemeClr val="accent1"/>
-        </a:effectRef>
-        <a:fontRef idx="minor">
-          <a:schemeClr val="lt1"/>
-        </a:fontRef>
-      </a:style>
-    </a:spDef>
     <a:lnDef>
       <a:spPr/>
       <a:bodyPr/>
@@ -3865,5 +6327,325 @@
     </a:lnDef>
   </a:objectDefaults>
   <a:extraClrSchemeLst/>
+  <a:extLst>
+    <a:ext uri="{05A4C25C-085E-4340-85A3-A5531E510DB2}">
+      <thm15:themeFamily xmlns:thm15="http://schemas.microsoft.com/office/thememl/2012/main" name="Office Theme" id="{2E142A2C-CD16-42D6-873A-C26D2A0506FA}" vid="{1BDDFF52-6CD6-40A5-AB3C-68EB2F1E4D0A}"/>
+    </a:ext>
+  </a:extLst>
+</a:theme>
+</file>
+
+<file path=ppt/theme/theme2.xml><?xml version="1.0" encoding="utf-8"?>
+<a:theme xmlns:a="http://schemas.openxmlformats.org/drawingml/2006/main" name="Office Theme">
+  <a:themeElements>
+    <a:clrScheme name="Office">
+      <a:dk1>
+        <a:sysClr val="windowText" lastClr="000000"/>
+      </a:dk1>
+      <a:lt1>
+        <a:sysClr val="window" lastClr="FFFFFF"/>
+      </a:lt1>
+      <a:dk2>
+        <a:srgbClr val="0E2841"/>
+      </a:dk2>
+      <a:lt2>
+        <a:srgbClr val="E8E8E8"/>
+      </a:lt2>
+      <a:accent1>
+        <a:srgbClr val="156082"/>
+      </a:accent1>
+      <a:accent2>
+        <a:srgbClr val="E97132"/>
+      </a:accent2>
+      <a:accent3>
+        <a:srgbClr val="196B24"/>
+      </a:accent3>
+      <a:accent4>
+        <a:srgbClr val="0F9ED5"/>
+      </a:accent4>
+      <a:accent5>
+        <a:srgbClr val="A02B93"/>
+      </a:accent5>
+      <a:accent6>
+        <a:srgbClr val="4EA72E"/>
+      </a:accent6>
+      <a:hlink>
+        <a:srgbClr val="467886"/>
+      </a:hlink>
+      <a:folHlink>
+        <a:srgbClr val="96607D"/>
+      </a:folHlink>
+    </a:clrScheme>
+    <a:fontScheme name="Office">
+      <a:majorFont>
+        <a:latin typeface="Aptos Display" panose="02110004020202020204"/>
+        <a:ea typeface=""/>
+        <a:cs typeface=""/>
+        <a:font script="Jpan" typeface="游ゴシック Light"/>
+        <a:font script="Hang" typeface="맑은 고딕"/>
+        <a:font script="Hans" typeface="等线 Light"/>
+        <a:font script="Hant" typeface="新細明體"/>
+        <a:font script="Arab" typeface="Times New Roman"/>
+        <a:font script="Hebr" typeface="Times New Roman"/>
+        <a:font script="Thai" typeface="Angsana New"/>
+        <a:font script="Ethi" typeface="Nyala"/>
+        <a:font script="Beng" typeface="Vrinda"/>
+        <a:font script="Gujr" typeface="Shruti"/>
+        <a:font script="Khmr" typeface="MoolBoran"/>
+        <a:font script="Knda" typeface="Tunga"/>
+        <a:font script="Guru" typeface="Raavi"/>
+        <a:font script="Cans" typeface="Euphemia"/>
+        <a:font script="Cher" typeface="Plantagenet Cherokee"/>
+        <a:font script="Yiii" typeface="Microsoft Yi Baiti"/>
+        <a:font script="Tibt" typeface="Microsoft Himalaya"/>
+        <a:font script="Thaa" typeface="MV Boli"/>
+        <a:font script="Deva" typeface="Mangal"/>
+        <a:font script="Telu" typeface="Gautami"/>
+        <a:font script="Taml" typeface="Latha"/>
+        <a:font script="Syrc" typeface="Estrangelo Edessa"/>
+        <a:font script="Orya" typeface="Kalinga"/>
+        <a:font script="Mlym" typeface="Kartika"/>
+        <a:font script="Laoo" typeface="DokChampa"/>
+        <a:font script="Sinh" typeface="Iskoola Pota"/>
+        <a:font script="Mong" typeface="Mongolian Baiti"/>
+        <a:font script="Viet" typeface="Times New Roman"/>
+        <a:font script="Uigh" typeface="Microsoft Uighur"/>
+        <a:font script="Geor" typeface="Sylfaen"/>
+        <a:font script="Armn" typeface="Arial"/>
+        <a:font script="Bugi" typeface="Leelawadee UI"/>
+        <a:font script="Bopo" typeface="Microsoft JhengHei"/>
+        <a:font script="Java" typeface="Javanese Text"/>
+        <a:font script="Lisu" typeface="Segoe UI"/>
+        <a:font script="Mymr" typeface="Myanmar Text"/>
+        <a:font script="Nkoo" typeface="Ebrima"/>
+        <a:font script="Olck" typeface="Nirmala UI"/>
+        <a:font script="Osma" typeface="Ebrima"/>
+        <a:font script="Phag" typeface="Phagspa"/>
+        <a:font script="Syrn" typeface="Estrangelo Edessa"/>
+        <a:font script="Syrj" typeface="Estrangelo Edessa"/>
+        <a:font script="Syre" typeface="Estrangelo Edessa"/>
+        <a:font script="Sora" typeface="Nirmala UI"/>
+        <a:font script="Tale" typeface="Microsoft Tai Le"/>
+        <a:font script="Talu" typeface="Microsoft New Tai Lue"/>
+        <a:font script="Tfng" typeface="Ebrima"/>
+      </a:majorFont>
+      <a:minorFont>
+        <a:latin typeface="Aptos" panose="02110004020202020204"/>
+        <a:ea typeface=""/>
+        <a:cs typeface=""/>
+        <a:font script="Jpan" typeface="游ゴシック"/>
+        <a:font script="Hang" typeface="맑은 고딕"/>
+        <a:font script="Hans" typeface="等线"/>
+        <a:font script="Hant" typeface="新細明體"/>
+        <a:font script="Arab" typeface="Arial"/>
+        <a:font script="Hebr" typeface="Arial"/>
+        <a:font script="Thai" typeface="Cordia New"/>
+        <a:font script="Ethi" typeface="Nyala"/>
+        <a:font script="Beng" typeface="Vrinda"/>
+        <a:font script="Gujr" typeface="Shruti"/>
+        <a:font script="Khmr" typeface="DaunPenh"/>
+        <a:font script="Knda" typeface="Tunga"/>
+        <a:font script="Guru" typeface="Raavi"/>
+        <a:font script="Cans" typeface="Euphemia"/>
+        <a:font script="Cher" typeface="Plantagenet Cherokee"/>
+        <a:font script="Yiii" typeface="Microsoft Yi Baiti"/>
+        <a:font script="Tibt" typeface="Microsoft Himalaya"/>
+        <a:font script="Thaa" typeface="MV Boli"/>
+        <a:font script="Deva" typeface="Mangal"/>
+        <a:font script="Telu" typeface="Gautami"/>
+        <a:font script="Taml" typeface="Latha"/>
+        <a:font script="Syrc" typeface="Estrangelo Edessa"/>
+        <a:font script="Orya" typeface="Kalinga"/>
+        <a:font script="Mlym" typeface="Kartika"/>
+        <a:font script="Laoo" typeface="DokChampa"/>
+        <a:font script="Sinh" typeface="Iskoola Pota"/>
+        <a:font script="Mong" typeface="Mongolian Baiti"/>
+        <a:font script="Viet" typeface="Arial"/>
+        <a:font script="Uigh" typeface="Microsoft Uighur"/>
+        <a:font script="Geor" typeface="Sylfaen"/>
+        <a:font script="Armn" typeface="Arial"/>
+        <a:font script="Bugi" typeface="Leelawadee UI"/>
+        <a:font script="Bopo" typeface="Microsoft JhengHei"/>
+        <a:font script="Java" typeface="Javanese Text"/>
+        <a:font script="Lisu" typeface="Segoe UI"/>
+        <a:font script="Mymr" typeface="Myanmar Text"/>
+        <a:font script="Nkoo" typeface="Ebrima"/>
+        <a:font script="Olck" typeface="Nirmala UI"/>
+        <a:font script="Osma" typeface="Ebrima"/>
+        <a:font script="Phag" typeface="Phagspa"/>
+        <a:font script="Syrn" typeface="Estrangelo Edessa"/>
+        <a:font script="Syrj" typeface="Estrangelo Edessa"/>
+        <a:font script="Syre" typeface="Estrangelo Edessa"/>
+        <a:font script="Sora" typeface="Nirmala UI"/>
+        <a:font script="Tale" typeface="Microsoft Tai Le"/>
+        <a:font script="Talu" typeface="Microsoft New Tai Lue"/>
+        <a:font script="Tfng" typeface="Ebrima"/>
+      </a:minorFont>
+    </a:fontScheme>
+    <a:fmtScheme name="Office">
+      <a:fillStyleLst>
+        <a:solidFill>
+          <a:schemeClr val="phClr"/>
+        </a:solidFill>
+        <a:gradFill rotWithShape="1">
+          <a:gsLst>
+            <a:gs pos="0">
+              <a:schemeClr val="phClr">
+                <a:lumMod val="110000"/>
+                <a:satMod val="105000"/>
+                <a:tint val="67000"/>
+              </a:schemeClr>
+            </a:gs>
+            <a:gs pos="50000">
+              <a:schemeClr val="phClr">
+                <a:lumMod val="105000"/>
+                <a:satMod val="103000"/>
+                <a:tint val="73000"/>
+              </a:schemeClr>
+            </a:gs>
+            <a:gs pos="100000">
+              <a:schemeClr val="phClr">
+                <a:lumMod val="105000"/>
+                <a:satMod val="109000"/>
+                <a:tint val="81000"/>
+              </a:schemeClr>
+            </a:gs>
+          </a:gsLst>
+          <a:lin ang="5400000" scaled="0"/>
+        </a:gradFill>
+        <a:gradFill rotWithShape="1">
+          <a:gsLst>
+            <a:gs pos="0">
+              <a:schemeClr val="phClr">
+                <a:satMod val="103000"/>
+                <a:lumMod val="102000"/>
+                <a:tint val="94000"/>
+              </a:schemeClr>
+            </a:gs>
+            <a:gs pos="50000">
+              <a:schemeClr val="phClr">
+                <a:satMod val="110000"/>
+                <a:lumMod val="100000"/>
+                <a:shade val="100000"/>
+              </a:schemeClr>
+            </a:gs>
+            <a:gs pos="100000">
+              <a:schemeClr val="phClr">
+                <a:lumMod val="99000"/>
+                <a:satMod val="120000"/>
+                <a:shade val="78000"/>
+              </a:schemeClr>
+            </a:gs>
+          </a:gsLst>
+          <a:lin ang="5400000" scaled="0"/>
+        </a:gradFill>
+      </a:fillStyleLst>
+      <a:lnStyleLst>
+        <a:ln w="12700" cap="flat" cmpd="sng" algn="ctr">
+          <a:solidFill>
+            <a:schemeClr val="phClr"/>
+          </a:solidFill>
+          <a:prstDash val="solid"/>
+          <a:miter lim="800000"/>
+        </a:ln>
+        <a:ln w="19050" cap="flat" cmpd="sng" algn="ctr">
+          <a:solidFill>
+            <a:schemeClr val="phClr"/>
+          </a:solidFill>
+          <a:prstDash val="solid"/>
+          <a:miter lim="800000"/>
+        </a:ln>
+        <a:ln w="25400" cap="flat" cmpd="sng" algn="ctr">
+          <a:solidFill>
+            <a:schemeClr val="phClr"/>
+          </a:solidFill>
+          <a:prstDash val="solid"/>
+          <a:miter lim="800000"/>
+        </a:ln>
+      </a:lnStyleLst>
+      <a:effectStyleLst>
+        <a:effectStyle>
+          <a:effectLst/>
+        </a:effectStyle>
+        <a:effectStyle>
+          <a:effectLst/>
+        </a:effectStyle>
+        <a:effectStyle>
+          <a:effectLst>
+            <a:outerShdw blurRad="57150" dist="19050" dir="5400000" algn="ctr" rotWithShape="0">
+              <a:srgbClr val="000000">
+                <a:alpha val="63000"/>
+              </a:srgbClr>
+            </a:outerShdw>
+          </a:effectLst>
+        </a:effectStyle>
+      </a:effectStyleLst>
+      <a:bgFillStyleLst>
+        <a:solidFill>
+          <a:schemeClr val="phClr"/>
+        </a:solidFill>
+        <a:solidFill>
+          <a:schemeClr val="phClr">
+            <a:tint val="95000"/>
+            <a:satMod val="170000"/>
+          </a:schemeClr>
+        </a:solidFill>
+        <a:gradFill rotWithShape="1">
+          <a:gsLst>
+            <a:gs pos="0">
+              <a:schemeClr val="phClr">
+                <a:tint val="93000"/>
+                <a:satMod val="150000"/>
+                <a:shade val="98000"/>
+                <a:lumMod val="102000"/>
+              </a:schemeClr>
+            </a:gs>
+            <a:gs pos="50000">
+              <a:schemeClr val="phClr">
+                <a:tint val="98000"/>
+                <a:satMod val="130000"/>
+                <a:shade val="90000"/>
+                <a:lumMod val="103000"/>
+              </a:schemeClr>
+            </a:gs>
+            <a:gs pos="100000">
+              <a:schemeClr val="phClr">
+                <a:shade val="63000"/>
+                <a:satMod val="120000"/>
+              </a:schemeClr>
+            </a:gs>
+          </a:gsLst>
+          <a:lin ang="5400000" scaled="0"/>
+        </a:gradFill>
+      </a:bgFillStyleLst>
+    </a:fmtScheme>
+  </a:themeElements>
+  <a:objectDefaults>
+    <a:lnDef>
+      <a:spPr/>
+      <a:bodyPr/>
+      <a:lstStyle/>
+      <a:style>
+        <a:lnRef idx="2">
+          <a:schemeClr val="accent1"/>
+        </a:lnRef>
+        <a:fillRef idx="0">
+          <a:schemeClr val="accent1"/>
+        </a:fillRef>
+        <a:effectRef idx="1">
+          <a:schemeClr val="accent1"/>
+        </a:effectRef>
+        <a:fontRef idx="minor">
+          <a:schemeClr val="tx1"/>
+        </a:fontRef>
+      </a:style>
+    </a:lnDef>
+  </a:objectDefaults>
+  <a:extraClrSchemeLst/>
+  <a:extLst>
+    <a:ext uri="{05A4C25C-085E-4340-85A3-A5531E510DB2}">
+      <thm15:themeFamily xmlns:thm15="http://schemas.microsoft.com/office/thememl/2012/main" name="Office Theme" id="{2E142A2C-CD16-42D6-873A-C26D2A0506FA}" vid="{1BDDFF52-6CD6-40A5-AB3C-68EB2F1E4D0A}"/>
+    </a:ext>
+  </a:extLst>
 </a:theme>
 </file>
--- a/figures/fig1/fig1.pptx
+++ b/figures/fig1/fig1.pptx
@@ -5,14 +5,10 @@
     <p:sldMasterId id="2147483660" r:id="rId1"/>
   </p:sldMasterIdLst>
   <p:notesMasterIdLst>
-    <p:notesMasterId r:id="rId7"/>
+    <p:notesMasterId r:id="rId3"/>
   </p:notesMasterIdLst>
   <p:sldIdLst>
-    <p:sldId id="256" r:id="rId2"/>
-    <p:sldId id="259" r:id="rId3"/>
-    <p:sldId id="260" r:id="rId4"/>
-    <p:sldId id="257" r:id="rId5"/>
-    <p:sldId id="258" r:id="rId6"/>
+    <p:sldId id="260" r:id="rId2"/>
   </p:sldIdLst>
   <p:sldSz cx="7772400" cy="10058400"/>
   <p:notesSz cx="6858000" cy="9144000"/>
@@ -140,15 +136,6 @@
 </p:presentation>
 </file>
 
-<file path=ppt/revisionInfo.xml><?xml version="1.0" encoding="utf-8"?>
-<p1510:revInfo xmlns:a="http://schemas.openxmlformats.org/drawingml/2006/main" xmlns:r="http://schemas.openxmlformats.org/officeDocument/2006/relationships" xmlns:p1510="http://schemas.microsoft.com/office/powerpoint/2015/10/main">
-  <p1510:revLst>
-    <p1510:client id="{6A603C97-F27C-431C-ABBF-7D98AB2190AB}" v="80" dt="2026-10-16T18:31:18.569"/>
-    <p1510:client id="{F9657A64-DC5F-2F44-9FA6-6FF564F32082}" v="223" dt="2026-10-16T19:10:28.149"/>
-  </p1510:revLst>
-</p1510:revInfo>
-</file>
-
 <file path=ppt/notesMasters/notesMaster1.xml><?xml version="1.0" encoding="utf-8"?>
 <p:notesMaster xmlns:a="http://schemas.openxmlformats.org/drawingml/2006/main" xmlns:r="http://schemas.openxmlformats.org/officeDocument/2006/relationships" xmlns:p="http://schemas.openxmlformats.org/presentationml/2006/main">
   <p:cSld>
@@ -563,7 +550,7 @@
           <a:p>
             <a:fld id="{8F50ACB0-B974-924D-BA94-4F6C0E59EA98}" type="slidenum">
               <a:rPr lang="en-US" smtClean="0"/>
-              <a:t>3</a:t>
+              <a:t>1</a:t>
             </a:fld>
             <a:endParaRPr lang="en-US"/>
           </a:p>
@@ -3431,618 +3418,6 @@
   <p:cSld>
     <p:spTree>
       <p:nvGrpSpPr>
-        <p:cNvPr id="1" name=""/>
-        <p:cNvGrpSpPr/>
-        <p:nvPr/>
-      </p:nvGrpSpPr>
-      <p:grpSpPr>
-        <a:xfrm>
-          <a:off x="0" y="0"/>
-          <a:ext cx="0" cy="0"/>
-          <a:chOff x="0" y="0"/>
-          <a:chExt cx="0" cy="0"/>
-        </a:xfrm>
-      </p:grpSpPr>
-      <p:pic>
-        <p:nvPicPr>
-          <p:cNvPr id="5" name="Picture 4">
-            <a:extLst>
-              <a:ext uri="{FF2B5EF4-FFF2-40B4-BE49-F238E27FC236}">
-                <a16:creationId xmlns:a16="http://schemas.microsoft.com/office/drawing/2014/main" id="{A92E060D-5F58-8F63-3D7C-82AB369A5ED2}"/>
-              </a:ext>
-            </a:extLst>
-          </p:cNvPr>
-          <p:cNvPicPr>
-            <a:picLocks noChangeAspect="1"/>
-          </p:cNvPicPr>
-          <p:nvPr/>
-        </p:nvPicPr>
-        <p:blipFill>
-          <a:blip r:embed="rId2"/>
-          <a:srcRect l="6783" t="9525" r="5326" b="12093"/>
-          <a:stretch>
-            <a:fillRect/>
-          </a:stretch>
-        </p:blipFill>
-        <p:spPr>
-          <a:xfrm>
-            <a:off x="-588707" y="271362"/>
-            <a:ext cx="5007746" cy="3357451"/>
-          </a:xfrm>
-          <a:prstGeom prst="rect">
-            <a:avLst/>
-          </a:prstGeom>
-        </p:spPr>
-      </p:pic>
-      <p:pic>
-        <p:nvPicPr>
-          <p:cNvPr id="7" name="Picture 6">
-            <a:extLst>
-              <a:ext uri="{FF2B5EF4-FFF2-40B4-BE49-F238E27FC236}">
-                <a16:creationId xmlns:a16="http://schemas.microsoft.com/office/drawing/2014/main" id="{8956AC8A-E685-434A-39E1-E82BA8627DF4}"/>
-              </a:ext>
-              <a:ext uri="{C183D7F6-B498-43B3-948B-1728B52AA6E4}">
-                <adec:decorative xmlns:adec="http://schemas.microsoft.com/office/drawing/2017/decorative" val="1"/>
-              </a:ext>
-            </a:extLst>
-          </p:cNvPr>
-          <p:cNvPicPr>
-            <a:picLocks noChangeAspect="1"/>
-          </p:cNvPicPr>
-          <p:nvPr/>
-        </p:nvPicPr>
-        <p:blipFill>
-          <a:blip r:embed="rId3"/>
-          <a:srcRect r="51682" b="26756"/>
-          <a:stretch>
-            <a:fillRect/>
-          </a:stretch>
-        </p:blipFill>
-        <p:spPr>
-          <a:xfrm>
-            <a:off x="-850475" y="3735000"/>
-            <a:ext cx="3143323" cy="5540653"/>
-          </a:xfrm>
-          <a:prstGeom prst="rect">
-            <a:avLst/>
-          </a:prstGeom>
-        </p:spPr>
-      </p:pic>
-      <p:pic>
-        <p:nvPicPr>
-          <p:cNvPr id="9" name="Picture 8">
-            <a:extLst>
-              <a:ext uri="{FF2B5EF4-FFF2-40B4-BE49-F238E27FC236}">
-                <a16:creationId xmlns:a16="http://schemas.microsoft.com/office/drawing/2014/main" id="{81C040D6-CF5F-B360-0A86-DABB245AD8E1}"/>
-              </a:ext>
-              <a:ext uri="{C183D7F6-B498-43B3-948B-1728B52AA6E4}">
-                <adec:decorative xmlns:adec="http://schemas.microsoft.com/office/drawing/2017/decorative" val="1"/>
-              </a:ext>
-            </a:extLst>
-          </p:cNvPr>
-          <p:cNvPicPr>
-            <a:picLocks noChangeAspect="1"/>
-          </p:cNvPicPr>
-          <p:nvPr/>
-        </p:nvPicPr>
-        <p:blipFill>
-          <a:blip r:embed="rId3"/>
-          <a:srcRect l="74267" b="66297"/>
-          <a:stretch>
-            <a:fillRect/>
-          </a:stretch>
-        </p:blipFill>
-        <p:spPr>
-          <a:xfrm>
-            <a:off x="11197525" y="5655627"/>
-            <a:ext cx="1936447" cy="1992739"/>
-          </a:xfrm>
-          <a:prstGeom prst="rect">
-            <a:avLst/>
-          </a:prstGeom>
-        </p:spPr>
-      </p:pic>
-      <p:pic>
-        <p:nvPicPr>
-          <p:cNvPr id="11" name="Picture 10">
-            <a:extLst>
-              <a:ext uri="{FF2B5EF4-FFF2-40B4-BE49-F238E27FC236}">
-                <a16:creationId xmlns:a16="http://schemas.microsoft.com/office/drawing/2014/main" id="{784C85AE-FE3F-2B4B-3521-037776B082C2}"/>
-              </a:ext>
-            </a:extLst>
-          </p:cNvPr>
-          <p:cNvPicPr>
-            <a:picLocks noChangeAspect="1"/>
-          </p:cNvPicPr>
-          <p:nvPr/>
-        </p:nvPicPr>
-        <p:blipFill>
-          <a:blip r:embed="rId4"/>
-          <a:srcRect l="24085" r="56314" b="47997"/>
-          <a:stretch>
-            <a:fillRect/>
-          </a:stretch>
-        </p:blipFill>
-        <p:spPr>
-          <a:xfrm>
-            <a:off x="14393196" y="-2785240"/>
-            <a:ext cx="2248495" cy="4871813"/>
-          </a:xfrm>
-          <a:prstGeom prst="rect">
-            <a:avLst/>
-          </a:prstGeom>
-        </p:spPr>
-      </p:pic>
-      <p:grpSp>
-        <p:nvGrpSpPr>
-          <p:cNvPr id="16" name="Group 15">
-            <a:extLst>
-              <a:ext uri="{FF2B5EF4-FFF2-40B4-BE49-F238E27FC236}">
-                <a16:creationId xmlns:a16="http://schemas.microsoft.com/office/drawing/2014/main" id="{BFB4184D-B7E1-0978-B894-A61F485549DE}"/>
-              </a:ext>
-            </a:extLst>
-          </p:cNvPr>
-          <p:cNvGrpSpPr/>
-          <p:nvPr/>
-        </p:nvGrpSpPr>
-        <p:grpSpPr>
-          <a:xfrm>
-            <a:off x="11734081" y="-2474821"/>
-            <a:ext cx="2506786" cy="3538756"/>
-            <a:chOff x="2493995" y="2818228"/>
-            <a:chExt cx="1709172" cy="2412788"/>
-          </a:xfrm>
-        </p:grpSpPr>
-        <p:pic>
-          <p:nvPicPr>
-            <p:cNvPr id="13" name="Picture 12">
-              <a:extLst>
-                <a:ext uri="{FF2B5EF4-FFF2-40B4-BE49-F238E27FC236}">
-                  <a16:creationId xmlns:a16="http://schemas.microsoft.com/office/drawing/2014/main" id="{B170F021-109F-43C4-8822-ED15988406A7}"/>
-                </a:ext>
-              </a:extLst>
-            </p:cNvPr>
-            <p:cNvPicPr>
-              <a:picLocks noChangeAspect="1"/>
-            </p:cNvPicPr>
-            <p:nvPr/>
-          </p:nvPicPr>
-          <p:blipFill>
-            <a:blip r:embed="rId5"/>
-            <a:srcRect l="21272" t="27788"/>
-            <a:stretch>
-              <a:fillRect/>
-            </a:stretch>
-          </p:blipFill>
-          <p:spPr>
-            <a:xfrm>
-              <a:off x="2700017" y="2818228"/>
-              <a:ext cx="1503150" cy="2412788"/>
-            </a:xfrm>
-            <a:prstGeom prst="rect">
-              <a:avLst/>
-            </a:prstGeom>
-          </p:spPr>
-        </p:pic>
-        <p:pic>
-          <p:nvPicPr>
-            <p:cNvPr id="15" name="Picture 14">
-              <a:extLst>
-                <a:ext uri="{FF2B5EF4-FFF2-40B4-BE49-F238E27FC236}">
-                  <a16:creationId xmlns:a16="http://schemas.microsoft.com/office/drawing/2014/main" id="{726FF4FA-778C-779E-4488-142BB493A7F7}"/>
-                </a:ext>
-              </a:extLst>
-            </p:cNvPr>
-            <p:cNvPicPr>
-              <a:picLocks noChangeAspect="1"/>
-            </p:cNvPicPr>
-            <p:nvPr/>
-          </p:nvPicPr>
-          <p:blipFill>
-            <a:blip r:embed="rId5"/>
-            <a:srcRect l="14815" t="4981" r="35574" b="80283"/>
-            <a:stretch>
-              <a:fillRect/>
-            </a:stretch>
-          </p:blipFill>
-          <p:spPr>
-            <a:xfrm>
-              <a:off x="2493995" y="2884935"/>
-              <a:ext cx="1046678" cy="544065"/>
-            </a:xfrm>
-            <a:prstGeom prst="rect">
-              <a:avLst/>
-            </a:prstGeom>
-          </p:spPr>
-        </p:pic>
-      </p:grpSp>
-      <p:pic>
-        <p:nvPicPr>
-          <p:cNvPr id="18" name="Picture 17">
-            <a:extLst>
-              <a:ext uri="{FF2B5EF4-FFF2-40B4-BE49-F238E27FC236}">
-                <a16:creationId xmlns:a16="http://schemas.microsoft.com/office/drawing/2014/main" id="{6921583D-F1CE-258A-3A4A-722EB43A44F7}"/>
-              </a:ext>
-            </a:extLst>
-          </p:cNvPr>
-          <p:cNvPicPr>
-            <a:picLocks noChangeAspect="1"/>
-          </p:cNvPicPr>
-          <p:nvPr/>
-        </p:nvPicPr>
-        <p:blipFill>
-          <a:blip r:embed="rId6"/>
-          <a:srcRect l="26072" r="48043" b="72261"/>
-          <a:stretch>
-            <a:fillRect/>
-          </a:stretch>
-        </p:blipFill>
-        <p:spPr>
-          <a:xfrm>
-            <a:off x="4428666" y="366389"/>
-            <a:ext cx="1158989" cy="1158979"/>
-          </a:xfrm>
-          <a:prstGeom prst="rect">
-            <a:avLst/>
-          </a:prstGeom>
-        </p:spPr>
-      </p:pic>
-      <p:pic>
-        <p:nvPicPr>
-          <p:cNvPr id="2" name="Picture 1">
-            <a:extLst>
-              <a:ext uri="{FF2B5EF4-FFF2-40B4-BE49-F238E27FC236}">
-                <a16:creationId xmlns:a16="http://schemas.microsoft.com/office/drawing/2014/main" id="{A0E30D7C-E611-4E17-46FE-B27C91066C55}"/>
-              </a:ext>
-            </a:extLst>
-          </p:cNvPr>
-          <p:cNvPicPr>
-            <a:picLocks noChangeAspect="1"/>
-          </p:cNvPicPr>
-          <p:nvPr/>
-        </p:nvPicPr>
-        <p:blipFill>
-          <a:blip r:embed="rId7"/>
-          <a:srcRect l="48414" r="25476" b="69086"/>
-          <a:stretch>
-            <a:fillRect/>
-          </a:stretch>
-        </p:blipFill>
-        <p:spPr>
-          <a:xfrm>
-            <a:off x="4602604" y="1526474"/>
-            <a:ext cx="1084770" cy="983492"/>
-          </a:xfrm>
-          <a:prstGeom prst="rect">
-            <a:avLst/>
-          </a:prstGeom>
-        </p:spPr>
-      </p:pic>
-      <p:pic>
-        <p:nvPicPr>
-          <p:cNvPr id="3" name="Picture 2">
-            <a:extLst>
-              <a:ext uri="{FF2B5EF4-FFF2-40B4-BE49-F238E27FC236}">
-                <a16:creationId xmlns:a16="http://schemas.microsoft.com/office/drawing/2014/main" id="{62893457-C628-580D-DC6E-0C3FB925D75F}"/>
-              </a:ext>
-            </a:extLst>
-          </p:cNvPr>
-          <p:cNvPicPr>
-            <a:picLocks noChangeAspect="1"/>
-          </p:cNvPicPr>
-          <p:nvPr/>
-        </p:nvPicPr>
-        <p:blipFill>
-          <a:blip r:embed="rId8"/>
-          <a:stretch>
-            <a:fillRect/>
-          </a:stretch>
-        </p:blipFill>
-        <p:spPr>
-          <a:xfrm>
-            <a:off x="4604338" y="2634460"/>
-            <a:ext cx="1090470" cy="1096543"/>
-          </a:xfrm>
-          <a:prstGeom prst="rect">
-            <a:avLst/>
-          </a:prstGeom>
-        </p:spPr>
-      </p:pic>
-      <p:pic>
-        <p:nvPicPr>
-          <p:cNvPr id="4" name="Picture 3">
-            <a:extLst>
-              <a:ext uri="{FF2B5EF4-FFF2-40B4-BE49-F238E27FC236}">
-                <a16:creationId xmlns:a16="http://schemas.microsoft.com/office/drawing/2014/main" id="{D41E9461-3D1A-7182-7361-340320A12CB9}"/>
-              </a:ext>
-            </a:extLst>
-          </p:cNvPr>
-          <p:cNvPicPr>
-            <a:picLocks noChangeAspect="1"/>
-          </p:cNvPicPr>
-          <p:nvPr/>
-        </p:nvPicPr>
-        <p:blipFill>
-          <a:blip r:embed="rId9"/>
-          <a:stretch>
-            <a:fillRect/>
-          </a:stretch>
-        </p:blipFill>
-        <p:spPr>
-          <a:xfrm>
-            <a:off x="2293181" y="3717234"/>
-            <a:ext cx="4271249" cy="5774268"/>
-          </a:xfrm>
-          <a:prstGeom prst="rect">
-            <a:avLst/>
-          </a:prstGeom>
-        </p:spPr>
-      </p:pic>
-    </p:spTree>
-    <p:extLst>
-      <p:ext uri="{BB962C8B-B14F-4D97-AF65-F5344CB8AC3E}">
-        <p14:creationId xmlns:p14="http://schemas.microsoft.com/office/powerpoint/2010/main" val="417269656"/>
-      </p:ext>
-    </p:extLst>
-  </p:cSld>
-  <p:clrMapOvr>
-    <a:masterClrMapping/>
-  </p:clrMapOvr>
-</p:sld>
-</file>
-
-<file path=ppt/slides/slide2.xml><?xml version="1.0" encoding="utf-8"?>
-<p:sld xmlns:a="http://schemas.openxmlformats.org/drawingml/2006/main" xmlns:r="http://schemas.openxmlformats.org/officeDocument/2006/relationships" xmlns:p="http://schemas.openxmlformats.org/presentationml/2006/main">
-  <p:cSld>
-    <p:spTree>
-      <p:nvGrpSpPr>
-        <p:cNvPr id="1" name=""/>
-        <p:cNvGrpSpPr/>
-        <p:nvPr/>
-      </p:nvGrpSpPr>
-      <p:grpSpPr>
-        <a:xfrm>
-          <a:off x="0" y="0"/>
-          <a:ext cx="0" cy="0"/>
-          <a:chOff x="0" y="0"/>
-          <a:chExt cx="0" cy="0"/>
-        </a:xfrm>
-      </p:grpSpPr>
-      <p:pic>
-        <p:nvPicPr>
-          <p:cNvPr id="2" name="Picture 1">
-            <a:extLst>
-              <a:ext uri="{FF2B5EF4-FFF2-40B4-BE49-F238E27FC236}">
-                <a16:creationId xmlns:a16="http://schemas.microsoft.com/office/drawing/2014/main" id="{0EF1144B-68CC-2F3C-9183-A5444CA21E7D}"/>
-              </a:ext>
-            </a:extLst>
-          </p:cNvPr>
-          <p:cNvPicPr>
-            <a:picLocks noChangeAspect="1"/>
-          </p:cNvPicPr>
-          <p:nvPr/>
-        </p:nvPicPr>
-        <p:blipFill>
-          <a:blip r:embed="rId2"/>
-          <a:srcRect b="74851"/>
-          <a:stretch>
-            <a:fillRect/>
-          </a:stretch>
-        </p:blipFill>
-        <p:spPr>
-          <a:xfrm>
-            <a:off x="0" y="-526943"/>
-            <a:ext cx="7772400" cy="1658319"/>
-          </a:xfrm>
-          <a:prstGeom prst="rect">
-            <a:avLst/>
-          </a:prstGeom>
-        </p:spPr>
-      </p:pic>
-      <p:pic>
-        <p:nvPicPr>
-          <p:cNvPr id="4" name="Picture 3">
-            <a:extLst>
-              <a:ext uri="{FF2B5EF4-FFF2-40B4-BE49-F238E27FC236}">
-                <a16:creationId xmlns:a16="http://schemas.microsoft.com/office/drawing/2014/main" id="{8ADE3429-9A2E-C1A4-3B3A-14318882AF6F}"/>
-              </a:ext>
-            </a:extLst>
-          </p:cNvPr>
-          <p:cNvPicPr>
-            <a:picLocks noChangeAspect="1"/>
-          </p:cNvPicPr>
-          <p:nvPr/>
-        </p:nvPicPr>
-        <p:blipFill>
-          <a:blip r:embed="rId2"/>
-          <a:srcRect t="36485"/>
-          <a:stretch>
-            <a:fillRect/>
-          </a:stretch>
-        </p:blipFill>
-        <p:spPr>
-          <a:xfrm>
-            <a:off x="0" y="1131376"/>
-            <a:ext cx="7772400" cy="4188155"/>
-          </a:xfrm>
-          <a:prstGeom prst="rect">
-            <a:avLst/>
-          </a:prstGeom>
-        </p:spPr>
-      </p:pic>
-      <p:pic>
-        <p:nvPicPr>
-          <p:cNvPr id="6" name="Picture 5">
-            <a:extLst>
-              <a:ext uri="{FF2B5EF4-FFF2-40B4-BE49-F238E27FC236}">
-                <a16:creationId xmlns:a16="http://schemas.microsoft.com/office/drawing/2014/main" id="{9F89CF50-806F-BE8A-8C51-A42D016AB92D}"/>
-              </a:ext>
-              <a:ext uri="{C183D7F6-B498-43B3-948B-1728B52AA6E4}">
-                <adec:decorative xmlns:adec="http://schemas.microsoft.com/office/drawing/2017/decorative" val="1"/>
-              </a:ext>
-            </a:extLst>
-          </p:cNvPr>
-          <p:cNvPicPr>
-            <a:picLocks noChangeAspect="1"/>
-          </p:cNvPicPr>
-          <p:nvPr/>
-        </p:nvPicPr>
-        <p:blipFill>
-          <a:blip r:embed="rId3"/>
-          <a:srcRect r="51682" b="26756"/>
-          <a:stretch>
-            <a:fillRect/>
-          </a:stretch>
-        </p:blipFill>
-        <p:spPr>
-          <a:xfrm>
-            <a:off x="457200" y="6977850"/>
-            <a:ext cx="2299326" cy="2636611"/>
-          </a:xfrm>
-          <a:prstGeom prst="rect">
-            <a:avLst/>
-          </a:prstGeom>
-        </p:spPr>
-      </p:pic>
-      <p:pic>
-        <p:nvPicPr>
-          <p:cNvPr id="9" name="Picture 8">
-            <a:extLst>
-              <a:ext uri="{FF2B5EF4-FFF2-40B4-BE49-F238E27FC236}">
-                <a16:creationId xmlns:a16="http://schemas.microsoft.com/office/drawing/2014/main" id="{EA9200E4-C859-4834-25B0-94D83E7DC3E8}"/>
-              </a:ext>
-            </a:extLst>
-          </p:cNvPr>
-          <p:cNvPicPr>
-            <a:picLocks noChangeAspect="1"/>
-          </p:cNvPicPr>
-          <p:nvPr/>
-        </p:nvPicPr>
-        <p:blipFill>
-          <a:blip r:embed="rId4"/>
-          <a:srcRect l="48414" r="25476" b="69086"/>
-          <a:stretch>
-            <a:fillRect/>
-          </a:stretch>
-        </p:blipFill>
-        <p:spPr>
-          <a:xfrm>
-            <a:off x="2717690" y="7310744"/>
-            <a:ext cx="916663" cy="831080"/>
-          </a:xfrm>
-          <a:prstGeom prst="rect">
-            <a:avLst/>
-          </a:prstGeom>
-        </p:spPr>
-      </p:pic>
-      <p:pic>
-        <p:nvPicPr>
-          <p:cNvPr id="10" name="Picture 9">
-            <a:extLst>
-              <a:ext uri="{FF2B5EF4-FFF2-40B4-BE49-F238E27FC236}">
-                <a16:creationId xmlns:a16="http://schemas.microsoft.com/office/drawing/2014/main" id="{6968ED23-7786-3B2D-3BAB-7EB4890CEA28}"/>
-              </a:ext>
-            </a:extLst>
-          </p:cNvPr>
-          <p:cNvPicPr>
-            <a:picLocks noChangeAspect="1"/>
-          </p:cNvPicPr>
-          <p:nvPr/>
-        </p:nvPicPr>
-        <p:blipFill>
-          <a:blip r:embed="rId5"/>
-          <a:stretch>
-            <a:fillRect/>
-          </a:stretch>
-        </p:blipFill>
-        <p:spPr>
-          <a:xfrm>
-            <a:off x="2717690" y="8296154"/>
-            <a:ext cx="916663" cy="921767"/>
-          </a:xfrm>
-          <a:prstGeom prst="rect">
-            <a:avLst/>
-          </a:prstGeom>
-        </p:spPr>
-      </p:pic>
-      <p:pic>
-        <p:nvPicPr>
-          <p:cNvPr id="11" name="Picture 10">
-            <a:extLst>
-              <a:ext uri="{FF2B5EF4-FFF2-40B4-BE49-F238E27FC236}">
-                <a16:creationId xmlns:a16="http://schemas.microsoft.com/office/drawing/2014/main" id="{26AF85CF-7472-E407-888B-6FF29177B817}"/>
-              </a:ext>
-            </a:extLst>
-          </p:cNvPr>
-          <p:cNvPicPr>
-            <a:picLocks noChangeAspect="1"/>
-          </p:cNvPicPr>
-          <p:nvPr/>
-        </p:nvPicPr>
-        <p:blipFill>
-          <a:blip r:embed="rId6"/>
-          <a:stretch>
-            <a:fillRect/>
-          </a:stretch>
-        </p:blipFill>
-        <p:spPr>
-          <a:xfrm>
-            <a:off x="3634353" y="5224759"/>
-            <a:ext cx="3680847" cy="4171971"/>
-          </a:xfrm>
-          <a:prstGeom prst="rect">
-            <a:avLst/>
-          </a:prstGeom>
-        </p:spPr>
-      </p:pic>
-      <p:pic>
-        <p:nvPicPr>
-          <p:cNvPr id="12" name="Picture 11">
-            <a:extLst>
-              <a:ext uri="{FF2B5EF4-FFF2-40B4-BE49-F238E27FC236}">
-                <a16:creationId xmlns:a16="http://schemas.microsoft.com/office/drawing/2014/main" id="{8AA978B3-A28F-C916-9699-FFF12FFF8A6B}"/>
-              </a:ext>
-            </a:extLst>
-          </p:cNvPr>
-          <p:cNvPicPr>
-            <a:picLocks noChangeAspect="1"/>
-          </p:cNvPicPr>
-          <p:nvPr/>
-        </p:nvPicPr>
-        <p:blipFill>
-          <a:blip r:embed="rId7"/>
-          <a:stretch>
-            <a:fillRect/>
-          </a:stretch>
-        </p:blipFill>
-        <p:spPr>
-          <a:xfrm>
-            <a:off x="473671" y="5293596"/>
-            <a:ext cx="3160682" cy="1597556"/>
-          </a:xfrm>
-          <a:prstGeom prst="rect">
-            <a:avLst/>
-          </a:prstGeom>
-        </p:spPr>
-      </p:pic>
-    </p:spTree>
-    <p:extLst>
-      <p:ext uri="{BB962C8B-B14F-4D97-AF65-F5344CB8AC3E}">
-        <p14:creationId xmlns:p14="http://schemas.microsoft.com/office/powerpoint/2010/main" val="1225941338"/>
-      </p:ext>
-    </p:extLst>
-  </p:cSld>
-  <p:clrMapOvr>
-    <a:masterClrMapping/>
-  </p:clrMapOvr>
-</p:sld>
-</file>
-
-<file path=ppt/slides/slide3.xml><?xml version="1.0" encoding="utf-8"?>
-<p:sld xmlns:a="http://schemas.openxmlformats.org/drawingml/2006/main" xmlns:r="http://schemas.openxmlformats.org/officeDocument/2006/relationships" xmlns:p="http://schemas.openxmlformats.org/presentationml/2006/main">
-  <p:cSld>
-    <p:spTree>
-      <p:nvGrpSpPr>
         <p:cNvPr id="1" name="">
           <a:extLst>
             <a:ext uri="{FF2B5EF4-FFF2-40B4-BE49-F238E27FC236}">
@@ -4130,7 +3505,7 @@
         <p:spPr>
           <a:xfrm>
             <a:off x="457200" y="2123593"/>
-            <a:ext cx="2315798" cy="2710048"/>
+            <a:ext cx="2315798" cy="2557165"/>
           </a:xfrm>
           <a:prstGeom prst="rect">
             <a:avLst/>
@@ -4291,7 +3666,7 @@
         </p:nvSpPr>
         <p:spPr>
           <a:xfrm>
-            <a:off x="3727494" y="2003540"/>
+            <a:off x="3727493" y="1932187"/>
             <a:ext cx="1288306" cy="589369"/>
           </a:xfrm>
           <a:prstGeom prst="rect">
@@ -4345,7 +3720,7 @@
         </p:nvSpPr>
         <p:spPr>
           <a:xfrm>
-            <a:off x="3727494" y="2599487"/>
+            <a:off x="3727493" y="2528134"/>
             <a:ext cx="1288306" cy="773279"/>
           </a:xfrm>
           <a:prstGeom prst="rect">
@@ -4399,8 +3774,8 @@
         </p:nvSpPr>
         <p:spPr>
           <a:xfrm>
-            <a:off x="3727493" y="3461031"/>
-            <a:ext cx="1272927" cy="589369"/>
+            <a:off x="3726477" y="3314010"/>
+            <a:ext cx="1288306" cy="589369"/>
           </a:xfrm>
           <a:prstGeom prst="rect">
             <a:avLst/>
@@ -4453,8 +3828,8 @@
         </p:nvSpPr>
         <p:spPr>
           <a:xfrm>
-            <a:off x="3727493" y="4056978"/>
-            <a:ext cx="1272927" cy="773279"/>
+            <a:off x="3726477" y="3909957"/>
+            <a:ext cx="1288306" cy="664169"/>
           </a:xfrm>
           <a:prstGeom prst="rect">
             <a:avLst/>
@@ -4561,7 +3936,7 @@
         </p:nvSpPr>
         <p:spPr>
           <a:xfrm>
-            <a:off x="5032270" y="2003540"/>
+            <a:off x="5032269" y="1932187"/>
             <a:ext cx="1775538" cy="595947"/>
           </a:xfrm>
           <a:prstGeom prst="rect">
@@ -4615,8 +3990,8 @@
         </p:nvSpPr>
         <p:spPr>
           <a:xfrm>
-            <a:off x="5000420" y="3461030"/>
-            <a:ext cx="1807388" cy="631297"/>
+            <a:off x="5031250" y="3314009"/>
+            <a:ext cx="1775541" cy="595947"/>
           </a:xfrm>
           <a:prstGeom prst="rect">
             <a:avLst/>
@@ -4831,7 +4206,7 @@
         </p:nvSpPr>
         <p:spPr>
           <a:xfrm>
-            <a:off x="5032268" y="2606376"/>
+            <a:off x="5032267" y="2535023"/>
             <a:ext cx="1099226" cy="766390"/>
           </a:xfrm>
           <a:prstGeom prst="rect">
@@ -4885,7 +4260,7 @@
         </p:nvSpPr>
         <p:spPr>
           <a:xfrm>
-            <a:off x="6131494" y="2606376"/>
+            <a:off x="6131493" y="2535023"/>
             <a:ext cx="676314" cy="766390"/>
           </a:xfrm>
           <a:prstGeom prst="rect">
@@ -4939,8 +4314,8 @@
         </p:nvSpPr>
         <p:spPr>
           <a:xfrm>
-            <a:off x="5000420" y="4098905"/>
-            <a:ext cx="1807388" cy="728874"/>
+            <a:off x="5022037" y="3909956"/>
+            <a:ext cx="1784754" cy="664170"/>
           </a:xfrm>
           <a:prstGeom prst="rect">
             <a:avLst/>
@@ -4993,8 +4368,8 @@
         </p:nvSpPr>
         <p:spPr>
           <a:xfrm>
-            <a:off x="2788253" y="2127757"/>
-            <a:ext cx="844883" cy="884969"/>
+            <a:off x="2789466" y="2123593"/>
+            <a:ext cx="844883" cy="804892"/>
           </a:xfrm>
           <a:prstGeom prst="rect">
             <a:avLst/>
@@ -5047,8 +4422,8 @@
         </p:nvSpPr>
         <p:spPr>
           <a:xfrm>
-            <a:off x="2780626" y="3024988"/>
-            <a:ext cx="852510" cy="884969"/>
+            <a:off x="2785652" y="2989424"/>
+            <a:ext cx="852510" cy="804892"/>
           </a:xfrm>
           <a:prstGeom prst="rect">
             <a:avLst/>
@@ -5101,8 +4476,8 @@
         </p:nvSpPr>
         <p:spPr>
           <a:xfrm>
-            <a:off x="2788253" y="3926011"/>
-            <a:ext cx="844883" cy="907630"/>
+            <a:off x="2789466" y="3855255"/>
+            <a:ext cx="844883" cy="825503"/>
           </a:xfrm>
           <a:prstGeom prst="rect">
             <a:avLst/>
@@ -5145,872 +4520,6 @@
     <p:extLst>
       <p:ext uri="{BB962C8B-B14F-4D97-AF65-F5344CB8AC3E}">
         <p14:creationId xmlns:p14="http://schemas.microsoft.com/office/powerpoint/2010/main" val="1874870207"/>
-      </p:ext>
-    </p:extLst>
-  </p:cSld>
-  <p:clrMapOvr>
-    <a:masterClrMapping/>
-  </p:clrMapOvr>
-</p:sld>
-</file>
-
-<file path=ppt/slides/slide4.xml><?xml version="1.0" encoding="utf-8"?>
-<p:sld xmlns:a="http://schemas.openxmlformats.org/drawingml/2006/main" xmlns:r="http://schemas.openxmlformats.org/officeDocument/2006/relationships" xmlns:p="http://schemas.openxmlformats.org/presentationml/2006/main">
-  <p:cSld>
-    <p:spTree>
-      <p:nvGrpSpPr>
-        <p:cNvPr id="1" name=""/>
-        <p:cNvGrpSpPr/>
-        <p:nvPr/>
-      </p:nvGrpSpPr>
-      <p:grpSpPr>
-        <a:xfrm>
-          <a:off x="0" y="0"/>
-          <a:ext cx="0" cy="0"/>
-          <a:chOff x="0" y="0"/>
-          <a:chExt cx="0" cy="0"/>
-        </a:xfrm>
-      </p:grpSpPr>
-      <p:pic>
-        <p:nvPicPr>
-          <p:cNvPr id="5" name="Picture 4">
-            <a:extLst>
-              <a:ext uri="{FF2B5EF4-FFF2-40B4-BE49-F238E27FC236}">
-                <a16:creationId xmlns:a16="http://schemas.microsoft.com/office/drawing/2014/main" id="{39A88F0D-50E8-B5D1-2BAD-59C733E49C05}"/>
-              </a:ext>
-            </a:extLst>
-          </p:cNvPr>
-          <p:cNvPicPr>
-            <a:picLocks noChangeAspect="1"/>
-          </p:cNvPicPr>
-          <p:nvPr/>
-        </p:nvPicPr>
-        <p:blipFill>
-          <a:blip r:embed="rId2"/>
-          <a:srcRect r="73453" b="72228"/>
-          <a:stretch>
-            <a:fillRect/>
-          </a:stretch>
-        </p:blipFill>
-        <p:spPr>
-          <a:xfrm>
-            <a:off x="-2379795" y="1191719"/>
-            <a:ext cx="1985985" cy="1963060"/>
-          </a:xfrm>
-          <a:prstGeom prst="rect">
-            <a:avLst/>
-          </a:prstGeom>
-        </p:spPr>
-      </p:pic>
-      <p:pic>
-        <p:nvPicPr>
-          <p:cNvPr id="7" name="Picture 6">
-            <a:extLst>
-              <a:ext uri="{FF2B5EF4-FFF2-40B4-BE49-F238E27FC236}">
-                <a16:creationId xmlns:a16="http://schemas.microsoft.com/office/drawing/2014/main" id="{72ED79FA-F41C-607C-D84A-7C17BB4F1AE3}"/>
-              </a:ext>
-            </a:extLst>
-          </p:cNvPr>
-          <p:cNvPicPr>
-            <a:picLocks noChangeAspect="1"/>
-          </p:cNvPicPr>
-          <p:nvPr/>
-        </p:nvPicPr>
-        <p:blipFill>
-          <a:blip r:embed="rId2"/>
-          <a:srcRect l="51599" r="458" b="72228"/>
-          <a:stretch>
-            <a:fillRect/>
-          </a:stretch>
-        </p:blipFill>
-        <p:spPr>
-          <a:xfrm>
-            <a:off x="-398260" y="1189084"/>
-            <a:ext cx="3666464" cy="1984831"/>
-          </a:xfrm>
-          <a:prstGeom prst="rect">
-            <a:avLst/>
-          </a:prstGeom>
-        </p:spPr>
-      </p:pic>
-      <p:pic>
-        <p:nvPicPr>
-          <p:cNvPr id="9" name="Picture 8">
-            <a:extLst>
-              <a:ext uri="{FF2B5EF4-FFF2-40B4-BE49-F238E27FC236}">
-                <a16:creationId xmlns:a16="http://schemas.microsoft.com/office/drawing/2014/main" id="{A087C8CA-CF61-DC12-5729-477C5953808F}"/>
-              </a:ext>
-            </a:extLst>
-          </p:cNvPr>
-          <p:cNvPicPr>
-            <a:picLocks noChangeAspect="1"/>
-          </p:cNvPicPr>
-          <p:nvPr/>
-        </p:nvPicPr>
-        <p:blipFill>
-          <a:blip r:embed="rId2"/>
-          <a:srcRect l="51599" t="26799" r="458" b="52282"/>
-          <a:stretch>
-            <a:fillRect/>
-          </a:stretch>
-        </p:blipFill>
-        <p:spPr>
-          <a:xfrm>
-            <a:off x="-408754" y="4750361"/>
-            <a:ext cx="2684054" cy="1478668"/>
-          </a:xfrm>
-          <a:prstGeom prst="rect">
-            <a:avLst/>
-          </a:prstGeom>
-        </p:spPr>
-      </p:pic>
-      <p:pic>
-        <p:nvPicPr>
-          <p:cNvPr id="11" name="Picture 10">
-            <a:extLst>
-              <a:ext uri="{FF2B5EF4-FFF2-40B4-BE49-F238E27FC236}">
-                <a16:creationId xmlns:a16="http://schemas.microsoft.com/office/drawing/2014/main" id="{A499B3D8-01D1-90B0-FC31-AD8F1797B460}"/>
-              </a:ext>
-            </a:extLst>
-          </p:cNvPr>
-          <p:cNvPicPr>
-            <a:picLocks noChangeAspect="1"/>
-          </p:cNvPicPr>
-          <p:nvPr/>
-        </p:nvPicPr>
-        <p:blipFill>
-          <a:blip r:embed="rId2"/>
-          <a:srcRect l="894" t="28453" r="51163" b="53036"/>
-          <a:stretch>
-            <a:fillRect/>
-          </a:stretch>
-        </p:blipFill>
-        <p:spPr>
-          <a:xfrm>
-            <a:off x="-411652" y="3236924"/>
-            <a:ext cx="2453657" cy="1308450"/>
-          </a:xfrm>
-          <a:prstGeom prst="rect">
-            <a:avLst/>
-          </a:prstGeom>
-        </p:spPr>
-      </p:pic>
-      <p:pic>
-        <p:nvPicPr>
-          <p:cNvPr id="15" name="Picture 14">
-            <a:extLst>
-              <a:ext uri="{FF2B5EF4-FFF2-40B4-BE49-F238E27FC236}">
-                <a16:creationId xmlns:a16="http://schemas.microsoft.com/office/drawing/2014/main" id="{BC5F228A-2C15-9372-BFA0-6B1A9CC49051}"/>
-              </a:ext>
-              <a:ext uri="{C183D7F6-B498-43B3-948B-1728B52AA6E4}">
-                <adec:decorative xmlns:adec="http://schemas.microsoft.com/office/drawing/2017/decorative" val="1"/>
-              </a:ext>
-            </a:extLst>
-          </p:cNvPr>
-          <p:cNvPicPr>
-            <a:picLocks noChangeAspect="1"/>
-          </p:cNvPicPr>
-          <p:nvPr/>
-        </p:nvPicPr>
-        <p:blipFill>
-          <a:blip r:embed="rId3"/>
-          <a:srcRect l="73575" t="65896" r="356" b="990"/>
-          <a:stretch>
-            <a:fillRect/>
-          </a:stretch>
-        </p:blipFill>
-        <p:spPr>
-          <a:xfrm>
-            <a:off x="-2226507" y="3040104"/>
-            <a:ext cx="1701858" cy="1698575"/>
-          </a:xfrm>
-          <a:prstGeom prst="rect">
-            <a:avLst/>
-          </a:prstGeom>
-        </p:spPr>
-      </p:pic>
-      <p:sp>
-        <p:nvSpPr>
-          <p:cNvPr id="16" name="Rectangle 15">
-            <a:extLst>
-              <a:ext uri="{FF2B5EF4-FFF2-40B4-BE49-F238E27FC236}">
-                <a16:creationId xmlns:a16="http://schemas.microsoft.com/office/drawing/2014/main" id="{44524501-00EF-9323-3261-B06155488DC3}"/>
-              </a:ext>
-            </a:extLst>
-          </p:cNvPr>
-          <p:cNvSpPr/>
-          <p:nvPr/>
-        </p:nvSpPr>
-        <p:spPr>
-          <a:xfrm>
-            <a:off x="-2076598" y="4874723"/>
-            <a:ext cx="1544998" cy="1225853"/>
-          </a:xfrm>
-          <a:prstGeom prst="rect">
-            <a:avLst/>
-          </a:prstGeom>
-        </p:spPr>
-        <p:style>
-          <a:lnRef idx="2">
-            <a:schemeClr val="accent1">
-              <a:shade val="15000"/>
-            </a:schemeClr>
-          </a:lnRef>
-          <a:fillRef idx="1">
-            <a:schemeClr val="accent1"/>
-          </a:fillRef>
-          <a:effectRef idx="0">
-            <a:schemeClr val="accent1"/>
-          </a:effectRef>
-          <a:fontRef idx="minor">
-            <a:schemeClr val="lt1"/>
-          </a:fontRef>
-        </p:style>
-        <p:txBody>
-          <a:bodyPr rtlCol="0" anchor="ctr"/>
-          <a:lstStyle/>
-          <a:p>
-            <a:pPr algn="ctr"/>
-            <a:r>
-              <a:rPr lang="en-US" sz="2640"/>
-              <a:t>Same for model</a:t>
-            </a:r>
-          </a:p>
-        </p:txBody>
-      </p:sp>
-      <p:pic>
-        <p:nvPicPr>
-          <p:cNvPr id="21" name="Picture 20">
-            <a:extLst>
-              <a:ext uri="{FF2B5EF4-FFF2-40B4-BE49-F238E27FC236}">
-                <a16:creationId xmlns:a16="http://schemas.microsoft.com/office/drawing/2014/main" id="{E67FB46E-3200-88AD-4F4C-E2E6296A7634}"/>
-              </a:ext>
-            </a:extLst>
-          </p:cNvPr>
-          <p:cNvPicPr>
-            <a:picLocks noChangeAspect="1"/>
-          </p:cNvPicPr>
-          <p:nvPr/>
-        </p:nvPicPr>
-        <p:blipFill>
-          <a:blip r:embed="rId4"/>
-          <a:srcRect r="49398"/>
-          <a:stretch>
-            <a:fillRect/>
-          </a:stretch>
-        </p:blipFill>
-        <p:spPr>
-          <a:xfrm>
-            <a:off x="4029425" y="1413930"/>
-            <a:ext cx="3202855" cy="3278905"/>
-          </a:xfrm>
-          <a:prstGeom prst="rect">
-            <a:avLst/>
-          </a:prstGeom>
-        </p:spPr>
-      </p:pic>
-      <p:pic>
-        <p:nvPicPr>
-          <p:cNvPr id="24" name="Picture 23">
-            <a:extLst>
-              <a:ext uri="{FF2B5EF4-FFF2-40B4-BE49-F238E27FC236}">
-                <a16:creationId xmlns:a16="http://schemas.microsoft.com/office/drawing/2014/main" id="{B3A9B486-A55C-A88C-65B6-65885F7335AC}"/>
-              </a:ext>
-            </a:extLst>
-          </p:cNvPr>
-          <p:cNvPicPr>
-            <a:picLocks noChangeAspect="1"/>
-          </p:cNvPicPr>
-          <p:nvPr/>
-        </p:nvPicPr>
-        <p:blipFill>
-          <a:blip r:embed="rId5"/>
-          <a:stretch>
-            <a:fillRect/>
-          </a:stretch>
-        </p:blipFill>
-        <p:spPr>
-          <a:xfrm>
-            <a:off x="2342907" y="4874722"/>
-            <a:ext cx="5080454" cy="2728255"/>
-          </a:xfrm>
-          <a:prstGeom prst="rect">
-            <a:avLst/>
-          </a:prstGeom>
-        </p:spPr>
-      </p:pic>
-      <p:sp>
-        <p:nvSpPr>
-          <p:cNvPr id="6" name="Rectangle 5">
-            <a:extLst>
-              <a:ext uri="{FF2B5EF4-FFF2-40B4-BE49-F238E27FC236}">
-                <a16:creationId xmlns:a16="http://schemas.microsoft.com/office/drawing/2014/main" id="{FA2F1790-7007-61EE-652D-78BC43D76B3E}"/>
-              </a:ext>
-            </a:extLst>
-          </p:cNvPr>
-          <p:cNvSpPr/>
-          <p:nvPr/>
-        </p:nvSpPr>
-        <p:spPr>
-          <a:xfrm>
-            <a:off x="3762422" y="1189086"/>
-            <a:ext cx="2100654" cy="3489515"/>
-          </a:xfrm>
-          <a:prstGeom prst="rect">
-            <a:avLst/>
-          </a:prstGeom>
-          <a:noFill/>
-          <a:ln w="12700"/>
-        </p:spPr>
-        <p:style>
-          <a:lnRef idx="2">
-            <a:schemeClr val="accent1">
-              <a:shade val="15000"/>
-            </a:schemeClr>
-          </a:lnRef>
-          <a:fillRef idx="1">
-            <a:schemeClr val="accent1"/>
-          </a:fillRef>
-          <a:effectRef idx="0">
-            <a:schemeClr val="accent1"/>
-          </a:effectRef>
-          <a:fontRef idx="minor">
-            <a:schemeClr val="lt1"/>
-          </a:fontRef>
-        </p:style>
-        <p:txBody>
-          <a:bodyPr rtlCol="0" anchor="ctr"/>
-          <a:lstStyle/>
-          <a:p>
-            <a:pPr algn="ctr"/>
-            <a:endParaRPr lang="en-US" sz="2640"/>
-          </a:p>
-        </p:txBody>
-      </p:sp>
-      <p:sp>
-        <p:nvSpPr>
-          <p:cNvPr id="8" name="Rectangle 7">
-            <a:extLst>
-              <a:ext uri="{FF2B5EF4-FFF2-40B4-BE49-F238E27FC236}">
-                <a16:creationId xmlns:a16="http://schemas.microsoft.com/office/drawing/2014/main" id="{399F9235-35B4-6CC5-2915-C5587B47219C}"/>
-              </a:ext>
-            </a:extLst>
-          </p:cNvPr>
-          <p:cNvSpPr/>
-          <p:nvPr/>
-        </p:nvSpPr>
-        <p:spPr>
-          <a:xfrm>
-            <a:off x="5859735" y="1189085"/>
-            <a:ext cx="1563627" cy="3496772"/>
-          </a:xfrm>
-          <a:prstGeom prst="rect">
-            <a:avLst/>
-          </a:prstGeom>
-          <a:noFill/>
-          <a:ln w="12700"/>
-        </p:spPr>
-        <p:style>
-          <a:lnRef idx="2">
-            <a:schemeClr val="accent1">
-              <a:shade val="15000"/>
-            </a:schemeClr>
-          </a:lnRef>
-          <a:fillRef idx="1">
-            <a:schemeClr val="accent1"/>
-          </a:fillRef>
-          <a:effectRef idx="0">
-            <a:schemeClr val="accent1"/>
-          </a:effectRef>
-          <a:fontRef idx="minor">
-            <a:schemeClr val="lt1"/>
-          </a:fontRef>
-        </p:style>
-        <p:txBody>
-          <a:bodyPr rtlCol="0" anchor="ctr"/>
-          <a:lstStyle/>
-          <a:p>
-            <a:pPr algn="ctr"/>
-            <a:endParaRPr lang="en-US" sz="2640"/>
-          </a:p>
-        </p:txBody>
-      </p:sp>
-    </p:spTree>
-    <p:extLst>
-      <p:ext uri="{BB962C8B-B14F-4D97-AF65-F5344CB8AC3E}">
-        <p14:creationId xmlns:p14="http://schemas.microsoft.com/office/powerpoint/2010/main" val="2984753816"/>
-      </p:ext>
-    </p:extLst>
-  </p:cSld>
-  <p:clrMapOvr>
-    <a:masterClrMapping/>
-  </p:clrMapOvr>
-</p:sld>
-</file>
-
-<file path=ppt/slides/slide5.xml><?xml version="1.0" encoding="utf-8"?>
-<p:sld xmlns:a="http://schemas.openxmlformats.org/drawingml/2006/main" xmlns:r="http://schemas.openxmlformats.org/officeDocument/2006/relationships" xmlns:p="http://schemas.openxmlformats.org/presentationml/2006/main">
-  <p:cSld>
-    <p:spTree>
-      <p:nvGrpSpPr>
-        <p:cNvPr id="1" name=""/>
-        <p:cNvGrpSpPr/>
-        <p:nvPr/>
-      </p:nvGrpSpPr>
-      <p:grpSpPr>
-        <a:xfrm>
-          <a:off x="0" y="0"/>
-          <a:ext cx="0" cy="0"/>
-          <a:chOff x="0" y="0"/>
-          <a:chExt cx="0" cy="0"/>
-        </a:xfrm>
-      </p:grpSpPr>
-      <p:pic>
-        <p:nvPicPr>
-          <p:cNvPr id="5" name="Picture 4">
-            <a:extLst>
-              <a:ext uri="{FF2B5EF4-FFF2-40B4-BE49-F238E27FC236}">
-                <a16:creationId xmlns:a16="http://schemas.microsoft.com/office/drawing/2014/main" id="{60579976-3093-3C4F-807D-51C4F18332B1}"/>
-              </a:ext>
-            </a:extLst>
-          </p:cNvPr>
-          <p:cNvPicPr>
-            <a:picLocks noChangeAspect="1"/>
-          </p:cNvPicPr>
-          <p:nvPr/>
-        </p:nvPicPr>
-        <p:blipFill>
-          <a:blip r:embed="rId2"/>
-          <a:srcRect r="73453" b="72228"/>
-          <a:stretch>
-            <a:fillRect/>
-          </a:stretch>
-        </p:blipFill>
-        <p:spPr>
-          <a:xfrm>
-            <a:off x="95617" y="249665"/>
-            <a:ext cx="2954560" cy="1513040"/>
-          </a:xfrm>
-          <a:prstGeom prst="rect">
-            <a:avLst/>
-          </a:prstGeom>
-        </p:spPr>
-      </p:pic>
-      <p:pic>
-        <p:nvPicPr>
-          <p:cNvPr id="7" name="Picture 6">
-            <a:extLst>
-              <a:ext uri="{FF2B5EF4-FFF2-40B4-BE49-F238E27FC236}">
-                <a16:creationId xmlns:a16="http://schemas.microsoft.com/office/drawing/2014/main" id="{EA1412E5-172C-A208-9DA7-312D2A21423A}"/>
-              </a:ext>
-            </a:extLst>
-          </p:cNvPr>
-          <p:cNvPicPr>
-            <a:picLocks noChangeAspect="1"/>
-          </p:cNvPicPr>
-          <p:nvPr/>
-        </p:nvPicPr>
-        <p:blipFill>
-          <a:blip r:embed="rId2"/>
-          <a:srcRect l="51599" r="458" b="72228"/>
-          <a:stretch>
-            <a:fillRect/>
-          </a:stretch>
-        </p:blipFill>
-        <p:spPr>
-          <a:xfrm>
-            <a:off x="3233800" y="154106"/>
-            <a:ext cx="3126119" cy="1704157"/>
-          </a:xfrm>
-          <a:prstGeom prst="rect">
-            <a:avLst/>
-          </a:prstGeom>
-        </p:spPr>
-      </p:pic>
-      <p:pic>
-        <p:nvPicPr>
-          <p:cNvPr id="9" name="Picture 8">
-            <a:extLst>
-              <a:ext uri="{FF2B5EF4-FFF2-40B4-BE49-F238E27FC236}">
-                <a16:creationId xmlns:a16="http://schemas.microsoft.com/office/drawing/2014/main" id="{678ED9A4-37EC-0FE1-84A1-6CF4D93BA7CE}"/>
-              </a:ext>
-            </a:extLst>
-          </p:cNvPr>
-          <p:cNvPicPr>
-            <a:picLocks noChangeAspect="1"/>
-          </p:cNvPicPr>
-          <p:nvPr/>
-        </p:nvPicPr>
-        <p:blipFill>
-          <a:blip r:embed="rId2"/>
-          <a:srcRect l="51599" t="26799" r="15981" b="52282"/>
-          <a:stretch>
-            <a:fillRect/>
-          </a:stretch>
-        </p:blipFill>
-        <p:spPr>
-          <a:xfrm>
-            <a:off x="3233800" y="1698745"/>
-            <a:ext cx="1814994" cy="1478668"/>
-          </a:xfrm>
-          <a:prstGeom prst="rect">
-            <a:avLst/>
-          </a:prstGeom>
-        </p:spPr>
-      </p:pic>
-      <p:pic>
-        <p:nvPicPr>
-          <p:cNvPr id="11" name="Picture 10">
-            <a:extLst>
-              <a:ext uri="{FF2B5EF4-FFF2-40B4-BE49-F238E27FC236}">
-                <a16:creationId xmlns:a16="http://schemas.microsoft.com/office/drawing/2014/main" id="{53BDE978-9C1F-58F6-901C-0495B0A7AC7A}"/>
-              </a:ext>
-            </a:extLst>
-          </p:cNvPr>
-          <p:cNvPicPr>
-            <a:picLocks noChangeAspect="1"/>
-          </p:cNvPicPr>
-          <p:nvPr/>
-        </p:nvPicPr>
-        <p:blipFill>
-          <a:blip r:embed="rId2"/>
-          <a:srcRect l="894" t="28453" r="67136" b="53036"/>
-          <a:stretch>
-            <a:fillRect/>
-          </a:stretch>
-        </p:blipFill>
-        <p:spPr>
-          <a:xfrm>
-            <a:off x="210086" y="1762705"/>
-            <a:ext cx="1567220" cy="1308450"/>
-          </a:xfrm>
-          <a:prstGeom prst="rect">
-            <a:avLst/>
-          </a:prstGeom>
-        </p:spPr>
-      </p:pic>
-      <p:pic>
-        <p:nvPicPr>
-          <p:cNvPr id="13" name="Picture 12">
-            <a:extLst>
-              <a:ext uri="{FF2B5EF4-FFF2-40B4-BE49-F238E27FC236}">
-                <a16:creationId xmlns:a16="http://schemas.microsoft.com/office/drawing/2014/main" id="{42AFE248-205D-3609-E889-5A891712C0A5}"/>
-              </a:ext>
-              <a:ext uri="{C183D7F6-B498-43B3-948B-1728B52AA6E4}">
-                <adec:decorative xmlns:adec="http://schemas.microsoft.com/office/drawing/2017/decorative" val="1"/>
-              </a:ext>
-            </a:extLst>
-          </p:cNvPr>
-          <p:cNvPicPr>
-            <a:picLocks noChangeAspect="1"/>
-          </p:cNvPicPr>
-          <p:nvPr/>
-        </p:nvPicPr>
-        <p:blipFill>
-          <a:blip r:embed="rId3"/>
-          <a:srcRect l="73575" t="65896" r="356" b="990"/>
-          <a:stretch>
-            <a:fillRect/>
-          </a:stretch>
-        </p:blipFill>
-        <p:spPr>
-          <a:xfrm>
-            <a:off x="1792642" y="1818302"/>
-            <a:ext cx="1425822" cy="1423071"/>
-          </a:xfrm>
-          <a:prstGeom prst="rect">
-            <a:avLst/>
-          </a:prstGeom>
-        </p:spPr>
-      </p:pic>
-      <p:pic>
-        <p:nvPicPr>
-          <p:cNvPr id="15" name="Picture 14">
-            <a:extLst>
-              <a:ext uri="{FF2B5EF4-FFF2-40B4-BE49-F238E27FC236}">
-                <a16:creationId xmlns:a16="http://schemas.microsoft.com/office/drawing/2014/main" id="{C5875C78-6BBF-3750-ECFB-1E0C101CD9F1}"/>
-              </a:ext>
-              <a:ext uri="{C183D7F6-B498-43B3-948B-1728B52AA6E4}">
-                <adec:decorative xmlns:adec="http://schemas.microsoft.com/office/drawing/2017/decorative" val="1"/>
-              </a:ext>
-            </a:extLst>
-          </p:cNvPr>
-          <p:cNvPicPr>
-            <a:picLocks noChangeAspect="1"/>
-          </p:cNvPicPr>
-          <p:nvPr/>
-        </p:nvPicPr>
-        <p:blipFill>
-          <a:blip r:embed="rId3"/>
-          <a:srcRect l="73575" t="65896" r="356" b="990"/>
-          <a:stretch>
-            <a:fillRect/>
-          </a:stretch>
-        </p:blipFill>
-        <p:spPr>
-          <a:xfrm>
-            <a:off x="5011110" y="1840987"/>
-            <a:ext cx="1425822" cy="1423071"/>
-          </a:xfrm>
-          <a:prstGeom prst="rect">
-            <a:avLst/>
-          </a:prstGeom>
-        </p:spPr>
-      </p:pic>
-      <p:pic>
-        <p:nvPicPr>
-          <p:cNvPr id="17" name="Picture 16">
-            <a:extLst>
-              <a:ext uri="{FF2B5EF4-FFF2-40B4-BE49-F238E27FC236}">
-                <a16:creationId xmlns:a16="http://schemas.microsoft.com/office/drawing/2014/main" id="{03E720A0-359A-4BD7-6D48-A7DEA4078F27}"/>
-              </a:ext>
-            </a:extLst>
-          </p:cNvPr>
-          <p:cNvPicPr>
-            <a:picLocks noChangeAspect="1"/>
-          </p:cNvPicPr>
-          <p:nvPr/>
-        </p:nvPicPr>
-        <p:blipFill>
-          <a:blip r:embed="rId4"/>
-          <a:srcRect l="1" r="74268" b="48027"/>
-          <a:stretch>
-            <a:fillRect/>
-          </a:stretch>
-        </p:blipFill>
-        <p:spPr>
-          <a:xfrm>
-            <a:off x="95618" y="3219321"/>
-            <a:ext cx="1628680" cy="1704157"/>
-          </a:xfrm>
-          <a:prstGeom prst="rect">
-            <a:avLst/>
-          </a:prstGeom>
-        </p:spPr>
-      </p:pic>
-      <p:pic>
-        <p:nvPicPr>
-          <p:cNvPr id="19" name="Picture 18">
-            <a:extLst>
-              <a:ext uri="{FF2B5EF4-FFF2-40B4-BE49-F238E27FC236}">
-                <a16:creationId xmlns:a16="http://schemas.microsoft.com/office/drawing/2014/main" id="{4E27B7C4-94E9-F4E7-9ACB-D06E48377118}"/>
-              </a:ext>
-            </a:extLst>
-          </p:cNvPr>
-          <p:cNvPicPr>
-            <a:picLocks noChangeAspect="1"/>
-          </p:cNvPicPr>
-          <p:nvPr/>
-        </p:nvPicPr>
-        <p:blipFill>
-          <a:blip r:embed="rId5"/>
-          <a:stretch>
-            <a:fillRect/>
-          </a:stretch>
-        </p:blipFill>
-        <p:spPr>
-          <a:xfrm>
-            <a:off x="210085" y="4965386"/>
-            <a:ext cx="5798756" cy="3113991"/>
-          </a:xfrm>
-          <a:prstGeom prst="rect">
-            <a:avLst/>
-          </a:prstGeom>
-        </p:spPr>
-      </p:pic>
-      <p:sp>
-        <p:nvSpPr>
-          <p:cNvPr id="21" name="Rectangle 20">
-            <a:extLst>
-              <a:ext uri="{FF2B5EF4-FFF2-40B4-BE49-F238E27FC236}">
-                <a16:creationId xmlns:a16="http://schemas.microsoft.com/office/drawing/2014/main" id="{E682172D-4804-821B-9032-693804A487A1}"/>
-              </a:ext>
-            </a:extLst>
-          </p:cNvPr>
-          <p:cNvSpPr/>
-          <p:nvPr/>
-        </p:nvSpPr>
-        <p:spPr>
-          <a:xfrm>
-            <a:off x="9575393" y="1870964"/>
-            <a:ext cx="2100654" cy="3489515"/>
-          </a:xfrm>
-          <a:prstGeom prst="rect">
-            <a:avLst/>
-          </a:prstGeom>
-          <a:noFill/>
-          <a:ln w="12700"/>
-        </p:spPr>
-        <p:style>
-          <a:lnRef idx="2">
-            <a:schemeClr val="accent1">
-              <a:shade val="15000"/>
-            </a:schemeClr>
-          </a:lnRef>
-          <a:fillRef idx="1">
-            <a:schemeClr val="accent1"/>
-          </a:fillRef>
-          <a:effectRef idx="0">
-            <a:schemeClr val="accent1"/>
-          </a:effectRef>
-          <a:fontRef idx="minor">
-            <a:schemeClr val="lt1"/>
-          </a:fontRef>
-        </p:style>
-        <p:txBody>
-          <a:bodyPr rtlCol="0" anchor="ctr"/>
-          <a:lstStyle/>
-          <a:p>
-            <a:pPr algn="ctr"/>
-            <a:endParaRPr lang="en-US" sz="2640"/>
-          </a:p>
-        </p:txBody>
-      </p:sp>
-      <p:sp>
-        <p:nvSpPr>
-          <p:cNvPr id="23" name="Rectangle 22">
-            <a:extLst>
-              <a:ext uri="{FF2B5EF4-FFF2-40B4-BE49-F238E27FC236}">
-                <a16:creationId xmlns:a16="http://schemas.microsoft.com/office/drawing/2014/main" id="{0634B715-16B4-0F8B-052B-B872B64588EE}"/>
-              </a:ext>
-            </a:extLst>
-          </p:cNvPr>
-          <p:cNvSpPr/>
-          <p:nvPr/>
-        </p:nvSpPr>
-        <p:spPr>
-          <a:xfrm>
-            <a:off x="11672706" y="1870963"/>
-            <a:ext cx="1563627" cy="3496772"/>
-          </a:xfrm>
-          <a:prstGeom prst="rect">
-            <a:avLst/>
-          </a:prstGeom>
-          <a:noFill/>
-          <a:ln w="12700"/>
-        </p:spPr>
-        <p:style>
-          <a:lnRef idx="2">
-            <a:schemeClr val="accent1">
-              <a:shade val="15000"/>
-            </a:schemeClr>
-          </a:lnRef>
-          <a:fillRef idx="1">
-            <a:schemeClr val="accent1"/>
-          </a:fillRef>
-          <a:effectRef idx="0">
-            <a:schemeClr val="accent1"/>
-          </a:effectRef>
-          <a:fontRef idx="minor">
-            <a:schemeClr val="lt1"/>
-          </a:fontRef>
-        </p:style>
-        <p:txBody>
-          <a:bodyPr rtlCol="0" anchor="ctr"/>
-          <a:lstStyle/>
-          <a:p>
-            <a:pPr algn="ctr"/>
-            <a:endParaRPr lang="en-US" sz="2640"/>
-          </a:p>
-        </p:txBody>
-      </p:sp>
-      <p:pic>
-        <p:nvPicPr>
-          <p:cNvPr id="25" name="Picture 24">
-            <a:extLst>
-              <a:ext uri="{FF2B5EF4-FFF2-40B4-BE49-F238E27FC236}">
-                <a16:creationId xmlns:a16="http://schemas.microsoft.com/office/drawing/2014/main" id="{2AD0FA0D-DDA1-B98E-D70E-0B1F8B41DD43}"/>
-              </a:ext>
-            </a:extLst>
-          </p:cNvPr>
-          <p:cNvPicPr>
-            <a:picLocks noChangeAspect="1"/>
-          </p:cNvPicPr>
-          <p:nvPr/>
-        </p:nvPicPr>
-        <p:blipFill>
-          <a:blip r:embed="rId4"/>
-          <a:srcRect l="25757" t="51011" r="49397"/>
-          <a:stretch>
-            <a:fillRect/>
-          </a:stretch>
-        </p:blipFill>
-        <p:spPr>
-          <a:xfrm>
-            <a:off x="5048794" y="3350704"/>
-            <a:ext cx="1572619" cy="1606321"/>
-          </a:xfrm>
-          <a:prstGeom prst="rect">
-            <a:avLst/>
-          </a:prstGeom>
-        </p:spPr>
-      </p:pic>
-      <p:pic>
-        <p:nvPicPr>
-          <p:cNvPr id="27" name="Picture 26">
-            <a:extLst>
-              <a:ext uri="{FF2B5EF4-FFF2-40B4-BE49-F238E27FC236}">
-                <a16:creationId xmlns:a16="http://schemas.microsoft.com/office/drawing/2014/main" id="{EAD88213-17B9-EE3C-85FF-C64F27F4AA4D}"/>
-              </a:ext>
-            </a:extLst>
-          </p:cNvPr>
-          <p:cNvPicPr>
-            <a:picLocks noChangeAspect="1"/>
-          </p:cNvPicPr>
-          <p:nvPr/>
-        </p:nvPicPr>
-        <p:blipFill>
-          <a:blip r:embed="rId4"/>
-          <a:srcRect t="51011" r="74278"/>
-          <a:stretch>
-            <a:fillRect/>
-          </a:stretch>
-        </p:blipFill>
-        <p:spPr>
-          <a:xfrm>
-            <a:off x="1739644" y="3359065"/>
-            <a:ext cx="1628059" cy="1606321"/>
-          </a:xfrm>
-          <a:prstGeom prst="rect">
-            <a:avLst/>
-          </a:prstGeom>
-        </p:spPr>
-      </p:pic>
-      <p:pic>
-        <p:nvPicPr>
-          <p:cNvPr id="29" name="Picture 28">
-            <a:extLst>
-              <a:ext uri="{FF2B5EF4-FFF2-40B4-BE49-F238E27FC236}">
-                <a16:creationId xmlns:a16="http://schemas.microsoft.com/office/drawing/2014/main" id="{E7F703BF-8956-CD72-F7F2-9ED6EB33E977}"/>
-              </a:ext>
-            </a:extLst>
-          </p:cNvPr>
-          <p:cNvPicPr>
-            <a:picLocks noChangeAspect="1"/>
-          </p:cNvPicPr>
-          <p:nvPr/>
-        </p:nvPicPr>
-        <p:blipFill>
-          <a:blip r:embed="rId4"/>
-          <a:srcRect l="25321" r="49834" b="48027"/>
-          <a:stretch>
-            <a:fillRect/>
-          </a:stretch>
-        </p:blipFill>
-        <p:spPr>
-          <a:xfrm>
-            <a:off x="3421939" y="3219320"/>
-            <a:ext cx="1572619" cy="1704157"/>
-          </a:xfrm>
-          <a:prstGeom prst="rect">
-            <a:avLst/>
-          </a:prstGeom>
-        </p:spPr>
-      </p:pic>
-    </p:spTree>
-    <p:extLst>
-      <p:ext uri="{BB962C8B-B14F-4D97-AF65-F5344CB8AC3E}">
-        <p14:creationId xmlns:p14="http://schemas.microsoft.com/office/powerpoint/2010/main" val="1432069628"/>
       </p:ext>
     </p:extLst>
   </p:cSld>

--- a/figures/fig1/fig1.pptx
+++ b/figures/fig1/fig1.pptx
@@ -218,7 +218,7 @@
           <a:p>
             <a:fld id="{2AF9AB64-2C27-7A45-AE48-F5190A12FDDB}" type="datetimeFigureOut">
               <a:rPr lang="en-US" smtClean="0"/>
-              <a:t>10/16/26</a:t>
+              <a:t>10/16/2026</a:t>
             </a:fld>
             <a:endParaRPr lang="en-US"/>
           </a:p>
@@ -700,7 +700,7 @@
           <a:p>
             <a:fld id="{E6ABF4C5-BF9C-40A8-A020-04F3F3965A01}" type="datetimeFigureOut">
               <a:rPr lang="en-US" smtClean="0"/>
-              <a:t>10/16/26</a:t>
+              <a:t>10/16/2026</a:t>
             </a:fld>
             <a:endParaRPr lang="en-US"/>
           </a:p>
@@ -870,7 +870,7 @@
           <a:p>
             <a:fld id="{E6ABF4C5-BF9C-40A8-A020-04F3F3965A01}" type="datetimeFigureOut">
               <a:rPr lang="en-US" smtClean="0"/>
-              <a:t>10/16/26</a:t>
+              <a:t>10/16/2026</a:t>
             </a:fld>
             <a:endParaRPr lang="en-US"/>
           </a:p>
@@ -1050,7 +1050,7 @@
           <a:p>
             <a:fld id="{E6ABF4C5-BF9C-40A8-A020-04F3F3965A01}" type="datetimeFigureOut">
               <a:rPr lang="en-US" smtClean="0"/>
-              <a:t>10/16/26</a:t>
+              <a:t>10/16/2026</a:t>
             </a:fld>
             <a:endParaRPr lang="en-US"/>
           </a:p>
@@ -1220,7 +1220,7 @@
           <a:p>
             <a:fld id="{E6ABF4C5-BF9C-40A8-A020-04F3F3965A01}" type="datetimeFigureOut">
               <a:rPr lang="en-US" smtClean="0"/>
-              <a:t>10/16/26</a:t>
+              <a:t>10/16/2026</a:t>
             </a:fld>
             <a:endParaRPr lang="en-US"/>
           </a:p>
@@ -1466,7 +1466,7 @@
           <a:p>
             <a:fld id="{E6ABF4C5-BF9C-40A8-A020-04F3F3965A01}" type="datetimeFigureOut">
               <a:rPr lang="en-US" smtClean="0"/>
-              <a:t>10/16/26</a:t>
+              <a:t>10/16/2026</a:t>
             </a:fld>
             <a:endParaRPr lang="en-US"/>
           </a:p>
@@ -1698,7 +1698,7 @@
           <a:p>
             <a:fld id="{E6ABF4C5-BF9C-40A8-A020-04F3F3965A01}" type="datetimeFigureOut">
               <a:rPr lang="en-US" smtClean="0"/>
-              <a:t>10/16/26</a:t>
+              <a:t>10/16/2026</a:t>
             </a:fld>
             <a:endParaRPr lang="en-US"/>
           </a:p>
@@ -2065,7 +2065,7 @@
           <a:p>
             <a:fld id="{E6ABF4C5-BF9C-40A8-A020-04F3F3965A01}" type="datetimeFigureOut">
               <a:rPr lang="en-US" smtClean="0"/>
-              <a:t>10/16/26</a:t>
+              <a:t>10/16/2026</a:t>
             </a:fld>
             <a:endParaRPr lang="en-US"/>
           </a:p>
@@ -2183,7 +2183,7 @@
           <a:p>
             <a:fld id="{E6ABF4C5-BF9C-40A8-A020-04F3F3965A01}" type="datetimeFigureOut">
               <a:rPr lang="en-US" smtClean="0"/>
-              <a:t>10/16/26</a:t>
+              <a:t>10/16/2026</a:t>
             </a:fld>
             <a:endParaRPr lang="en-US"/>
           </a:p>
@@ -2278,7 +2278,7 @@
           <a:p>
             <a:fld id="{E6ABF4C5-BF9C-40A8-A020-04F3F3965A01}" type="datetimeFigureOut">
               <a:rPr lang="en-US" smtClean="0"/>
-              <a:t>10/16/26</a:t>
+              <a:t>10/16/2026</a:t>
             </a:fld>
             <a:endParaRPr lang="en-US"/>
           </a:p>
@@ -2555,7 +2555,7 @@
           <a:p>
             <a:fld id="{E6ABF4C5-BF9C-40A8-A020-04F3F3965A01}" type="datetimeFigureOut">
               <a:rPr lang="en-US" smtClean="0"/>
-              <a:t>10/16/26</a:t>
+              <a:t>10/16/2026</a:t>
             </a:fld>
             <a:endParaRPr lang="en-US"/>
           </a:p>
@@ -2812,7 +2812,7 @@
           <a:p>
             <a:fld id="{E6ABF4C5-BF9C-40A8-A020-04F3F3965A01}" type="datetimeFigureOut">
               <a:rPr lang="en-US" smtClean="0"/>
-              <a:t>10/16/26</a:t>
+              <a:t>10/16/2026</a:t>
             </a:fld>
             <a:endParaRPr lang="en-US"/>
           </a:p>
@@ -3025,7 +3025,7 @@
           <a:p>
             <a:fld id="{E6ABF4C5-BF9C-40A8-A020-04F3F3965A01}" type="datetimeFigureOut">
               <a:rPr lang="en-US" smtClean="0"/>
-              <a:t>10/16/26</a:t>
+              <a:t>10/16/2026</a:t>
             </a:fld>
             <a:endParaRPr lang="en-US"/>
           </a:p>
@@ -3450,8 +3450,8 @@
         </p:nvSpPr>
         <p:spPr>
           <a:xfrm>
-            <a:off x="457200" y="457200"/>
-            <a:ext cx="3177153" cy="1653119"/>
+            <a:off x="457200" y="457201"/>
+            <a:ext cx="3177153" cy="1303020"/>
           </a:xfrm>
           <a:prstGeom prst="rect">
             <a:avLst/>
@@ -3504,8 +3504,8 @@
         </p:nvSpPr>
         <p:spPr>
           <a:xfrm>
-            <a:off x="457200" y="2123593"/>
-            <a:ext cx="2315798" cy="2557165"/>
+            <a:off x="457200" y="1760221"/>
+            <a:ext cx="2315798" cy="2920537"/>
           </a:xfrm>
           <a:prstGeom prst="rect">
             <a:avLst/>
@@ -4356,7 +4356,7 @@
       </p:sp>
       <p:sp>
         <p:nvSpPr>
-          <p:cNvPr id="34" name="fig1_C">
+          <p:cNvPr id="34" name="fig1_D">
             <a:extLst>
               <a:ext uri="{FF2B5EF4-FFF2-40B4-BE49-F238E27FC236}">
                 <a16:creationId xmlns:a16="http://schemas.microsoft.com/office/drawing/2014/main" id="{24E5BCC2-7E0F-D286-C810-3EE8B6DAFAF0}"/>
@@ -4368,7 +4368,7 @@
         </p:nvSpPr>
         <p:spPr>
           <a:xfrm>
-            <a:off x="2789466" y="2123593"/>
+            <a:off x="2781234" y="3058143"/>
             <a:ext cx="844883" cy="804892"/>
           </a:xfrm>
           <a:prstGeom prst="rect">
@@ -4403,14 +4403,14 @@
                   <a:schemeClr val="tx1"/>
                 </a:solidFill>
               </a:rPr>
-              <a:t>C</a:t>
-            </a:r>
-          </a:p>
-        </p:txBody>
-      </p:sp>
-      <p:sp>
-        <p:nvSpPr>
-          <p:cNvPr id="35" name="fig1_D">
+              <a:t>D</a:t>
+            </a:r>
+          </a:p>
+        </p:txBody>
+      </p:sp>
+      <p:sp>
+        <p:nvSpPr>
+          <p:cNvPr id="35" name="fig1_E">
             <a:extLst>
               <a:ext uri="{FF2B5EF4-FFF2-40B4-BE49-F238E27FC236}">
                 <a16:creationId xmlns:a16="http://schemas.microsoft.com/office/drawing/2014/main" id="{F4B1E1FB-07B4-88CB-999F-887A4141C55B}"/>
@@ -4422,7 +4422,7 @@
         </p:nvSpPr>
         <p:spPr>
           <a:xfrm>
-            <a:off x="2785652" y="2989424"/>
+            <a:off x="2781234" y="3875866"/>
             <a:ext cx="852510" cy="804892"/>
           </a:xfrm>
           <a:prstGeom prst="rect">
@@ -4457,14 +4457,14 @@
                   <a:schemeClr val="tx1"/>
                 </a:solidFill>
               </a:rPr>
-              <a:t>D</a:t>
-            </a:r>
-          </a:p>
-        </p:txBody>
-      </p:sp>
-      <p:sp>
-        <p:nvSpPr>
-          <p:cNvPr id="36" name="fig1_E">
+              <a:t>E</a:t>
+            </a:r>
+          </a:p>
+        </p:txBody>
+      </p:sp>
+      <p:sp>
+        <p:nvSpPr>
+          <p:cNvPr id="36" name="fig1_C">
             <a:extLst>
               <a:ext uri="{FF2B5EF4-FFF2-40B4-BE49-F238E27FC236}">
                 <a16:creationId xmlns:a16="http://schemas.microsoft.com/office/drawing/2014/main" id="{762D5EEB-8E7C-296E-BD16-4EC126DD9A92}"/>
@@ -4476,8 +4476,8 @@
         </p:nvSpPr>
         <p:spPr>
           <a:xfrm>
-            <a:off x="2789466" y="3855255"/>
-            <a:ext cx="844883" cy="825503"/>
+            <a:off x="2781234" y="1775440"/>
+            <a:ext cx="844883" cy="1282703"/>
           </a:xfrm>
           <a:prstGeom prst="rect">
             <a:avLst/>
@@ -4511,7 +4511,7 @@
                   <a:schemeClr val="tx1"/>
                 </a:solidFill>
               </a:rPr>
-              <a:t>E</a:t>
+              <a:t>C</a:t>
             </a:r>
           </a:p>
         </p:txBody>

--- a/figures/fig1/fig1.pptx
+++ b/figures/fig1/fig1.pptx
@@ -3450,8 +3450,8 @@
         </p:nvSpPr>
         <p:spPr>
           <a:xfrm>
-            <a:off x="457200" y="457201"/>
-            <a:ext cx="3177153" cy="1303020"/>
+            <a:off x="457200" y="457200"/>
+            <a:ext cx="3177153" cy="1448689"/>
           </a:xfrm>
           <a:prstGeom prst="rect">
             <a:avLst/>
@@ -3504,8 +3504,8 @@
         </p:nvSpPr>
         <p:spPr>
           <a:xfrm>
-            <a:off x="457200" y="1760221"/>
-            <a:ext cx="2315798" cy="2920537"/>
+            <a:off x="457200" y="1918721"/>
+            <a:ext cx="2315798" cy="2762037"/>
           </a:xfrm>
           <a:prstGeom prst="rect">
             <a:avLst/>
@@ -4476,8 +4476,8 @@
         </p:nvSpPr>
         <p:spPr>
           <a:xfrm>
-            <a:off x="2781234" y="1775440"/>
-            <a:ext cx="844883" cy="1282703"/>
+            <a:off x="2781234" y="1918721"/>
+            <a:ext cx="844883" cy="1139422"/>
           </a:xfrm>
           <a:prstGeom prst="rect">
             <a:avLst/>
